--- a/9_documentation/course/TIP4PATLIBS_1_Workshop_v1.pptx
+++ b/9_documentation/course/TIP4PATLIBS_1_Workshop_v1.pptx
@@ -5,28 +5,28 @@
     <p:sldMasterId id="2147483648" r:id="rId1"/>
   </p:sldMasterIdLst>
   <p:sldIdLst>
-    <p:sldId id="256" r:id="rId2"/>
-    <p:sldId id="257" r:id="rId3"/>
-    <p:sldId id="258" r:id="rId4"/>
-    <p:sldId id="259" r:id="rId5"/>
-    <p:sldId id="260" r:id="rId6"/>
-    <p:sldId id="261" r:id="rId7"/>
-    <p:sldId id="262" r:id="rId8"/>
-    <p:sldId id="263" r:id="rId9"/>
-    <p:sldId id="264" r:id="rId10"/>
-    <p:sldId id="265" r:id="rId11"/>
-    <p:sldId id="266" r:id="rId12"/>
-    <p:sldId id="267" r:id="rId13"/>
-    <p:sldId id="268" r:id="rId14"/>
-    <p:sldId id="269" r:id="rId15"/>
-    <p:sldId id="270" r:id="rId16"/>
-    <p:sldId id="271" r:id="rId17"/>
-    <p:sldId id="272" r:id="rId18"/>
-    <p:sldId id="273" r:id="rId19"/>
-    <p:sldId id="274" r:id="rId20"/>
-    <p:sldId id="275" r:id="rId21"/>
+    <p:sldId id="256" r:id="rId7"/>
+    <p:sldId id="257" r:id="rId8"/>
+    <p:sldId id="258" r:id="rId9"/>
+    <p:sldId id="259" r:id="rId10"/>
+    <p:sldId id="260" r:id="rId11"/>
+    <p:sldId id="261" r:id="rId12"/>
+    <p:sldId id="262" r:id="rId13"/>
+    <p:sldId id="263" r:id="rId14"/>
+    <p:sldId id="264" r:id="rId15"/>
+    <p:sldId id="265" r:id="rId16"/>
+    <p:sldId id="266" r:id="rId17"/>
+    <p:sldId id="267" r:id="rId18"/>
+    <p:sldId id="268" r:id="rId19"/>
+    <p:sldId id="269" r:id="rId20"/>
+    <p:sldId id="270" r:id="rId21"/>
+    <p:sldId id="271" r:id="rId22"/>
+    <p:sldId id="272" r:id="rId23"/>
+    <p:sldId id="273" r:id="rId24"/>
+    <p:sldId id="274" r:id="rId25"/>
+    <p:sldId id="275" r:id="rId26"/>
   </p:sldIdLst>
-  <p:sldSz cx="12192000" cy="6858000"/>
+  <p:sldSz cx="12191695" cy="6858000" type="screen4x3"/>
   <p:notesSz cx="6858000" cy="9144000"/>
   <p:defaultTextStyle>
     <a:defPPr>
@@ -123,22 +123,6 @@
       </a:defRPr>
     </a:lvl9pPr>
   </p:defaultTextStyle>
-  <p:extLst>
-    <p:ext uri="{EFAFB233-063F-42B5-8137-9DF3F51BA10A}">
-      <p15:sldGuideLst xmlns:p15="http://schemas.microsoft.com/office/powerpoint/2012/main">
-        <p15:guide id="1" orient="horz" pos="2160">
-          <p15:clr>
-            <a:srgbClr val="A4A3A4"/>
-          </p15:clr>
-        </p15:guide>
-        <p15:guide id="2" pos="2880">
-          <p15:clr>
-            <a:srgbClr val="A4A3A4"/>
-          </p15:clr>
-        </p15:guide>
-      </p15:sldGuideLst>
-    </p:ext>
-  </p:extLst>
 </p:presentation>
 </file>
 
@@ -180,9 +164,10 @@
           <a:lstStyle/>
           <a:p>
             <a:r>
-              <a:rPr lang="en-US"/>
+              <a:rPr lang="en-US" smtClean="0"/>
               <a:t>Click to edit Master title style</a:t>
             </a:r>
+            <a:endParaRPr lang="en-US"/>
           </a:p>
         </p:txBody>
       </p:sp>
@@ -298,9 +283,10 @@
           </a:lstStyle>
           <a:p>
             <a:r>
-              <a:rPr lang="en-US"/>
+              <a:rPr lang="en-US" smtClean="0"/>
               <a:t>Click to edit Master subtitle style</a:t>
             </a:r>
+            <a:endParaRPr lang="en-US"/>
           </a:p>
         </p:txBody>
       </p:sp>
@@ -321,7 +307,7 @@
           <a:p>
             <a:fld id="{5BCAD085-E8A6-8845-BD4E-CB4CCA059FC4}" type="datetimeFigureOut">
               <a:rPr lang="en-US" smtClean="0"/>
-              <a:t>8/26/26</a:t>
+              <a:t>1/27/13</a:t>
             </a:fld>
             <a:endParaRPr lang="en-US"/>
           </a:p>
@@ -415,9 +401,10 @@
           <a:lstStyle/>
           <a:p>
             <a:r>
-              <a:rPr lang="en-US"/>
+              <a:rPr lang="en-US" smtClean="0"/>
               <a:t>Click to edit Master title style</a:t>
             </a:r>
+            <a:endParaRPr lang="en-US"/>
           </a:p>
         </p:txBody>
       </p:sp>
@@ -438,37 +425,38 @@
           <a:p>
             <a:pPr lvl="0"/>
             <a:r>
-              <a:rPr lang="en-US"/>
+              <a:rPr lang="en-US" smtClean="0"/>
               <a:t>Click to edit Master text styles</a:t>
             </a:r>
           </a:p>
           <a:p>
             <a:pPr lvl="1"/>
             <a:r>
-              <a:rPr lang="en-US"/>
+              <a:rPr lang="en-US" smtClean="0"/>
               <a:t>Second level</a:t>
             </a:r>
           </a:p>
           <a:p>
             <a:pPr lvl="2"/>
             <a:r>
-              <a:rPr lang="en-US"/>
+              <a:rPr lang="en-US" smtClean="0"/>
               <a:t>Third level</a:t>
             </a:r>
           </a:p>
           <a:p>
             <a:pPr lvl="3"/>
             <a:r>
-              <a:rPr lang="en-US"/>
+              <a:rPr lang="en-US" smtClean="0"/>
               <a:t>Fourth level</a:t>
             </a:r>
           </a:p>
           <a:p>
             <a:pPr lvl="4"/>
             <a:r>
-              <a:rPr lang="en-US"/>
+              <a:rPr lang="en-US" smtClean="0"/>
               <a:t>Fifth level</a:t>
             </a:r>
+            <a:endParaRPr lang="en-US"/>
           </a:p>
         </p:txBody>
       </p:sp>
@@ -489,7 +477,7 @@
           <a:p>
             <a:fld id="{5BCAD085-E8A6-8845-BD4E-CB4CCA059FC4}" type="datetimeFigureOut">
               <a:rPr lang="en-US" smtClean="0"/>
-              <a:t>8/26/26</a:t>
+              <a:t>1/27/13</a:t>
             </a:fld>
             <a:endParaRPr lang="en-US"/>
           </a:p>
@@ -588,9 +576,10 @@
           <a:lstStyle/>
           <a:p>
             <a:r>
-              <a:rPr lang="en-US"/>
+              <a:rPr lang="en-US" smtClean="0"/>
               <a:t>Click to edit Master title style</a:t>
             </a:r>
+            <a:endParaRPr lang="en-US"/>
           </a:p>
         </p:txBody>
       </p:sp>
@@ -616,37 +605,38 @@
           <a:p>
             <a:pPr lvl="0"/>
             <a:r>
-              <a:rPr lang="en-US"/>
+              <a:rPr lang="en-US" smtClean="0"/>
               <a:t>Click to edit Master text styles</a:t>
             </a:r>
           </a:p>
           <a:p>
             <a:pPr lvl="1"/>
             <a:r>
-              <a:rPr lang="en-US"/>
+              <a:rPr lang="en-US" smtClean="0"/>
               <a:t>Second level</a:t>
             </a:r>
           </a:p>
           <a:p>
             <a:pPr lvl="2"/>
             <a:r>
-              <a:rPr lang="en-US"/>
+              <a:rPr lang="en-US" smtClean="0"/>
               <a:t>Third level</a:t>
             </a:r>
           </a:p>
           <a:p>
             <a:pPr lvl="3"/>
             <a:r>
-              <a:rPr lang="en-US"/>
+              <a:rPr lang="en-US" smtClean="0"/>
               <a:t>Fourth level</a:t>
             </a:r>
           </a:p>
           <a:p>
             <a:pPr lvl="4"/>
             <a:r>
-              <a:rPr lang="en-US"/>
+              <a:rPr lang="en-US" smtClean="0"/>
               <a:t>Fifth level</a:t>
             </a:r>
+            <a:endParaRPr lang="en-US"/>
           </a:p>
         </p:txBody>
       </p:sp>
@@ -667,7 +657,7 @@
           <a:p>
             <a:fld id="{5BCAD085-E8A6-8845-BD4E-CB4CCA059FC4}" type="datetimeFigureOut">
               <a:rPr lang="en-US" smtClean="0"/>
-              <a:t>8/26/26</a:t>
+              <a:t>1/27/13</a:t>
             </a:fld>
             <a:endParaRPr lang="en-US"/>
           </a:p>
@@ -761,9 +751,10 @@
           <a:lstStyle/>
           <a:p>
             <a:r>
-              <a:rPr lang="en-US"/>
+              <a:rPr lang="en-US" smtClean="0"/>
               <a:t>Click to edit Master title style</a:t>
             </a:r>
+            <a:endParaRPr lang="en-US"/>
           </a:p>
         </p:txBody>
       </p:sp>
@@ -784,37 +775,38 @@
           <a:p>
             <a:pPr lvl="0"/>
             <a:r>
-              <a:rPr lang="en-US"/>
+              <a:rPr lang="en-US" smtClean="0"/>
               <a:t>Click to edit Master text styles</a:t>
             </a:r>
           </a:p>
           <a:p>
             <a:pPr lvl="1"/>
             <a:r>
-              <a:rPr lang="en-US"/>
+              <a:rPr lang="en-US" smtClean="0"/>
               <a:t>Second level</a:t>
             </a:r>
           </a:p>
           <a:p>
             <a:pPr lvl="2"/>
             <a:r>
-              <a:rPr lang="en-US"/>
+              <a:rPr lang="en-US" smtClean="0"/>
               <a:t>Third level</a:t>
             </a:r>
           </a:p>
           <a:p>
             <a:pPr lvl="3"/>
             <a:r>
-              <a:rPr lang="en-US"/>
+              <a:rPr lang="en-US" smtClean="0"/>
               <a:t>Fourth level</a:t>
             </a:r>
           </a:p>
           <a:p>
             <a:pPr lvl="4"/>
             <a:r>
-              <a:rPr lang="en-US"/>
+              <a:rPr lang="en-US" smtClean="0"/>
               <a:t>Fifth level</a:t>
             </a:r>
+            <a:endParaRPr lang="en-US"/>
           </a:p>
         </p:txBody>
       </p:sp>
@@ -835,7 +827,7 @@
           <a:p>
             <a:fld id="{5BCAD085-E8A6-8845-BD4E-CB4CCA059FC4}" type="datetimeFigureOut">
               <a:rPr lang="en-US" smtClean="0"/>
-              <a:t>8/26/26</a:t>
+              <a:t>1/27/13</a:t>
             </a:fld>
             <a:endParaRPr lang="en-US"/>
           </a:p>
@@ -938,9 +930,10 @@
           </a:lstStyle>
           <a:p>
             <a:r>
-              <a:rPr lang="en-US"/>
+              <a:rPr lang="en-US" smtClean="0"/>
               <a:t>Click to edit Master title style</a:t>
             </a:r>
+            <a:endParaRPr lang="en-US"/>
           </a:p>
         </p:txBody>
       </p:sp>
@@ -1057,7 +1050,7 @@
           <a:p>
             <a:pPr lvl="0"/>
             <a:r>
-              <a:rPr lang="en-US"/>
+              <a:rPr lang="en-US" smtClean="0"/>
               <a:t>Click to edit Master text styles</a:t>
             </a:r>
           </a:p>
@@ -1080,7 +1073,7 @@
           <a:p>
             <a:fld id="{5BCAD085-E8A6-8845-BD4E-CB4CCA059FC4}" type="datetimeFigureOut">
               <a:rPr lang="en-US" smtClean="0"/>
-              <a:t>8/26/26</a:t>
+              <a:t>1/27/13</a:t>
             </a:fld>
             <a:endParaRPr lang="en-US"/>
           </a:p>
@@ -1174,9 +1167,10 @@
           <a:lstStyle/>
           <a:p>
             <a:r>
-              <a:rPr lang="en-US"/>
+              <a:rPr lang="en-US" smtClean="0"/>
               <a:t>Click to edit Master title style</a:t>
             </a:r>
+            <a:endParaRPr lang="en-US"/>
           </a:p>
         </p:txBody>
       </p:sp>
@@ -1230,37 +1224,38 @@
           <a:p>
             <a:pPr lvl="0"/>
             <a:r>
-              <a:rPr lang="en-US"/>
+              <a:rPr lang="en-US" smtClean="0"/>
               <a:t>Click to edit Master text styles</a:t>
             </a:r>
           </a:p>
           <a:p>
             <a:pPr lvl="1"/>
             <a:r>
-              <a:rPr lang="en-US"/>
+              <a:rPr lang="en-US" smtClean="0"/>
               <a:t>Second level</a:t>
             </a:r>
           </a:p>
           <a:p>
             <a:pPr lvl="2"/>
             <a:r>
-              <a:rPr lang="en-US"/>
+              <a:rPr lang="en-US" smtClean="0"/>
               <a:t>Third level</a:t>
             </a:r>
           </a:p>
           <a:p>
             <a:pPr lvl="3"/>
             <a:r>
-              <a:rPr lang="en-US"/>
+              <a:rPr lang="en-US" smtClean="0"/>
               <a:t>Fourth level</a:t>
             </a:r>
           </a:p>
           <a:p>
             <a:pPr lvl="4"/>
             <a:r>
-              <a:rPr lang="en-US"/>
+              <a:rPr lang="en-US" smtClean="0"/>
               <a:t>Fifth level</a:t>
             </a:r>
+            <a:endParaRPr lang="en-US"/>
           </a:p>
         </p:txBody>
       </p:sp>
@@ -1314,37 +1309,38 @@
           <a:p>
             <a:pPr lvl="0"/>
             <a:r>
-              <a:rPr lang="en-US"/>
+              <a:rPr lang="en-US" smtClean="0"/>
               <a:t>Click to edit Master text styles</a:t>
             </a:r>
           </a:p>
           <a:p>
             <a:pPr lvl="1"/>
             <a:r>
-              <a:rPr lang="en-US"/>
+              <a:rPr lang="en-US" smtClean="0"/>
               <a:t>Second level</a:t>
             </a:r>
           </a:p>
           <a:p>
             <a:pPr lvl="2"/>
             <a:r>
-              <a:rPr lang="en-US"/>
+              <a:rPr lang="en-US" smtClean="0"/>
               <a:t>Third level</a:t>
             </a:r>
           </a:p>
           <a:p>
             <a:pPr lvl="3"/>
             <a:r>
-              <a:rPr lang="en-US"/>
+              <a:rPr lang="en-US" smtClean="0"/>
               <a:t>Fourth level</a:t>
             </a:r>
           </a:p>
           <a:p>
             <a:pPr lvl="4"/>
             <a:r>
-              <a:rPr lang="en-US"/>
+              <a:rPr lang="en-US" smtClean="0"/>
               <a:t>Fifth level</a:t>
             </a:r>
+            <a:endParaRPr lang="en-US"/>
           </a:p>
         </p:txBody>
       </p:sp>
@@ -1365,7 +1361,7 @@
           <a:p>
             <a:fld id="{5BCAD085-E8A6-8845-BD4E-CB4CCA059FC4}" type="datetimeFigureOut">
               <a:rPr lang="en-US" smtClean="0"/>
-              <a:t>8/26/26</a:t>
+              <a:t>1/27/13</a:t>
             </a:fld>
             <a:endParaRPr lang="en-US"/>
           </a:p>
@@ -1463,9 +1459,10 @@
           </a:lstStyle>
           <a:p>
             <a:r>
-              <a:rPr lang="en-US"/>
+              <a:rPr lang="en-US" smtClean="0"/>
               <a:t>Click to edit Master title style</a:t>
             </a:r>
+            <a:endParaRPr lang="en-US"/>
           </a:p>
         </p:txBody>
       </p:sp>
@@ -1528,7 +1525,7 @@
           <a:p>
             <a:pPr lvl="0"/>
             <a:r>
-              <a:rPr lang="en-US"/>
+              <a:rPr lang="en-US" smtClean="0"/>
               <a:t>Click to edit Master text styles</a:t>
             </a:r>
           </a:p>
@@ -1584,37 +1581,38 @@
           <a:p>
             <a:pPr lvl="0"/>
             <a:r>
-              <a:rPr lang="en-US"/>
+              <a:rPr lang="en-US" smtClean="0"/>
               <a:t>Click to edit Master text styles</a:t>
             </a:r>
           </a:p>
           <a:p>
             <a:pPr lvl="1"/>
             <a:r>
-              <a:rPr lang="en-US"/>
+              <a:rPr lang="en-US" smtClean="0"/>
               <a:t>Second level</a:t>
             </a:r>
           </a:p>
           <a:p>
             <a:pPr lvl="2"/>
             <a:r>
-              <a:rPr lang="en-US"/>
+              <a:rPr lang="en-US" smtClean="0"/>
               <a:t>Third level</a:t>
             </a:r>
           </a:p>
           <a:p>
             <a:pPr lvl="3"/>
             <a:r>
-              <a:rPr lang="en-US"/>
+              <a:rPr lang="en-US" smtClean="0"/>
               <a:t>Fourth level</a:t>
             </a:r>
           </a:p>
           <a:p>
             <a:pPr lvl="4"/>
             <a:r>
-              <a:rPr lang="en-US"/>
+              <a:rPr lang="en-US" smtClean="0"/>
               <a:t>Fifth level</a:t>
             </a:r>
+            <a:endParaRPr lang="en-US"/>
           </a:p>
         </p:txBody>
       </p:sp>
@@ -1677,7 +1675,7 @@
           <a:p>
             <a:pPr lvl="0"/>
             <a:r>
-              <a:rPr lang="en-US"/>
+              <a:rPr lang="en-US" smtClean="0"/>
               <a:t>Click to edit Master text styles</a:t>
             </a:r>
           </a:p>
@@ -1733,37 +1731,38 @@
           <a:p>
             <a:pPr lvl="0"/>
             <a:r>
-              <a:rPr lang="en-US"/>
+              <a:rPr lang="en-US" smtClean="0"/>
               <a:t>Click to edit Master text styles</a:t>
             </a:r>
           </a:p>
           <a:p>
             <a:pPr lvl="1"/>
             <a:r>
-              <a:rPr lang="en-US"/>
+              <a:rPr lang="en-US" smtClean="0"/>
               <a:t>Second level</a:t>
             </a:r>
           </a:p>
           <a:p>
             <a:pPr lvl="2"/>
             <a:r>
-              <a:rPr lang="en-US"/>
+              <a:rPr lang="en-US" smtClean="0"/>
               <a:t>Third level</a:t>
             </a:r>
           </a:p>
           <a:p>
             <a:pPr lvl="3"/>
             <a:r>
-              <a:rPr lang="en-US"/>
+              <a:rPr lang="en-US" smtClean="0"/>
               <a:t>Fourth level</a:t>
             </a:r>
           </a:p>
           <a:p>
             <a:pPr lvl="4"/>
             <a:r>
-              <a:rPr lang="en-US"/>
+              <a:rPr lang="en-US" smtClean="0"/>
               <a:t>Fifth level</a:t>
             </a:r>
+            <a:endParaRPr lang="en-US"/>
           </a:p>
         </p:txBody>
       </p:sp>
@@ -1784,7 +1783,7 @@
           <a:p>
             <a:fld id="{5BCAD085-E8A6-8845-BD4E-CB4CCA059FC4}" type="datetimeFigureOut">
               <a:rPr lang="en-US" smtClean="0"/>
-              <a:t>8/26/26</a:t>
+              <a:t>1/27/13</a:t>
             </a:fld>
             <a:endParaRPr lang="en-US"/>
           </a:p>
@@ -1878,9 +1877,10 @@
           <a:lstStyle/>
           <a:p>
             <a:r>
-              <a:rPr lang="en-US"/>
+              <a:rPr lang="en-US" smtClean="0"/>
               <a:t>Click to edit Master title style</a:t>
             </a:r>
+            <a:endParaRPr lang="en-US"/>
           </a:p>
         </p:txBody>
       </p:sp>
@@ -1901,7 +1901,7 @@
           <a:p>
             <a:fld id="{5BCAD085-E8A6-8845-BD4E-CB4CCA059FC4}" type="datetimeFigureOut">
               <a:rPr lang="en-US" smtClean="0"/>
-              <a:t>8/26/26</a:t>
+              <a:t>1/27/13</a:t>
             </a:fld>
             <a:endParaRPr lang="en-US"/>
           </a:p>
@@ -1996,7 +1996,7 @@
           <a:p>
             <a:fld id="{5BCAD085-E8A6-8845-BD4E-CB4CCA059FC4}" type="datetimeFigureOut">
               <a:rPr lang="en-US" smtClean="0"/>
-              <a:t>8/26/26</a:t>
+              <a:t>1/27/13</a:t>
             </a:fld>
             <a:endParaRPr lang="en-US"/>
           </a:p>
@@ -2099,9 +2099,10 @@
           </a:lstStyle>
           <a:p>
             <a:r>
-              <a:rPr lang="en-US"/>
+              <a:rPr lang="en-US" smtClean="0"/>
               <a:t>Click to edit Master title style</a:t>
             </a:r>
+            <a:endParaRPr lang="en-US"/>
           </a:p>
         </p:txBody>
       </p:sp>
@@ -2155,37 +2156,38 @@
           <a:p>
             <a:pPr lvl="0"/>
             <a:r>
-              <a:rPr lang="en-US"/>
+              <a:rPr lang="en-US" smtClean="0"/>
               <a:t>Click to edit Master text styles</a:t>
             </a:r>
           </a:p>
           <a:p>
             <a:pPr lvl="1"/>
             <a:r>
-              <a:rPr lang="en-US"/>
+              <a:rPr lang="en-US" smtClean="0"/>
               <a:t>Second level</a:t>
             </a:r>
           </a:p>
           <a:p>
             <a:pPr lvl="2"/>
             <a:r>
-              <a:rPr lang="en-US"/>
+              <a:rPr lang="en-US" smtClean="0"/>
               <a:t>Third level</a:t>
             </a:r>
           </a:p>
           <a:p>
             <a:pPr lvl="3"/>
             <a:r>
-              <a:rPr lang="en-US"/>
+              <a:rPr lang="en-US" smtClean="0"/>
               <a:t>Fourth level</a:t>
             </a:r>
           </a:p>
           <a:p>
             <a:pPr lvl="4"/>
             <a:r>
-              <a:rPr lang="en-US"/>
+              <a:rPr lang="en-US" smtClean="0"/>
               <a:t>Fifth level</a:t>
             </a:r>
+            <a:endParaRPr lang="en-US"/>
           </a:p>
         </p:txBody>
       </p:sp>
@@ -2248,7 +2250,7 @@
           <a:p>
             <a:pPr lvl="0"/>
             <a:r>
-              <a:rPr lang="en-US"/>
+              <a:rPr lang="en-US" smtClean="0"/>
               <a:t>Click to edit Master text styles</a:t>
             </a:r>
           </a:p>
@@ -2271,7 +2273,7 @@
           <a:p>
             <a:fld id="{5BCAD085-E8A6-8845-BD4E-CB4CCA059FC4}" type="datetimeFigureOut">
               <a:rPr lang="en-US" smtClean="0"/>
-              <a:t>8/26/26</a:t>
+              <a:t>1/27/13</a:t>
             </a:fld>
             <a:endParaRPr lang="en-US"/>
           </a:p>
@@ -2374,9 +2376,10 @@
           </a:lstStyle>
           <a:p>
             <a:r>
-              <a:rPr lang="en-US"/>
+              <a:rPr lang="en-US" smtClean="0"/>
               <a:t>Click to edit Master title style</a:t>
             </a:r>
+            <a:endParaRPr lang="en-US"/>
           </a:p>
         </p:txBody>
       </p:sp>
@@ -2500,7 +2503,7 @@
           <a:p>
             <a:pPr lvl="0"/>
             <a:r>
-              <a:rPr lang="en-US"/>
+              <a:rPr lang="en-US" smtClean="0"/>
               <a:t>Click to edit Master text styles</a:t>
             </a:r>
           </a:p>
@@ -2523,7 +2526,7 @@
           <a:p>
             <a:fld id="{5BCAD085-E8A6-8845-BD4E-CB4CCA059FC4}" type="datetimeFigureOut">
               <a:rPr lang="en-US" smtClean="0"/>
-              <a:t>8/26/26</a:t>
+              <a:t>1/27/13</a:t>
             </a:fld>
             <a:endParaRPr lang="en-US"/>
           </a:p>
@@ -2632,9 +2635,10 @@
           <a:lstStyle/>
           <a:p>
             <a:r>
-              <a:rPr lang="en-US"/>
+              <a:rPr lang="en-US" smtClean="0"/>
               <a:t>Click to edit Master title style</a:t>
             </a:r>
+            <a:endParaRPr lang="en-US"/>
           </a:p>
         </p:txBody>
       </p:sp>
@@ -2665,37 +2669,38 @@
           <a:p>
             <a:pPr lvl="0"/>
             <a:r>
-              <a:rPr lang="en-US"/>
+              <a:rPr lang="en-US" smtClean="0"/>
               <a:t>Click to edit Master text styles</a:t>
             </a:r>
           </a:p>
           <a:p>
             <a:pPr lvl="1"/>
             <a:r>
-              <a:rPr lang="en-US"/>
+              <a:rPr lang="en-US" smtClean="0"/>
               <a:t>Second level</a:t>
             </a:r>
           </a:p>
           <a:p>
             <a:pPr lvl="2"/>
             <a:r>
-              <a:rPr lang="en-US"/>
+              <a:rPr lang="en-US" smtClean="0"/>
               <a:t>Third level</a:t>
             </a:r>
           </a:p>
           <a:p>
             <a:pPr lvl="3"/>
             <a:r>
-              <a:rPr lang="en-US"/>
+              <a:rPr lang="en-US" smtClean="0"/>
               <a:t>Fourth level</a:t>
             </a:r>
           </a:p>
           <a:p>
             <a:pPr lvl="4"/>
             <a:r>
-              <a:rPr lang="en-US"/>
+              <a:rPr lang="en-US" smtClean="0"/>
               <a:t>Fifth level</a:t>
             </a:r>
+            <a:endParaRPr lang="en-US"/>
           </a:p>
         </p:txBody>
       </p:sp>
@@ -2734,7 +2739,7 @@
           <a:p>
             <a:fld id="{5BCAD085-E8A6-8845-BD4E-CB4CCA059FC4}" type="datetimeFigureOut">
               <a:rPr lang="en-US" smtClean="0"/>
-              <a:t>8/26/26</a:t>
+              <a:t>1/27/13</a:t>
             </a:fld>
             <a:endParaRPr lang="en-US"/>
           </a:p>
@@ -3093,7 +3098,7 @@
 </file>
 
 <file path=ppt/slides/slide1.xml><?xml version="1.0" encoding="utf-8"?>
-<p:sld xmlns:a="http://schemas.openxmlformats.org/drawingml/2006/main" xmlns:r="http://schemas.openxmlformats.org/officeDocument/2006/relationships" xmlns:p="http://schemas.openxmlformats.org/presentationml/2006/main">
+<p:sld xmlns:a="http://schemas.openxmlformats.org/drawingml/2006/main" xmlns:p="http://schemas.openxmlformats.org/presentationml/2006/main" xmlns:r="http://schemas.openxmlformats.org/officeDocument/2006/relationships">
   <p:cSld>
     <p:spTree>
       <p:nvGrpSpPr>
@@ -3101,14 +3106,7 @@
         <p:cNvGrpSpPr/>
         <p:nvPr/>
       </p:nvGrpSpPr>
-      <p:grpSpPr>
-        <a:xfrm>
-          <a:off x="0" y="0"/>
-          <a:ext cx="0" cy="0"/>
-          <a:chOff x="0" y="0"/>
-          <a:chExt cx="0" cy="0"/>
-        </a:xfrm>
-      </p:grpSpPr>
+      <p:grpSpPr/>
       <p:sp>
         <p:nvSpPr>
           <p:cNvPr id="2" name="Rectangle 1"/>
@@ -3146,11 +3144,10 @@
           </a:fontRef>
         </p:style>
         <p:txBody>
-          <a:bodyPr wrap="square" rtlCol="0" anchor="ctr"/>
+          <a:bodyPr rtlCol="0" anchor="ctr" wrap="square"/>
           <a:lstStyle/>
           <a:p>
             <a:pPr algn="ctr"/>
-            <a:endParaRPr/>
           </a:p>
         </p:txBody>
       </p:sp>
@@ -3163,15 +3160,15 @@
         <p:spPr>
           <a:xfrm>
             <a:off x="777240" y="566928"/>
-            <a:ext cx="10637215" cy="1239250"/>
-          </a:xfrm>
-          <a:prstGeom prst="rect">
-            <a:avLst/>
-          </a:prstGeom>
-          <a:noFill/>
-        </p:spPr>
-        <p:txBody>
-          <a:bodyPr wrap="square" lIns="0" tIns="0" rIns="0" bIns="0" anchor="t">
+            <a:ext cx="10637215" cy="1371600"/>
+          </a:xfrm>
+          <a:prstGeom prst="rect">
+            <a:avLst/>
+          </a:prstGeom>
+          <a:noFill/>
+        </p:spPr>
+        <p:txBody>
+          <a:bodyPr wrap="square" anchor="t" lIns="0" rIns="0" tIns="0" bIns="0">
             <a:spAutoFit/>
           </a:bodyPr>
           <a:lstStyle/>
@@ -3185,7 +3182,7 @@
               </a:spcAft>
             </a:pPr>
             <a:r>
-              <a:rPr sz="4200" b="1" i="0" dirty="0">
+              <a:rPr sz="4200" b="1" i="0">
                 <a:solidFill>
                   <a:srgbClr val="BE0F05"/>
                 </a:solidFill>
@@ -3204,7 +3201,7 @@
               </a:spcAft>
             </a:pPr>
             <a:r>
-              <a:rPr sz="1600" b="0" i="0" dirty="0">
+              <a:rPr sz="1600" b="0" i="0">
                 <a:solidFill>
                   <a:srgbClr val="1A1A1A"/>
                 </a:solidFill>
@@ -3223,31 +3220,13 @@
               </a:spcAft>
             </a:pPr>
             <a:r>
-              <a:rPr sz="1200" b="0" i="0" dirty="0">
+              <a:rPr sz="1200" b="0" i="0">
                 <a:solidFill>
                   <a:srgbClr val="64748B"/>
                 </a:solidFill>
                 <a:latin typeface="Arial"/>
               </a:rPr>
-              <a:t>PATLIB Workshop · Warsaw · 1</a:t>
-            </a:r>
-            <a:r>
-              <a:rPr lang="de-DE" sz="1200" b="0" i="0" dirty="0">
-                <a:solidFill>
-                  <a:srgbClr val="64748B"/>
-                </a:solidFill>
-                <a:latin typeface="Arial"/>
-              </a:rPr>
-              <a:t>7</a:t>
-            </a:r>
-            <a:r>
-              <a:rPr sz="1200" b="0" i="0" dirty="0">
-                <a:solidFill>
-                  <a:srgbClr val="64748B"/>
-                </a:solidFill>
-                <a:latin typeface="Arial"/>
-              </a:rPr>
-              <a:t> September 2026   ·   Arne Krüger · mtc.berlin  ·  Riccardo Priore · AREA Science Park</a:t>
+              <a:t>PATLIB Workshop · Warsaw · 18 September 2026   ·   Arne Krüger · mtc.berlin  ·  Riccardo Priore · AREA Science Park</a:t>
             </a:r>
           </a:p>
         </p:txBody>
@@ -3291,7 +3270,7 @@
           </a:fontRef>
         </p:style>
         <p:txBody>
-          <a:bodyPr wrap="square" lIns="256032" tIns="146304" rIns="256032" bIns="146304" rtlCol="0" anchor="ctr"/>
+          <a:bodyPr rtlCol="0" anchor="ctr" wrap="square" lIns="256032" rIns="256032" tIns="146304" bIns="146304"/>
           <a:lstStyle/>
           <a:p>
             <a:pPr algn="l">
@@ -3303,7 +3282,7 @@
               </a:spcAft>
             </a:pPr>
             <a:r>
-              <a:rPr sz="1600" b="0" i="1" dirty="0">
+              <a:rPr sz="1300" b="0" i="1">
                 <a:solidFill>
                   <a:srgbClr val="1A1A1A"/>
                 </a:solidFill>
@@ -3353,11 +3332,10 @@
           </a:fontRef>
         </p:style>
         <p:txBody>
-          <a:bodyPr wrap="square" rtlCol="0" anchor="ctr"/>
+          <a:bodyPr rtlCol="0" anchor="ctr" wrap="square"/>
           <a:lstStyle/>
           <a:p>
             <a:pPr algn="ctr"/>
-            <a:endParaRPr/>
           </a:p>
         </p:txBody>
       </p:sp>
@@ -3378,7 +3356,7 @@
           <a:noFill/>
         </p:spPr>
         <p:txBody>
-          <a:bodyPr wrap="square" lIns="0" tIns="0" rIns="0" bIns="0" anchor="t">
+          <a:bodyPr wrap="square" anchor="t" lIns="0" rIns="0" tIns="0" bIns="0">
             <a:spAutoFit/>
           </a:bodyPr>
           <a:lstStyle/>
@@ -3392,7 +3370,7 @@
               </a:spcAft>
             </a:pPr>
             <a:r>
-              <a:rPr sz="1000" b="1" i="0" dirty="0">
+              <a:rPr sz="1000" b="1" i="0">
                 <a:solidFill>
                   <a:srgbClr val="BE0F05"/>
                 </a:solidFill>
@@ -3444,11 +3422,10 @@
           </a:fontRef>
         </p:style>
         <p:txBody>
-          <a:bodyPr wrap="square" rtlCol="0" anchor="ctr"/>
+          <a:bodyPr rtlCol="0" anchor="ctr" wrap="square"/>
           <a:lstStyle/>
           <a:p>
             <a:pPr algn="ctr"/>
-            <a:endParaRPr/>
           </a:p>
         </p:txBody>
       </p:sp>
@@ -3461,15 +3438,15 @@
         <p:spPr>
           <a:xfrm>
             <a:off x="1161288" y="4700016"/>
-            <a:ext cx="3621024" cy="436338"/>
-          </a:xfrm>
-          <a:prstGeom prst="rect">
-            <a:avLst/>
-          </a:prstGeom>
-          <a:noFill/>
-        </p:spPr>
-        <p:txBody>
-          <a:bodyPr wrap="square" lIns="0" tIns="0" rIns="0" bIns="0" anchor="t">
+            <a:ext cx="3438144" cy="548640"/>
+          </a:xfrm>
+          <a:prstGeom prst="rect">
+            <a:avLst/>
+          </a:prstGeom>
+          <a:noFill/>
+        </p:spPr>
+        <p:txBody>
+          <a:bodyPr wrap="square" anchor="t" lIns="0" rIns="0" tIns="0" bIns="0">
             <a:spAutoFit/>
           </a:bodyPr>
           <a:lstStyle/>
@@ -3483,21 +3460,12 @@
               </a:spcAft>
             </a:pPr>
             <a:r>
-              <a:rPr lang="de-DE" sz="1300" b="1" i="0" dirty="0">
+              <a:rPr sz="1300" b="1" i="0">
                 <a:solidFill>
                   <a:srgbClr val="1A1A1A"/>
                 </a:solidFill>
                 <a:latin typeface="Arial"/>
               </a:rPr>
-              <a:t>1 - </a:t>
-            </a:r>
-            <a:r>
-              <a:rPr sz="1300" b="1" i="0" dirty="0">
-                <a:solidFill>
-                  <a:srgbClr val="1A1A1A"/>
-                </a:solidFill>
-                <a:latin typeface="Arial"/>
-              </a:rPr>
               <a:t>Install the assistant, persistently</a:t>
             </a:r>
           </a:p>
@@ -3511,7 +3479,7 @@
               </a:spcAft>
             </a:pPr>
             <a:r>
-              <a:rPr sz="1000" b="0" i="0" dirty="0">
+              <a:rPr sz="1000" b="0" i="0">
                 <a:solidFill>
                   <a:srgbClr val="64748B"/>
                 </a:solidFill>
@@ -3561,11 +3529,10 @@
           </a:fontRef>
         </p:style>
         <p:txBody>
-          <a:bodyPr wrap="square" rtlCol="0" anchor="ctr"/>
+          <a:bodyPr rtlCol="0" anchor="ctr" wrap="square"/>
           <a:lstStyle/>
           <a:p>
             <a:pPr algn="ctr"/>
-            <a:endParaRPr/>
           </a:p>
         </p:txBody>
       </p:sp>
@@ -3586,7 +3553,7 @@
           <a:noFill/>
         </p:spPr>
         <p:txBody>
-          <a:bodyPr wrap="square" lIns="0" tIns="0" rIns="0" bIns="0" anchor="t">
+          <a:bodyPr wrap="square" anchor="t" lIns="0" rIns="0" tIns="0" bIns="0">
             <a:spAutoFit/>
           </a:bodyPr>
           <a:lstStyle/>
@@ -3652,11 +3619,10 @@
           </a:fontRef>
         </p:style>
         <p:txBody>
-          <a:bodyPr wrap="square" rtlCol="0" anchor="ctr"/>
+          <a:bodyPr rtlCol="0" anchor="ctr" wrap="square"/>
           <a:lstStyle/>
           <a:p>
             <a:pPr algn="ctr"/>
-            <a:endParaRPr/>
           </a:p>
         </p:txBody>
       </p:sp>
@@ -3669,15 +3635,15 @@
         <p:spPr>
           <a:xfrm>
             <a:off x="7104888" y="3867912"/>
-            <a:ext cx="3438144" cy="436338"/>
-          </a:xfrm>
-          <a:prstGeom prst="rect">
-            <a:avLst/>
-          </a:prstGeom>
-          <a:noFill/>
-        </p:spPr>
-        <p:txBody>
-          <a:bodyPr wrap="square" lIns="0" tIns="0" rIns="0" bIns="0" anchor="t">
+            <a:ext cx="3438144" cy="548640"/>
+          </a:xfrm>
+          <a:prstGeom prst="rect">
+            <a:avLst/>
+          </a:prstGeom>
+          <a:noFill/>
+        </p:spPr>
+        <p:txBody>
+          <a:bodyPr wrap="square" anchor="t" lIns="0" rIns="0" tIns="0" bIns="0">
             <a:spAutoFit/>
           </a:bodyPr>
           <a:lstStyle/>
@@ -3691,35 +3657,26 @@
               </a:spcAft>
             </a:pPr>
             <a:r>
-              <a:rPr lang="de-DE" sz="1300" b="1" i="0" dirty="0">
+              <a:rPr sz="1300" b="1" i="0">
                 <a:solidFill>
                   <a:srgbClr val="1A1A1A"/>
                 </a:solidFill>
                 <a:latin typeface="Arial"/>
               </a:rPr>
-              <a:t>2</a:t>
-            </a:r>
-            <a:r>
-              <a:rPr sz="1300" b="1" i="0" dirty="0">
-                <a:solidFill>
-                  <a:srgbClr val="1A1A1A"/>
-                </a:solidFill>
-                <a:latin typeface="Arial"/>
-              </a:rPr>
-              <a:t>   A question already asked</a:t>
-            </a:r>
-          </a:p>
-          <a:p>
-            <a:pPr algn="l">
-              <a:lnSpc>
-                <a:spcPct val="125000"/>
-              </a:lnSpc>
-              <a:spcAft>
-                <a:spcPts val="0"/>
-              </a:spcAft>
-            </a:pPr>
-            <a:r>
-              <a:rPr sz="1000" b="0" i="0" dirty="0">
+              <a:t>1   A question already asked</a:t>
+            </a:r>
+          </a:p>
+          <a:p>
+            <a:pPr algn="l">
+              <a:lnSpc>
+                <a:spcPct val="125000"/>
+              </a:lnSpc>
+              <a:spcAft>
+                <a:spcPts val="0"/>
+              </a:spcAft>
+            </a:pPr>
+            <a:r>
+              <a:rPr sz="1000" b="0" i="0">
                 <a:solidFill>
                   <a:srgbClr val="64748B"/>
                 </a:solidFill>
@@ -3771,11 +3728,10 @@
           </a:fontRef>
         </p:style>
         <p:txBody>
-          <a:bodyPr wrap="square" rtlCol="0" anchor="ctr"/>
+          <a:bodyPr rtlCol="0" anchor="ctr" wrap="square"/>
           <a:lstStyle/>
           <a:p>
             <a:pPr algn="ctr"/>
-            <a:endParaRPr/>
           </a:p>
         </p:txBody>
       </p:sp>
@@ -3787,16 +3743,16 @@
         </p:nvSpPr>
         <p:spPr>
           <a:xfrm>
-            <a:off x="7092531" y="4700016"/>
-            <a:ext cx="3438144" cy="436338"/>
-          </a:xfrm>
-          <a:prstGeom prst="rect">
-            <a:avLst/>
-          </a:prstGeom>
-          <a:noFill/>
-        </p:spPr>
-        <p:txBody>
-          <a:bodyPr wrap="square" lIns="0" tIns="0" rIns="0" bIns="0" anchor="t">
+            <a:off x="7104888" y="4700016"/>
+            <a:ext cx="3438144" cy="548640"/>
+          </a:xfrm>
+          <a:prstGeom prst="rect">
+            <a:avLst/>
+          </a:prstGeom>
+          <a:noFill/>
+        </p:spPr>
+        <p:txBody>
+          <a:bodyPr wrap="square" anchor="t" lIns="0" rIns="0" tIns="0" bIns="0">
             <a:spAutoFit/>
           </a:bodyPr>
           <a:lstStyle/>
@@ -3810,35 +3766,26 @@
               </a:spcAft>
             </a:pPr>
             <a:r>
-              <a:rPr lang="de-DE" sz="1300" b="1" dirty="0">
+              <a:rPr sz="1300" b="1" i="0">
                 <a:solidFill>
                   <a:srgbClr val="1A1A1A"/>
                 </a:solidFill>
                 <a:latin typeface="Arial"/>
               </a:rPr>
-              <a:t>3</a:t>
-            </a:r>
-            <a:r>
-              <a:rPr sz="1300" b="1" i="0" dirty="0">
-                <a:solidFill>
-                  <a:srgbClr val="1A1A1A"/>
-                </a:solidFill>
-                <a:latin typeface="Arial"/>
-              </a:rPr>
-              <a:t>   The same query, as an app</a:t>
-            </a:r>
-          </a:p>
-          <a:p>
-            <a:pPr algn="l">
-              <a:lnSpc>
-                <a:spcPct val="125000"/>
-              </a:lnSpc>
-              <a:spcAft>
-                <a:spcPts val="0"/>
-              </a:spcAft>
-            </a:pPr>
-            <a:r>
-              <a:rPr sz="1000" b="0" i="0" dirty="0">
+              <a:t>2   The same query, as an app</a:t>
+            </a:r>
+          </a:p>
+          <a:p>
+            <a:pPr algn="l">
+              <a:lnSpc>
+                <a:spcPct val="125000"/>
+              </a:lnSpc>
+              <a:spcAft>
+                <a:spcPts val="0"/>
+              </a:spcAft>
+            </a:pPr>
+            <a:r>
+              <a:rPr sz="1000" b="0" i="0">
                 <a:solidFill>
                   <a:srgbClr val="64748B"/>
                 </a:solidFill>
@@ -3890,11 +3837,10 @@
           </a:fontRef>
         </p:style>
         <p:txBody>
-          <a:bodyPr wrap="square" rtlCol="0" anchor="ctr"/>
+          <a:bodyPr rtlCol="0" anchor="ctr" wrap="square"/>
           <a:lstStyle/>
           <a:p>
             <a:pPr algn="ctr"/>
-            <a:endParaRPr/>
           </a:p>
         </p:txBody>
       </p:sp>
@@ -3907,15 +3853,15 @@
         <p:spPr>
           <a:xfrm>
             <a:off x="7104888" y="5532120"/>
-            <a:ext cx="3438144" cy="436338"/>
-          </a:xfrm>
-          <a:prstGeom prst="rect">
-            <a:avLst/>
-          </a:prstGeom>
-          <a:noFill/>
-        </p:spPr>
-        <p:txBody>
-          <a:bodyPr wrap="square" lIns="0" tIns="0" rIns="0" bIns="0" anchor="t">
+            <a:ext cx="3438144" cy="548640"/>
+          </a:xfrm>
+          <a:prstGeom prst="rect">
+            <a:avLst/>
+          </a:prstGeom>
+          <a:noFill/>
+        </p:spPr>
+        <p:txBody>
+          <a:bodyPr wrap="square" anchor="t" lIns="0" rIns="0" tIns="0" bIns="0">
             <a:spAutoFit/>
           </a:bodyPr>
           <a:lstStyle/>
@@ -3929,35 +3875,26 @@
               </a:spcAft>
             </a:pPr>
             <a:r>
-              <a:rPr lang="de-DE" sz="1300" b="1" i="0" dirty="0">
+              <a:rPr sz="1300" b="1" i="0">
                 <a:solidFill>
                   <a:srgbClr val="1A1A1A"/>
                 </a:solidFill>
                 <a:latin typeface="Arial"/>
               </a:rPr>
-              <a:t>4</a:t>
-            </a:r>
-            <a:r>
-              <a:rPr sz="1300" b="1" i="0" dirty="0">
-                <a:solidFill>
-                  <a:srgbClr val="1A1A1A"/>
-                </a:solidFill>
-                <a:latin typeface="Arial"/>
-              </a:rPr>
-              <a:t>   Your region, your client list</a:t>
-            </a:r>
-          </a:p>
-          <a:p>
-            <a:pPr algn="l">
-              <a:lnSpc>
-                <a:spcPct val="125000"/>
-              </a:lnSpc>
-              <a:spcAft>
-                <a:spcPts val="0"/>
-              </a:spcAft>
-            </a:pPr>
-            <a:r>
-              <a:rPr sz="1000" b="0" i="0" dirty="0">
+              <a:t>3   Your region, your client list</a:t>
+            </a:r>
+          </a:p>
+          <a:p>
+            <a:pPr algn="l">
+              <a:lnSpc>
+                <a:spcPct val="125000"/>
+              </a:lnSpc>
+              <a:spcAft>
+                <a:spcPts val="0"/>
+              </a:spcAft>
+            </a:pPr>
+            <a:r>
+              <a:rPr sz="1000" b="0" i="0">
                 <a:solidFill>
                   <a:srgbClr val="64748B"/>
                 </a:solidFill>
@@ -4009,7 +3946,6 @@
           <a:lstStyle/>
           <a:p>
             <a:pPr algn="ctr"/>
-            <a:endParaRPr/>
           </a:p>
         </p:txBody>
       </p:sp>
@@ -4030,7 +3966,7 @@
           <a:noFill/>
         </p:spPr>
         <p:txBody>
-          <a:bodyPr wrap="square" lIns="0" tIns="0" rIns="0" bIns="0" anchor="t">
+          <a:bodyPr wrap="square" anchor="t" lIns="0" rIns="0" tIns="0" bIns="0">
             <a:spAutoFit/>
           </a:bodyPr>
           <a:lstStyle/>
@@ -4073,7 +4009,7 @@
           <a:noFill/>
         </p:spPr>
         <p:txBody>
-          <a:bodyPr wrap="square" lIns="0" tIns="0" rIns="0" bIns="0" anchor="t">
+          <a:bodyPr wrap="square" anchor="t" lIns="0" rIns="0" tIns="0" bIns="0">
             <a:spAutoFit/>
           </a:bodyPr>
           <a:lstStyle/>
@@ -4115,7 +4051,7 @@
           <a:noFill/>
         </p:spPr>
         <p:txBody>
-          <a:bodyPr wrap="square" lIns="0" tIns="0" rIns="0" bIns="0" anchor="t">
+          <a:bodyPr wrap="square" anchor="t" lIns="0" rIns="0" tIns="0" bIns="0">
             <a:spAutoFit/>
           </a:bodyPr>
           <a:lstStyle/>
@@ -4149,7 +4085,7 @@
 </file>
 
 <file path=ppt/slides/slide10.xml><?xml version="1.0" encoding="utf-8"?>
-<p:sld xmlns:a="http://schemas.openxmlformats.org/drawingml/2006/main" xmlns:r="http://schemas.openxmlformats.org/officeDocument/2006/relationships" xmlns:p="http://schemas.openxmlformats.org/presentationml/2006/main">
+<p:sld xmlns:a="http://schemas.openxmlformats.org/drawingml/2006/main" xmlns:p="http://schemas.openxmlformats.org/presentationml/2006/main" xmlns:r="http://schemas.openxmlformats.org/officeDocument/2006/relationships">
   <p:cSld>
     <p:spTree>
       <p:nvGrpSpPr>
@@ -4157,14 +4093,7 @@
         <p:cNvGrpSpPr/>
         <p:nvPr/>
       </p:nvGrpSpPr>
-      <p:grpSpPr>
-        <a:xfrm>
-          <a:off x="0" y="0"/>
-          <a:ext cx="0" cy="0"/>
-          <a:chOff x="0" y="0"/>
-          <a:chExt cx="0" cy="0"/>
-        </a:xfrm>
-      </p:grpSpPr>
+      <p:grpSpPr/>
       <p:sp>
         <p:nvSpPr>
           <p:cNvPr id="2" name="TextBox 1"/>
@@ -4182,7 +4111,7 @@
           <a:noFill/>
         </p:spPr>
         <p:txBody>
-          <a:bodyPr wrap="square" lIns="0" tIns="0" rIns="0" bIns="0" anchor="t">
+          <a:bodyPr wrap="square" anchor="t" lIns="0" rIns="0" tIns="0" bIns="0">
             <a:spAutoFit/>
           </a:bodyPr>
           <a:lstStyle/>
@@ -4202,7 +4131,7 @@
                 </a:solidFill>
                 <a:latin typeface="Arial"/>
               </a:rPr>
-              <a:t>ARNE — THE CLAIM, THEN THE LADDER · MODULE 4</a:t>
+              <a:t>ARNE — THE CLAIM, THEN THE LADDER · MODULE 3</a:t>
             </a:r>
           </a:p>
         </p:txBody>
@@ -4224,7 +4153,7 @@
           <a:noFill/>
         </p:spPr>
         <p:txBody>
-          <a:bodyPr wrap="square" lIns="0" tIns="0" rIns="0" bIns="0" anchor="t">
+          <a:bodyPr wrap="square" anchor="t" lIns="0" rIns="0" tIns="0" bIns="0">
             <a:spAutoFit/>
           </a:bodyPr>
           <a:lstStyle/>
@@ -4266,7 +4195,7 @@
           <a:noFill/>
         </p:spPr>
         <p:txBody>
-          <a:bodyPr wrap="square" lIns="0" tIns="0" rIns="0" bIns="0" anchor="t">
+          <a:bodyPr wrap="square" anchor="t" lIns="0" rIns="0" tIns="0" bIns="0">
             <a:spAutoFit/>
           </a:bodyPr>
           <a:lstStyle/>
@@ -4330,7 +4259,7 @@
           </a:fontRef>
         </p:style>
         <p:txBody>
-          <a:bodyPr wrap="square" lIns="274320" rIns="274320" rtlCol="0" anchor="ctr"/>
+          <a:bodyPr rtlCol="0" anchor="ctr" wrap="square" lIns="274320" rIns="274320"/>
           <a:lstStyle/>
           <a:p>
             <a:pPr algn="l">
@@ -4342,7 +4271,7 @@
               </a:spcAft>
             </a:pPr>
             <a:r>
-              <a:rPr b="0" i="0" dirty="0">
+              <a:rPr sz="1400" b="0" i="0">
                 <a:solidFill>
                   <a:srgbClr val="1A1A1A"/>
                 </a:solidFill>
@@ -4392,7 +4321,7 @@
           </a:fontRef>
         </p:style>
         <p:txBody>
-          <a:bodyPr wrap="square" lIns="274320" rIns="274320" rtlCol="0" anchor="ctr"/>
+          <a:bodyPr rtlCol="0" anchor="ctr" wrap="square" lIns="274320" rIns="274320"/>
           <a:lstStyle/>
           <a:p>
             <a:pPr algn="l">
@@ -4404,7 +4333,7 @@
               </a:spcAft>
             </a:pPr>
             <a:r>
-              <a:rPr b="0" i="0">
+              <a:rPr sz="1400" b="0" i="0">
                 <a:solidFill>
                   <a:srgbClr val="1A1A1A"/>
                 </a:solidFill>
@@ -4454,7 +4383,7 @@
           </a:fontRef>
         </p:style>
         <p:txBody>
-          <a:bodyPr wrap="square" lIns="274320" rIns="274320" rtlCol="0" anchor="ctr"/>
+          <a:bodyPr rtlCol="0" anchor="ctr" wrap="square" lIns="274320" rIns="274320"/>
           <a:lstStyle/>
           <a:p>
             <a:pPr algn="l">
@@ -4466,7 +4395,7 @@
               </a:spcAft>
             </a:pPr>
             <a:r>
-              <a:rPr b="0" i="0">
+              <a:rPr sz="1400" b="0" i="0">
                 <a:solidFill>
                   <a:srgbClr val="1A1A1A"/>
                 </a:solidFill>
@@ -4494,7 +4423,7 @@
           <a:noFill/>
         </p:spPr>
         <p:txBody>
-          <a:bodyPr wrap="square" lIns="0" tIns="0" rIns="0" bIns="0" anchor="t">
+          <a:bodyPr wrap="square" anchor="t" lIns="0" rIns="0" tIns="0" bIns="0">
             <a:spAutoFit/>
           </a:bodyPr>
           <a:lstStyle/>
@@ -4560,19 +4489,19 @@
           </a:fontRef>
         </p:style>
         <p:txBody>
-          <a:bodyPr wrap="square" lIns="310896" rIns="310896" rtlCol="0" anchor="ctr"/>
-          <a:lstStyle/>
-          <a:p>
-            <a:pPr algn="l">
-              <a:lnSpc>
-                <a:spcPct val="125000"/>
-              </a:lnSpc>
-              <a:spcAft>
-                <a:spcPts val="0"/>
-              </a:spcAft>
-            </a:pPr>
-            <a:r>
-              <a:rPr sz="2000" b="1" i="0">
+          <a:bodyPr rtlCol="0" anchor="ctr" wrap="square" lIns="310896" rIns="310896"/>
+          <a:lstStyle/>
+          <a:p>
+            <a:pPr algn="l">
+              <a:lnSpc>
+                <a:spcPct val="125000"/>
+              </a:lnSpc>
+              <a:spcAft>
+                <a:spcPts val="0"/>
+              </a:spcAft>
+            </a:pPr>
+            <a:r>
+              <a:rPr sz="1600" b="1" i="0">
                 <a:solidFill>
                   <a:srgbClr val="BE0F05"/>
                 </a:solidFill>
@@ -4600,7 +4529,7 @@
           <a:noFill/>
         </p:spPr>
         <p:txBody>
-          <a:bodyPr wrap="square" lIns="0" tIns="0" rIns="0" bIns="0" anchor="t">
+          <a:bodyPr wrap="square" anchor="t" lIns="0" rIns="0" tIns="0" bIns="0">
             <a:spAutoFit/>
           </a:bodyPr>
           <a:lstStyle/>
@@ -4620,7 +4549,7 @@
                 </a:solidFill>
                 <a:latin typeface="Arial"/>
               </a:rPr>
-              <a:t>4_patstat_explorer/</a:t>
+              <a:t>3_patstat_explorer/</a:t>
             </a:r>
           </a:p>
         </p:txBody>
@@ -4642,7 +4571,7 @@
           <a:noFill/>
         </p:spPr>
         <p:txBody>
-          <a:bodyPr wrap="square" lIns="0" tIns="0" rIns="0" bIns="0" anchor="t">
+          <a:bodyPr wrap="square" anchor="t" lIns="0" rIns="0" tIns="0" bIns="0">
             <a:spAutoFit/>
           </a:bodyPr>
           <a:lstStyle/>
@@ -4676,7 +4605,7 @@
 </file>
 
 <file path=ppt/slides/slide11.xml><?xml version="1.0" encoding="utf-8"?>
-<p:sld xmlns:a="http://schemas.openxmlformats.org/drawingml/2006/main" xmlns:r="http://schemas.openxmlformats.org/officeDocument/2006/relationships" xmlns:p="http://schemas.openxmlformats.org/presentationml/2006/main">
+<p:sld xmlns:a="http://schemas.openxmlformats.org/drawingml/2006/main" xmlns:p="http://schemas.openxmlformats.org/presentationml/2006/main" xmlns:r="http://schemas.openxmlformats.org/officeDocument/2006/relationships">
   <p:cSld>
     <p:spTree>
       <p:nvGrpSpPr>
@@ -4684,14 +4613,7 @@
         <p:cNvGrpSpPr/>
         <p:nvPr/>
       </p:nvGrpSpPr>
-      <p:grpSpPr>
-        <a:xfrm>
-          <a:off x="0" y="0"/>
-          <a:ext cx="0" cy="0"/>
-          <a:chOff x="0" y="0"/>
-          <a:chExt cx="0" cy="0"/>
-        </a:xfrm>
-      </p:grpSpPr>
+      <p:grpSpPr/>
       <p:sp>
         <p:nvSpPr>
           <p:cNvPr id="2" name="TextBox 1"/>
@@ -4709,7 +4631,7 @@
           <a:noFill/>
         </p:spPr>
         <p:txBody>
-          <a:bodyPr wrap="square" lIns="0" tIns="0" rIns="0" bIns="0" anchor="t">
+          <a:bodyPr wrap="square" anchor="t" lIns="0" rIns="0" tIns="0" bIns="0">
             <a:spAutoFit/>
           </a:bodyPr>
           <a:lstStyle/>
@@ -4729,7 +4651,7 @@
                 </a:solidFill>
                 <a:latin typeface="Arial"/>
               </a:rPr>
-              <a:t>ARNE — THE CLAIM, THEN THE LADDER · MODULE 5</a:t>
+              <a:t>ARNE — THE CLAIM, THEN THE LADDER · MODULE 4</a:t>
             </a:r>
           </a:p>
         </p:txBody>
@@ -4743,15 +4665,15 @@
         <p:spPr>
           <a:xfrm>
             <a:off x="777240" y="868680"/>
-            <a:ext cx="10637215" cy="468398"/>
-          </a:xfrm>
-          <a:prstGeom prst="rect">
-            <a:avLst/>
-          </a:prstGeom>
-          <a:noFill/>
-        </p:spPr>
-        <p:txBody>
-          <a:bodyPr wrap="square" lIns="0" tIns="0" rIns="0" bIns="0" anchor="t">
+            <a:ext cx="10637215" cy="914400"/>
+          </a:xfrm>
+          <a:prstGeom prst="rect">
+            <a:avLst/>
+          </a:prstGeom>
+          <a:noFill/>
+        </p:spPr>
+        <p:txBody>
+          <a:bodyPr wrap="square" anchor="t" lIns="0" rIns="0" tIns="0" bIns="0">
             <a:spAutoFit/>
           </a:bodyPr>
           <a:lstStyle/>
@@ -4765,31 +4687,13 @@
               </a:spcAft>
             </a:pPr>
             <a:r>
-              <a:rPr sz="3000" b="1" i="0" dirty="0">
+              <a:rPr sz="3000" b="1" i="0">
                 <a:solidFill>
                   <a:srgbClr val="1A1A1A"/>
                 </a:solidFill>
                 <a:latin typeface="Arial"/>
               </a:rPr>
-              <a:t>Module </a:t>
-            </a:r>
-            <a:r>
-              <a:rPr lang="de-DE" sz="3000" b="1" i="0" dirty="0">
-                <a:solidFill>
-                  <a:srgbClr val="1A1A1A"/>
-                </a:solidFill>
-                <a:latin typeface="Arial"/>
-              </a:rPr>
-              <a:t>4</a:t>
-            </a:r>
-            <a:r>
-              <a:rPr sz="3000" b="1" i="0" dirty="0">
-                <a:solidFill>
-                  <a:srgbClr val="1A1A1A"/>
-                </a:solidFill>
-                <a:latin typeface="Arial"/>
-              </a:rPr>
-              <a:t> — Regional Lead Generation</a:t>
+              <a:t>Module 4 — Regional Lead Generation</a:t>
             </a:r>
           </a:p>
         </p:txBody>
@@ -4833,19 +4737,19 @@
           </a:fontRef>
         </p:style>
         <p:txBody>
-          <a:bodyPr wrap="square" lIns="310896" tIns="182880" rIns="310896" bIns="182880" rtlCol="0" anchor="ctr"/>
-          <a:lstStyle/>
-          <a:p>
-            <a:pPr algn="l">
-              <a:lnSpc>
-                <a:spcPct val="125000"/>
-              </a:lnSpc>
-              <a:spcAft>
-                <a:spcPts val="0"/>
-              </a:spcAft>
-            </a:pPr>
-            <a:r>
-              <a:rPr sz="2400" b="0" i="1">
+          <a:bodyPr rtlCol="0" anchor="ctr" wrap="square" lIns="310896" rIns="310896" tIns="182880" bIns="182880"/>
+          <a:lstStyle/>
+          <a:p>
+            <a:pPr algn="l">
+              <a:lnSpc>
+                <a:spcPct val="125000"/>
+              </a:lnSpc>
+              <a:spcAft>
+                <a:spcPts val="0"/>
+              </a:spcAft>
+            </a:pPr>
+            <a:r>
+              <a:rPr sz="1800" b="0" i="1">
                 <a:solidFill>
                   <a:srgbClr val="BE0F05"/>
                 </a:solidFill>
@@ -4873,7 +4777,7 @@
           <a:noFill/>
         </p:spPr>
         <p:txBody>
-          <a:bodyPr wrap="square" lIns="0" tIns="0" rIns="0" bIns="0" anchor="t">
+          <a:bodyPr wrap="square" anchor="t" lIns="0" rIns="0" tIns="0" bIns="0">
             <a:spAutoFit/>
           </a:bodyPr>
           <a:lstStyle/>
@@ -4935,11 +4839,10 @@
           </a:fontRef>
         </p:style>
         <p:txBody>
-          <a:bodyPr wrap="square" rtlCol="0" anchor="ctr"/>
+          <a:bodyPr rtlCol="0" anchor="ctr" wrap="square"/>
           <a:lstStyle/>
           <a:p>
             <a:pPr algn="ctr"/>
-            <a:endParaRPr/>
           </a:p>
         </p:txBody>
       </p:sp>
@@ -4952,29 +4855,29 @@
         <p:spPr>
           <a:xfrm>
             <a:off x="1106424" y="3840480"/>
-            <a:ext cx="10308031" cy="312265"/>
-          </a:xfrm>
-          <a:prstGeom prst="rect">
-            <a:avLst/>
-          </a:prstGeom>
-          <a:noFill/>
-        </p:spPr>
-        <p:txBody>
-          <a:bodyPr wrap="square" lIns="0" tIns="0" rIns="0" bIns="0" anchor="t">
-            <a:spAutoFit/>
-          </a:bodyPr>
-          <a:lstStyle/>
-          <a:p>
-            <a:pPr algn="l">
-              <a:lnSpc>
-                <a:spcPct val="125000"/>
-              </a:lnSpc>
-              <a:spcAft>
-                <a:spcPts val="0"/>
-              </a:spcAft>
-            </a:pPr>
-            <a:r>
-              <a:rPr b="0" i="0">
+            <a:ext cx="10308031" cy="502920"/>
+          </a:xfrm>
+          <a:prstGeom prst="rect">
+            <a:avLst/>
+          </a:prstGeom>
+          <a:noFill/>
+        </p:spPr>
+        <p:txBody>
+          <a:bodyPr wrap="square" anchor="t" lIns="0" rIns="0" tIns="0" bIns="0">
+            <a:spAutoFit/>
+          </a:bodyPr>
+          <a:lstStyle/>
+          <a:p>
+            <a:pPr algn="l">
+              <a:lnSpc>
+                <a:spcPct val="125000"/>
+              </a:lnSpc>
+              <a:spcAft>
+                <a:spcPts val="0"/>
+              </a:spcAft>
+            </a:pPr>
+            <a:r>
+              <a:rPr sz="1400" b="0" i="0">
                 <a:solidFill>
                   <a:srgbClr val="1A1A1A"/>
                 </a:solidFill>
@@ -5022,11 +4925,10 @@
           </a:fontRef>
         </p:style>
         <p:txBody>
-          <a:bodyPr wrap="square" rtlCol="0" anchor="ctr"/>
+          <a:bodyPr rtlCol="0" anchor="ctr" wrap="square"/>
           <a:lstStyle/>
           <a:p>
             <a:pPr algn="ctr"/>
-            <a:endParaRPr/>
           </a:p>
         </p:txBody>
       </p:sp>
@@ -5039,29 +4941,29 @@
         <p:spPr>
           <a:xfrm>
             <a:off x="1106424" y="4407408"/>
-            <a:ext cx="10308031" cy="312265"/>
-          </a:xfrm>
-          <a:prstGeom prst="rect">
-            <a:avLst/>
-          </a:prstGeom>
-          <a:noFill/>
-        </p:spPr>
-        <p:txBody>
-          <a:bodyPr wrap="square" lIns="0" tIns="0" rIns="0" bIns="0" anchor="t">
-            <a:spAutoFit/>
-          </a:bodyPr>
-          <a:lstStyle/>
-          <a:p>
-            <a:pPr algn="l">
-              <a:lnSpc>
-                <a:spcPct val="125000"/>
-              </a:lnSpc>
-              <a:spcAft>
-                <a:spcPts val="0"/>
-              </a:spcAft>
-            </a:pPr>
-            <a:r>
-              <a:rPr b="0" i="0">
+            <a:ext cx="10308031" cy="502920"/>
+          </a:xfrm>
+          <a:prstGeom prst="rect">
+            <a:avLst/>
+          </a:prstGeom>
+          <a:noFill/>
+        </p:spPr>
+        <p:txBody>
+          <a:bodyPr wrap="square" anchor="t" lIns="0" rIns="0" tIns="0" bIns="0">
+            <a:spAutoFit/>
+          </a:bodyPr>
+          <a:lstStyle/>
+          <a:p>
+            <a:pPr algn="l">
+              <a:lnSpc>
+                <a:spcPct val="125000"/>
+              </a:lnSpc>
+              <a:spcAft>
+                <a:spcPts val="0"/>
+              </a:spcAft>
+            </a:pPr>
+            <a:r>
+              <a:rPr sz="1400" b="0" i="0">
                 <a:solidFill>
                   <a:srgbClr val="1A1A1A"/>
                 </a:solidFill>
@@ -5109,11 +5011,10 @@
           </a:fontRef>
         </p:style>
         <p:txBody>
-          <a:bodyPr wrap="square" rtlCol="0" anchor="ctr"/>
+          <a:bodyPr rtlCol="0" anchor="ctr" wrap="square"/>
           <a:lstStyle/>
           <a:p>
             <a:pPr algn="ctr"/>
-            <a:endParaRPr/>
           </a:p>
         </p:txBody>
       </p:sp>
@@ -5126,29 +5027,29 @@
         <p:spPr>
           <a:xfrm>
             <a:off x="1106424" y="4974336"/>
-            <a:ext cx="10308031" cy="312265"/>
-          </a:xfrm>
-          <a:prstGeom prst="rect">
-            <a:avLst/>
-          </a:prstGeom>
-          <a:noFill/>
-        </p:spPr>
-        <p:txBody>
-          <a:bodyPr wrap="square" lIns="0" tIns="0" rIns="0" bIns="0" anchor="t">
-            <a:spAutoFit/>
-          </a:bodyPr>
-          <a:lstStyle/>
-          <a:p>
-            <a:pPr algn="l">
-              <a:lnSpc>
-                <a:spcPct val="125000"/>
-              </a:lnSpc>
-              <a:spcAft>
-                <a:spcPts val="0"/>
-              </a:spcAft>
-            </a:pPr>
-            <a:r>
-              <a:rPr b="0" i="0">
+            <a:ext cx="10308031" cy="502920"/>
+          </a:xfrm>
+          <a:prstGeom prst="rect">
+            <a:avLst/>
+          </a:prstGeom>
+          <a:noFill/>
+        </p:spPr>
+        <p:txBody>
+          <a:bodyPr wrap="square" anchor="t" lIns="0" rIns="0" tIns="0" bIns="0">
+            <a:spAutoFit/>
+          </a:bodyPr>
+          <a:lstStyle/>
+          <a:p>
+            <a:pPr algn="l">
+              <a:lnSpc>
+                <a:spcPct val="125000"/>
+              </a:lnSpc>
+              <a:spcAft>
+                <a:spcPts val="0"/>
+              </a:spcAft>
+            </a:pPr>
+            <a:r>
+              <a:rPr sz="1400" b="0" i="0">
                 <a:solidFill>
                   <a:srgbClr val="1A1A1A"/>
                 </a:solidFill>
@@ -5176,7 +5077,7 @@
           <a:noFill/>
         </p:spPr>
         <p:txBody>
-          <a:bodyPr wrap="square" lIns="0" tIns="0" rIns="0" bIns="0" anchor="t">
+          <a:bodyPr wrap="square" anchor="t" lIns="0" rIns="0" tIns="0" bIns="0">
             <a:spAutoFit/>
           </a:bodyPr>
           <a:lstStyle/>
@@ -5196,7 +5097,7 @@
                 </a:solidFill>
                 <a:latin typeface="Arial"/>
               </a:rPr>
-              <a:t>5_lead_generation/</a:t>
+              <a:t>4_lead_generation/</a:t>
             </a:r>
           </a:p>
         </p:txBody>
@@ -5218,7 +5119,7 @@
           <a:noFill/>
         </p:spPr>
         <p:txBody>
-          <a:bodyPr wrap="square" lIns="0" tIns="0" rIns="0" bIns="0" anchor="t">
+          <a:bodyPr wrap="square" anchor="t" lIns="0" rIns="0" tIns="0" bIns="0">
             <a:spAutoFit/>
           </a:bodyPr>
           <a:lstStyle/>
@@ -5252,7 +5153,7 @@
 </file>
 
 <file path=ppt/slides/slide12.xml><?xml version="1.0" encoding="utf-8"?>
-<p:sld xmlns:a="http://schemas.openxmlformats.org/drawingml/2006/main" xmlns:r="http://schemas.openxmlformats.org/officeDocument/2006/relationships" xmlns:p="http://schemas.openxmlformats.org/presentationml/2006/main">
+<p:sld xmlns:a="http://schemas.openxmlformats.org/drawingml/2006/main" xmlns:p="http://schemas.openxmlformats.org/presentationml/2006/main" xmlns:r="http://schemas.openxmlformats.org/officeDocument/2006/relationships">
   <p:cSld>
     <p:spTree>
       <p:nvGrpSpPr>
@@ -5260,14 +5161,7 @@
         <p:cNvGrpSpPr/>
         <p:nvPr/>
       </p:nvGrpSpPr>
-      <p:grpSpPr>
-        <a:xfrm>
-          <a:off x="0" y="0"/>
-          <a:ext cx="0" cy="0"/>
-          <a:chOff x="0" y="0"/>
-          <a:chExt cx="0" cy="0"/>
-        </a:xfrm>
-      </p:grpSpPr>
+      <p:grpSpPr/>
       <p:sp>
         <p:nvSpPr>
           <p:cNvPr id="2" name="TextBox 1"/>
@@ -5285,7 +5179,7 @@
           <a:noFill/>
         </p:spPr>
         <p:txBody>
-          <a:bodyPr wrap="square" lIns="0" tIns="0" rIns="0" bIns="0" anchor="t">
+          <a:bodyPr wrap="square" anchor="t" lIns="0" rIns="0" tIns="0" bIns="0">
             <a:spAutoFit/>
           </a:bodyPr>
           <a:lstStyle/>
@@ -5305,7 +5199,7 @@
                 </a:solidFill>
                 <a:latin typeface="Arial"/>
               </a:rPr>
-              <a:t>ARNE — THE CLAIM, THEN THE LADDER · MODULE 5</a:t>
+              <a:t>ARNE — THE CLAIM, THEN THE LADDER · MODULE 4</a:t>
             </a:r>
           </a:p>
         </p:txBody>
@@ -5327,7 +5221,7 @@
           <a:noFill/>
         </p:spPr>
         <p:txBody>
-          <a:bodyPr wrap="square" lIns="0" tIns="0" rIns="0" bIns="0" anchor="t">
+          <a:bodyPr wrap="square" anchor="t" lIns="0" rIns="0" tIns="0" bIns="0">
             <a:spAutoFit/>
           </a:bodyPr>
           <a:lstStyle/>
@@ -5369,7 +5263,7 @@
           <a:noFill/>
         </p:spPr>
         <p:txBody>
-          <a:bodyPr wrap="square" lIns="0" tIns="0" rIns="0" bIns="0" anchor="t">
+          <a:bodyPr wrap="square" anchor="t" lIns="0" rIns="0" tIns="0" bIns="0">
             <a:spAutoFit/>
           </a:bodyPr>
           <a:lstStyle/>
@@ -5435,7 +5329,7 @@
           </a:fontRef>
         </p:style>
         <p:txBody>
-          <a:bodyPr wrap="square" lIns="365760" rIns="365760" rtlCol="0" anchor="ctr"/>
+          <a:bodyPr rtlCol="0" anchor="ctr" wrap="square" lIns="365760" rIns="365760"/>
           <a:lstStyle/>
           <a:p>
             <a:pPr algn="ctr">
@@ -5491,7 +5385,7 @@
                 </a:solidFill>
                 <a:latin typeface="Arial"/>
               </a:rPr>
-              <a:t>5_lead_generation/1_regional-leads.ipynb</a:t>
+              <a:t>4_lead_generation/1_regional-leads.ipynb</a:t>
             </a:r>
           </a:p>
           <a:p>
@@ -5554,11 +5448,10 @@
           </a:fontRef>
         </p:style>
         <p:txBody>
-          <a:bodyPr wrap="square" rtlCol="0" anchor="ctr"/>
+          <a:bodyPr rtlCol="0" anchor="ctr" wrap="square"/>
           <a:lstStyle/>
           <a:p>
             <a:pPr algn="ctr"/>
-            <a:endParaRPr/>
           </a:p>
         </p:txBody>
       </p:sp>
@@ -5579,7 +5472,7 @@
           <a:noFill/>
         </p:spPr>
         <p:txBody>
-          <a:bodyPr wrap="square" lIns="0" tIns="0" rIns="0" bIns="0" anchor="t">
+          <a:bodyPr wrap="square" anchor="t" lIns="0" rIns="0" tIns="0" bIns="0">
             <a:spAutoFit/>
           </a:bodyPr>
           <a:lstStyle/>
@@ -5621,7 +5514,7 @@
           <a:noFill/>
         </p:spPr>
         <p:txBody>
-          <a:bodyPr wrap="square" lIns="0" tIns="0" rIns="0" bIns="0" anchor="t">
+          <a:bodyPr wrap="square" anchor="t" lIns="0" rIns="0" tIns="0" bIns="0">
             <a:spAutoFit/>
           </a:bodyPr>
           <a:lstStyle/>
@@ -5723,11 +5616,10 @@
           </a:fontRef>
         </p:style>
         <p:txBody>
-          <a:bodyPr wrap="square" rtlCol="0" anchor="ctr"/>
+          <a:bodyPr rtlCol="0" anchor="ctr" wrap="square"/>
           <a:lstStyle/>
           <a:p>
             <a:pPr algn="ctr"/>
-            <a:endParaRPr/>
           </a:p>
         </p:txBody>
       </p:sp>
@@ -5748,7 +5640,7 @@
           <a:noFill/>
         </p:spPr>
         <p:txBody>
-          <a:bodyPr wrap="square" lIns="0" tIns="0" rIns="0" bIns="0" anchor="t">
+          <a:bodyPr wrap="square" anchor="t" lIns="0" rIns="0" tIns="0" bIns="0">
             <a:spAutoFit/>
           </a:bodyPr>
           <a:lstStyle/>
@@ -5790,7 +5682,7 @@
           <a:noFill/>
         </p:spPr>
         <p:txBody>
-          <a:bodyPr wrap="square" lIns="0" tIns="0" rIns="0" bIns="0" anchor="t">
+          <a:bodyPr wrap="square" anchor="t" lIns="0" rIns="0" tIns="0" bIns="0">
             <a:spAutoFit/>
           </a:bodyPr>
           <a:lstStyle/>
@@ -5892,11 +5784,10 @@
           </a:fontRef>
         </p:style>
         <p:txBody>
-          <a:bodyPr wrap="square" rtlCol="0" anchor="ctr"/>
+          <a:bodyPr rtlCol="0" anchor="ctr" wrap="square"/>
           <a:lstStyle/>
           <a:p>
             <a:pPr algn="ctr"/>
-            <a:endParaRPr/>
           </a:p>
         </p:txBody>
       </p:sp>
@@ -5917,7 +5808,7 @@
           <a:noFill/>
         </p:spPr>
         <p:txBody>
-          <a:bodyPr wrap="square" lIns="0" tIns="0" rIns="0" bIns="0" anchor="t">
+          <a:bodyPr wrap="square" anchor="t" lIns="0" rIns="0" tIns="0" bIns="0">
             <a:spAutoFit/>
           </a:bodyPr>
           <a:lstStyle/>
@@ -5959,7 +5850,7 @@
           <a:noFill/>
         </p:spPr>
         <p:txBody>
-          <a:bodyPr wrap="square" lIns="0" tIns="0" rIns="0" bIns="0" anchor="t">
+          <a:bodyPr wrap="square" anchor="t" lIns="0" rIns="0" tIns="0" bIns="0">
             <a:spAutoFit/>
           </a:bodyPr>
           <a:lstStyle/>
@@ -6039,7 +5930,7 @@
           <a:noFill/>
         </p:spPr>
         <p:txBody>
-          <a:bodyPr wrap="square" lIns="0" tIns="0" rIns="0" bIns="0" anchor="t">
+          <a:bodyPr wrap="square" anchor="t" lIns="0" rIns="0" tIns="0" bIns="0">
             <a:spAutoFit/>
           </a:bodyPr>
           <a:lstStyle/>
@@ -6059,7 +5950,7 @@
                 </a:solidFill>
                 <a:latin typeface="Arial"/>
               </a:rPr>
-              <a:t>5_lead_generation/</a:t>
+              <a:t>4_lead_generation/</a:t>
             </a:r>
           </a:p>
         </p:txBody>
@@ -6081,7 +5972,7 @@
           <a:noFill/>
         </p:spPr>
         <p:txBody>
-          <a:bodyPr wrap="square" lIns="0" tIns="0" rIns="0" bIns="0" anchor="t">
+          <a:bodyPr wrap="square" anchor="t" lIns="0" rIns="0" tIns="0" bIns="0">
             <a:spAutoFit/>
           </a:bodyPr>
           <a:lstStyle/>
@@ -6115,7 +6006,7 @@
 </file>
 
 <file path=ppt/slides/slide13.xml><?xml version="1.0" encoding="utf-8"?>
-<p:sld xmlns:a="http://schemas.openxmlformats.org/drawingml/2006/main" xmlns:r="http://schemas.openxmlformats.org/officeDocument/2006/relationships" xmlns:p="http://schemas.openxmlformats.org/presentationml/2006/main">
+<p:sld xmlns:a="http://schemas.openxmlformats.org/drawingml/2006/main" xmlns:p="http://schemas.openxmlformats.org/presentationml/2006/main" xmlns:r="http://schemas.openxmlformats.org/officeDocument/2006/relationships">
   <p:cSld>
     <p:spTree>
       <p:nvGrpSpPr>
@@ -6123,14 +6014,7 @@
         <p:cNvGrpSpPr/>
         <p:nvPr/>
       </p:nvGrpSpPr>
-      <p:grpSpPr>
-        <a:xfrm>
-          <a:off x="0" y="0"/>
-          <a:ext cx="0" cy="0"/>
-          <a:chOff x="0" y="0"/>
-          <a:chExt cx="0" cy="0"/>
-        </a:xfrm>
-      </p:grpSpPr>
+      <p:grpSpPr/>
       <p:sp>
         <p:nvSpPr>
           <p:cNvPr id="2" name="TextBox 1"/>
@@ -6148,7 +6032,7 @@
           <a:noFill/>
         </p:spPr>
         <p:txBody>
-          <a:bodyPr wrap="square" lIns="0" tIns="0" rIns="0" bIns="0" anchor="t">
+          <a:bodyPr wrap="square" anchor="t" lIns="0" rIns="0" tIns="0" bIns="0">
             <a:spAutoFit/>
           </a:bodyPr>
           <a:lstStyle/>
@@ -6168,7 +6052,7 @@
                 </a:solidFill>
                 <a:latin typeface="Arial"/>
               </a:rPr>
-              <a:t>ARNE — THE CLAIM, THEN THE LADDER · MODULE 5</a:t>
+              <a:t>ARNE — THE CLAIM, THEN THE LADDER · MODULE 4</a:t>
             </a:r>
           </a:p>
         </p:txBody>
@@ -6190,7 +6074,7 @@
           <a:noFill/>
         </p:spPr>
         <p:txBody>
-          <a:bodyPr wrap="square" lIns="0" tIns="0" rIns="0" bIns="0" anchor="t">
+          <a:bodyPr wrap="square" anchor="t" lIns="0" rIns="0" tIns="0" bIns="0">
             <a:spAutoFit/>
           </a:bodyPr>
           <a:lstStyle/>
@@ -6232,7 +6116,7 @@
           <a:noFill/>
         </p:spPr>
         <p:txBody>
-          <a:bodyPr wrap="square" lIns="0" tIns="0" rIns="0" bIns="0" anchor="t">
+          <a:bodyPr wrap="square" anchor="t" lIns="0" rIns="0" tIns="0" bIns="0">
             <a:spAutoFit/>
           </a:bodyPr>
           <a:lstStyle/>
@@ -6296,7 +6180,7 @@
           </a:fontRef>
         </p:style>
         <p:txBody>
-          <a:bodyPr wrap="square" lIns="274320" rIns="274320" rtlCol="0" anchor="ctr"/>
+          <a:bodyPr rtlCol="0" anchor="ctr" wrap="square" lIns="274320" rIns="274320"/>
           <a:lstStyle/>
           <a:p>
             <a:pPr algn="l">
@@ -6308,7 +6192,7 @@
               </a:spcAft>
             </a:pPr>
             <a:r>
-              <a:rPr b="0" i="0">
+              <a:rPr sz="1400" b="0" i="0">
                 <a:solidFill>
                   <a:srgbClr val="1A1A1A"/>
                 </a:solidFill>
@@ -6358,7 +6242,7 @@
           </a:fontRef>
         </p:style>
         <p:txBody>
-          <a:bodyPr wrap="square" lIns="274320" rIns="274320" rtlCol="0" anchor="ctr"/>
+          <a:bodyPr rtlCol="0" anchor="ctr" wrap="square" lIns="274320" rIns="274320"/>
           <a:lstStyle/>
           <a:p>
             <a:pPr algn="l">
@@ -6370,7 +6254,7 @@
               </a:spcAft>
             </a:pPr>
             <a:r>
-              <a:rPr b="0" i="0">
+              <a:rPr sz="1400" b="0" i="0">
                 <a:solidFill>
                   <a:srgbClr val="1A1A1A"/>
                 </a:solidFill>
@@ -6420,7 +6304,7 @@
           </a:fontRef>
         </p:style>
         <p:txBody>
-          <a:bodyPr wrap="square" lIns="274320" rIns="274320" rtlCol="0" anchor="ctr"/>
+          <a:bodyPr rtlCol="0" anchor="ctr" wrap="square" lIns="274320" rIns="274320"/>
           <a:lstStyle/>
           <a:p>
             <a:pPr algn="l">
@@ -6432,7 +6316,7 @@
               </a:spcAft>
             </a:pPr>
             <a:r>
-              <a:rPr b="0" i="0">
+              <a:rPr sz="1400" b="0" i="0">
                 <a:solidFill>
                   <a:srgbClr val="1A1A1A"/>
                 </a:solidFill>
@@ -6460,7 +6344,7 @@
           <a:noFill/>
         </p:spPr>
         <p:txBody>
-          <a:bodyPr wrap="square" lIns="0" tIns="0" rIns="0" bIns="0" anchor="t">
+          <a:bodyPr wrap="square" anchor="t" lIns="0" rIns="0" tIns="0" bIns="0">
             <a:spAutoFit/>
           </a:bodyPr>
           <a:lstStyle/>
@@ -6526,19 +6410,19 @@
           </a:fontRef>
         </p:style>
         <p:txBody>
-          <a:bodyPr wrap="square" lIns="310896" rIns="310896" rtlCol="0" anchor="ctr"/>
-          <a:lstStyle/>
-          <a:p>
-            <a:pPr algn="l">
-              <a:lnSpc>
-                <a:spcPct val="125000"/>
-              </a:lnSpc>
-              <a:spcAft>
-                <a:spcPts val="0"/>
-              </a:spcAft>
-            </a:pPr>
-            <a:r>
-              <a:rPr sz="2000" b="1" i="0">
+          <a:bodyPr rtlCol="0" anchor="ctr" wrap="square" lIns="310896" rIns="310896"/>
+          <a:lstStyle/>
+          <a:p>
+            <a:pPr algn="l">
+              <a:lnSpc>
+                <a:spcPct val="125000"/>
+              </a:lnSpc>
+              <a:spcAft>
+                <a:spcPts val="0"/>
+              </a:spcAft>
+            </a:pPr>
+            <a:r>
+              <a:rPr sz="1600" b="1" i="0">
                 <a:solidFill>
                   <a:srgbClr val="BE0F05"/>
                 </a:solidFill>
@@ -6566,7 +6450,7 @@
           <a:noFill/>
         </p:spPr>
         <p:txBody>
-          <a:bodyPr wrap="square" lIns="0" tIns="0" rIns="0" bIns="0" anchor="t">
+          <a:bodyPr wrap="square" anchor="t" lIns="0" rIns="0" tIns="0" bIns="0">
             <a:spAutoFit/>
           </a:bodyPr>
           <a:lstStyle/>
@@ -6586,7 +6470,7 @@
                 </a:solidFill>
                 <a:latin typeface="Arial"/>
               </a:rPr>
-              <a:t>5_lead_generation/</a:t>
+              <a:t>4_lead_generation/</a:t>
             </a:r>
           </a:p>
         </p:txBody>
@@ -6608,7 +6492,7 @@
           <a:noFill/>
         </p:spPr>
         <p:txBody>
-          <a:bodyPr wrap="square" lIns="0" tIns="0" rIns="0" bIns="0" anchor="t">
+          <a:bodyPr wrap="square" anchor="t" lIns="0" rIns="0" tIns="0" bIns="0">
             <a:spAutoFit/>
           </a:bodyPr>
           <a:lstStyle/>
@@ -6642,7 +6526,7 @@
 </file>
 
 <file path=ppt/slides/slide14.xml><?xml version="1.0" encoding="utf-8"?>
-<p:sld xmlns:a="http://schemas.openxmlformats.org/drawingml/2006/main" xmlns:r="http://schemas.openxmlformats.org/officeDocument/2006/relationships" xmlns:p="http://schemas.openxmlformats.org/presentationml/2006/main">
+<p:sld xmlns:a="http://schemas.openxmlformats.org/drawingml/2006/main" xmlns:p="http://schemas.openxmlformats.org/presentationml/2006/main" xmlns:r="http://schemas.openxmlformats.org/officeDocument/2006/relationships">
   <p:cSld>
     <p:spTree>
       <p:nvGrpSpPr>
@@ -6650,14 +6534,7 @@
         <p:cNvGrpSpPr/>
         <p:nvPr/>
       </p:nvGrpSpPr>
-      <p:grpSpPr>
-        <a:xfrm>
-          <a:off x="0" y="0"/>
-          <a:ext cx="0" cy="0"/>
-          <a:chOff x="0" y="0"/>
-          <a:chExt cx="0" cy="0"/>
-        </a:xfrm>
-      </p:grpSpPr>
+      <p:grpSpPr/>
       <p:sp>
         <p:nvSpPr>
           <p:cNvPr id="2" name="TextBox 1"/>
@@ -6675,7 +6552,7 @@
           <a:noFill/>
         </p:spPr>
         <p:txBody>
-          <a:bodyPr wrap="square" lIns="0" tIns="0" rIns="0" bIns="0" anchor="t">
+          <a:bodyPr wrap="square" anchor="t" lIns="0" rIns="0" tIns="0" bIns="0">
             <a:spAutoFit/>
           </a:bodyPr>
           <a:lstStyle/>
@@ -6695,7 +6572,7 @@
                 </a:solidFill>
                 <a:latin typeface="Arial"/>
               </a:rPr>
-              <a:t>RICCARDO — TWO USE CASES · MODULE 6</a:t>
+              <a:t>RICCARDO — TWO USE CASES · MODULE 5</a:t>
             </a:r>
           </a:p>
         </p:txBody>
@@ -6717,7 +6594,7 @@
           <a:noFill/>
         </p:spPr>
         <p:txBody>
-          <a:bodyPr wrap="square" lIns="0" tIns="0" rIns="0" bIns="0" anchor="t">
+          <a:bodyPr wrap="square" anchor="t" lIns="0" rIns="0" tIns="0" bIns="0">
             <a:spAutoFit/>
           </a:bodyPr>
           <a:lstStyle/>
@@ -6751,15 +6628,15 @@
         <p:spPr>
           <a:xfrm>
             <a:off x="777240" y="868680"/>
-            <a:ext cx="10637215" cy="468398"/>
-          </a:xfrm>
-          <a:prstGeom prst="rect">
-            <a:avLst/>
-          </a:prstGeom>
-          <a:noFill/>
-        </p:spPr>
-        <p:txBody>
-          <a:bodyPr wrap="square" lIns="0" tIns="0" rIns="0" bIns="0" anchor="t">
+            <a:ext cx="10637215" cy="914400"/>
+          </a:xfrm>
+          <a:prstGeom prst="rect">
+            <a:avLst/>
+          </a:prstGeom>
+          <a:noFill/>
+        </p:spPr>
+        <p:txBody>
+          <a:bodyPr wrap="square" anchor="t" lIns="0" rIns="0" tIns="0" bIns="0">
             <a:spAutoFit/>
           </a:bodyPr>
           <a:lstStyle/>
@@ -6773,31 +6650,13 @@
               </a:spcAft>
             </a:pPr>
             <a:r>
-              <a:rPr sz="3000" b="1" i="0" dirty="0">
+              <a:rPr sz="3000" b="1" i="0">
                 <a:solidFill>
                   <a:srgbClr val="1A1A1A"/>
                 </a:solidFill>
                 <a:latin typeface="Arial"/>
               </a:rPr>
-              <a:t>Module </a:t>
-            </a:r>
-            <a:r>
-              <a:rPr lang="de-DE" sz="3000" b="1" i="0" dirty="0">
-                <a:solidFill>
-                  <a:srgbClr val="1A1A1A"/>
-                </a:solidFill>
-                <a:latin typeface="Arial"/>
-              </a:rPr>
-              <a:t>5</a:t>
-            </a:r>
-            <a:r>
-              <a:rPr sz="3000" b="1" i="0" dirty="0">
-                <a:solidFill>
-                  <a:srgbClr val="1A1A1A"/>
-                </a:solidFill>
-                <a:latin typeface="Arial"/>
-              </a:rPr>
-              <a:t> — Patent Landscape Reports</a:t>
+              <a:t>Module 5 — Patent Landscape Reports</a:t>
             </a:r>
           </a:p>
         </p:txBody>
@@ -6841,19 +6700,19 @@
           </a:fontRef>
         </p:style>
         <p:txBody>
-          <a:bodyPr wrap="square" lIns="310896" tIns="182880" rIns="310896" bIns="182880" rtlCol="0" anchor="ctr"/>
-          <a:lstStyle/>
-          <a:p>
-            <a:pPr algn="l">
-              <a:lnSpc>
-                <a:spcPct val="125000"/>
-              </a:lnSpc>
-              <a:spcAft>
-                <a:spcPts val="0"/>
-              </a:spcAft>
-            </a:pPr>
-            <a:r>
-              <a:rPr sz="2400" b="0" i="1" dirty="0">
+          <a:bodyPr rtlCol="0" anchor="ctr" wrap="square" lIns="310896" rIns="310896" tIns="182880" bIns="182880"/>
+          <a:lstStyle/>
+          <a:p>
+            <a:pPr algn="l">
+              <a:lnSpc>
+                <a:spcPct val="125000"/>
+              </a:lnSpc>
+              <a:spcAft>
+                <a:spcPts val="0"/>
+              </a:spcAft>
+            </a:pPr>
+            <a:r>
+              <a:rPr sz="1800" b="0" i="1">
                 <a:solidFill>
                   <a:srgbClr val="BE0F05"/>
                 </a:solidFill>
@@ -6881,7 +6740,7 @@
           <a:noFill/>
         </p:spPr>
         <p:txBody>
-          <a:bodyPr wrap="square" lIns="0" tIns="0" rIns="0" bIns="0" anchor="t">
+          <a:bodyPr wrap="square" anchor="t" lIns="0" rIns="0" tIns="0" bIns="0">
             <a:spAutoFit/>
           </a:bodyPr>
           <a:lstStyle/>
@@ -6943,11 +6802,10 @@
           </a:fontRef>
         </p:style>
         <p:txBody>
-          <a:bodyPr wrap="square" rtlCol="0" anchor="ctr"/>
+          <a:bodyPr rtlCol="0" anchor="ctr" wrap="square"/>
           <a:lstStyle/>
           <a:p>
             <a:pPr algn="ctr"/>
-            <a:endParaRPr/>
           </a:p>
         </p:txBody>
       </p:sp>
@@ -6960,29 +6818,29 @@
         <p:spPr>
           <a:xfrm>
             <a:off x="1106424" y="3840480"/>
-            <a:ext cx="10308031" cy="312265"/>
-          </a:xfrm>
-          <a:prstGeom prst="rect">
-            <a:avLst/>
-          </a:prstGeom>
-          <a:noFill/>
-        </p:spPr>
-        <p:txBody>
-          <a:bodyPr wrap="square" lIns="0" tIns="0" rIns="0" bIns="0" anchor="t">
-            <a:spAutoFit/>
-          </a:bodyPr>
-          <a:lstStyle/>
-          <a:p>
-            <a:pPr algn="l">
-              <a:lnSpc>
-                <a:spcPct val="125000"/>
-              </a:lnSpc>
-              <a:spcAft>
-                <a:spcPts val="0"/>
-              </a:spcAft>
-            </a:pPr>
-            <a:r>
-              <a:rPr b="0" i="0">
+            <a:ext cx="10308031" cy="502920"/>
+          </a:xfrm>
+          <a:prstGeom prst="rect">
+            <a:avLst/>
+          </a:prstGeom>
+          <a:noFill/>
+        </p:spPr>
+        <p:txBody>
+          <a:bodyPr wrap="square" anchor="t" lIns="0" rIns="0" tIns="0" bIns="0">
+            <a:spAutoFit/>
+          </a:bodyPr>
+          <a:lstStyle/>
+          <a:p>
+            <a:pPr algn="l">
+              <a:lnSpc>
+                <a:spcPct val="125000"/>
+              </a:lnSpc>
+              <a:spcAft>
+                <a:spcPts val="0"/>
+              </a:spcAft>
+            </a:pPr>
+            <a:r>
+              <a:rPr sz="1400" b="0" i="0">
                 <a:solidFill>
                   <a:srgbClr val="1A1A1A"/>
                 </a:solidFill>
@@ -7030,11 +6888,10 @@
           </a:fontRef>
         </p:style>
         <p:txBody>
-          <a:bodyPr wrap="square" rtlCol="0" anchor="ctr"/>
+          <a:bodyPr rtlCol="0" anchor="ctr" wrap="square"/>
           <a:lstStyle/>
           <a:p>
             <a:pPr algn="ctr"/>
-            <a:endParaRPr/>
           </a:p>
         </p:txBody>
       </p:sp>
@@ -7047,29 +6904,29 @@
         <p:spPr>
           <a:xfrm>
             <a:off x="1106424" y="4407408"/>
-            <a:ext cx="10308031" cy="312265"/>
-          </a:xfrm>
-          <a:prstGeom prst="rect">
-            <a:avLst/>
-          </a:prstGeom>
-          <a:noFill/>
-        </p:spPr>
-        <p:txBody>
-          <a:bodyPr wrap="square" lIns="0" tIns="0" rIns="0" bIns="0" anchor="t">
-            <a:spAutoFit/>
-          </a:bodyPr>
-          <a:lstStyle/>
-          <a:p>
-            <a:pPr algn="l">
-              <a:lnSpc>
-                <a:spcPct val="125000"/>
-              </a:lnSpc>
-              <a:spcAft>
-                <a:spcPts val="0"/>
-              </a:spcAft>
-            </a:pPr>
-            <a:r>
-              <a:rPr b="0" i="0">
+            <a:ext cx="10308031" cy="502920"/>
+          </a:xfrm>
+          <a:prstGeom prst="rect">
+            <a:avLst/>
+          </a:prstGeom>
+          <a:noFill/>
+        </p:spPr>
+        <p:txBody>
+          <a:bodyPr wrap="square" anchor="t" lIns="0" rIns="0" tIns="0" bIns="0">
+            <a:spAutoFit/>
+          </a:bodyPr>
+          <a:lstStyle/>
+          <a:p>
+            <a:pPr algn="l">
+              <a:lnSpc>
+                <a:spcPct val="125000"/>
+              </a:lnSpc>
+              <a:spcAft>
+                <a:spcPts val="0"/>
+              </a:spcAft>
+            </a:pPr>
+            <a:r>
+              <a:rPr sz="1400" b="0" i="0">
                 <a:solidFill>
                   <a:srgbClr val="1A1A1A"/>
                 </a:solidFill>
@@ -7117,11 +6974,10 @@
           </a:fontRef>
         </p:style>
         <p:txBody>
-          <a:bodyPr wrap="square" rtlCol="0" anchor="ctr"/>
+          <a:bodyPr rtlCol="0" anchor="ctr" wrap="square"/>
           <a:lstStyle/>
           <a:p>
             <a:pPr algn="ctr"/>
-            <a:endParaRPr/>
           </a:p>
         </p:txBody>
       </p:sp>
@@ -7134,29 +6990,29 @@
         <p:spPr>
           <a:xfrm>
             <a:off x="1106424" y="4974336"/>
-            <a:ext cx="10308031" cy="312265"/>
-          </a:xfrm>
-          <a:prstGeom prst="rect">
-            <a:avLst/>
-          </a:prstGeom>
-          <a:noFill/>
-        </p:spPr>
-        <p:txBody>
-          <a:bodyPr wrap="square" lIns="0" tIns="0" rIns="0" bIns="0" anchor="t">
-            <a:spAutoFit/>
-          </a:bodyPr>
-          <a:lstStyle/>
-          <a:p>
-            <a:pPr algn="l">
-              <a:lnSpc>
-                <a:spcPct val="125000"/>
-              </a:lnSpc>
-              <a:spcAft>
-                <a:spcPts val="0"/>
-              </a:spcAft>
-            </a:pPr>
-            <a:r>
-              <a:rPr b="0" i="0">
+            <a:ext cx="10308031" cy="502920"/>
+          </a:xfrm>
+          <a:prstGeom prst="rect">
+            <a:avLst/>
+          </a:prstGeom>
+          <a:noFill/>
+        </p:spPr>
+        <p:txBody>
+          <a:bodyPr wrap="square" anchor="t" lIns="0" rIns="0" tIns="0" bIns="0">
+            <a:spAutoFit/>
+          </a:bodyPr>
+          <a:lstStyle/>
+          <a:p>
+            <a:pPr algn="l">
+              <a:lnSpc>
+                <a:spcPct val="125000"/>
+              </a:lnSpc>
+              <a:spcAft>
+                <a:spcPts val="0"/>
+              </a:spcAft>
+            </a:pPr>
+            <a:r>
+              <a:rPr sz="1400" b="0" i="0">
                 <a:solidFill>
                   <a:srgbClr val="1A1A1A"/>
                 </a:solidFill>
@@ -7184,7 +7040,7 @@
           <a:noFill/>
         </p:spPr>
         <p:txBody>
-          <a:bodyPr wrap="square" lIns="0" tIns="0" rIns="0" bIns="0" anchor="t">
+          <a:bodyPr wrap="square" anchor="t" lIns="0" rIns="0" tIns="0" bIns="0">
             <a:spAutoFit/>
           </a:bodyPr>
           <a:lstStyle/>
@@ -7204,7 +7060,7 @@
                 </a:solidFill>
                 <a:latin typeface="Arial"/>
               </a:rPr>
-              <a:t>6_patentreports/</a:t>
+              <a:t>5_patentreports/</a:t>
             </a:r>
           </a:p>
         </p:txBody>
@@ -7226,7 +7082,7 @@
           <a:noFill/>
         </p:spPr>
         <p:txBody>
-          <a:bodyPr wrap="square" lIns="0" tIns="0" rIns="0" bIns="0" anchor="t">
+          <a:bodyPr wrap="square" anchor="t" lIns="0" rIns="0" tIns="0" bIns="0">
             <a:spAutoFit/>
           </a:bodyPr>
           <a:lstStyle/>
@@ -7260,7 +7116,7 @@
 </file>
 
 <file path=ppt/slides/slide15.xml><?xml version="1.0" encoding="utf-8"?>
-<p:sld xmlns:a="http://schemas.openxmlformats.org/drawingml/2006/main" xmlns:r="http://schemas.openxmlformats.org/officeDocument/2006/relationships" xmlns:p="http://schemas.openxmlformats.org/presentationml/2006/main">
+<p:sld xmlns:a="http://schemas.openxmlformats.org/drawingml/2006/main" xmlns:p="http://schemas.openxmlformats.org/presentationml/2006/main" xmlns:r="http://schemas.openxmlformats.org/officeDocument/2006/relationships">
   <p:cSld>
     <p:spTree>
       <p:nvGrpSpPr>
@@ -7268,14 +7124,7 @@
         <p:cNvGrpSpPr/>
         <p:nvPr/>
       </p:nvGrpSpPr>
-      <p:grpSpPr>
-        <a:xfrm>
-          <a:off x="0" y="0"/>
-          <a:ext cx="0" cy="0"/>
-          <a:chOff x="0" y="0"/>
-          <a:chExt cx="0" cy="0"/>
-        </a:xfrm>
-      </p:grpSpPr>
+      <p:grpSpPr/>
       <p:sp>
         <p:nvSpPr>
           <p:cNvPr id="2" name="TextBox 1"/>
@@ -7293,7 +7142,7 @@
           <a:noFill/>
         </p:spPr>
         <p:txBody>
-          <a:bodyPr wrap="square" lIns="0" tIns="0" rIns="0" bIns="0" anchor="t">
+          <a:bodyPr wrap="square" anchor="t" lIns="0" rIns="0" tIns="0" bIns="0">
             <a:spAutoFit/>
           </a:bodyPr>
           <a:lstStyle/>
@@ -7313,7 +7162,7 @@
                 </a:solidFill>
                 <a:latin typeface="Arial"/>
               </a:rPr>
-              <a:t>RICCARDO — TWO USE CASES · MODULE 6</a:t>
+              <a:t>RICCARDO — TWO USE CASES · MODULE 5</a:t>
             </a:r>
           </a:p>
         </p:txBody>
@@ -7335,7 +7184,7 @@
           <a:noFill/>
         </p:spPr>
         <p:txBody>
-          <a:bodyPr wrap="square" lIns="0" tIns="0" rIns="0" bIns="0" anchor="t">
+          <a:bodyPr wrap="square" anchor="t" lIns="0" rIns="0" tIns="0" bIns="0">
             <a:spAutoFit/>
           </a:bodyPr>
           <a:lstStyle/>
@@ -7377,7 +7226,7 @@
           <a:noFill/>
         </p:spPr>
         <p:txBody>
-          <a:bodyPr wrap="square" lIns="0" tIns="0" rIns="0" bIns="0" anchor="t">
+          <a:bodyPr wrap="square" anchor="t" lIns="0" rIns="0" tIns="0" bIns="0">
             <a:spAutoFit/>
           </a:bodyPr>
           <a:lstStyle/>
@@ -7404,7 +7253,7 @@
       </p:sp>
       <p:pic>
         <p:nvPicPr>
-          <p:cNvPr id="5" name="Picture 4" descr="06.png"/>
+          <p:cNvPr id="5" name="Picture 4" descr="05.png"/>
           <p:cNvPicPr>
             <a:picLocks noChangeAspect="1"/>
           </p:cNvPicPr>
@@ -7418,8 +7267,8 @@
         </p:blipFill>
         <p:spPr>
           <a:xfrm>
-            <a:off x="328903" y="2528047"/>
-            <a:ext cx="6970752" cy="2569672"/>
+            <a:off x="777240" y="2546396"/>
+            <a:ext cx="6400800" cy="2359567"/>
           </a:xfrm>
           <a:prstGeom prst="rect">
             <a:avLst/>
@@ -7465,11 +7314,10 @@
           </a:fontRef>
         </p:style>
         <p:txBody>
-          <a:bodyPr wrap="square" rtlCol="0" anchor="ctr"/>
+          <a:bodyPr rtlCol="0" anchor="ctr" wrap="square"/>
           <a:lstStyle/>
           <a:p>
             <a:pPr algn="ctr"/>
-            <a:endParaRPr/>
           </a:p>
         </p:txBody>
       </p:sp>
@@ -7490,7 +7338,7 @@
           <a:noFill/>
         </p:spPr>
         <p:txBody>
-          <a:bodyPr wrap="square" lIns="0" tIns="0" rIns="0" bIns="0" anchor="t">
+          <a:bodyPr wrap="square" anchor="t" lIns="0" rIns="0" tIns="0" bIns="0">
             <a:spAutoFit/>
           </a:bodyPr>
           <a:lstStyle/>
@@ -7532,7 +7380,7 @@
           <a:noFill/>
         </p:spPr>
         <p:txBody>
-          <a:bodyPr wrap="square" lIns="0" tIns="0" rIns="0" bIns="0" anchor="t">
+          <a:bodyPr wrap="square" anchor="t" lIns="0" rIns="0" tIns="0" bIns="0">
             <a:spAutoFit/>
           </a:bodyPr>
           <a:lstStyle/>
@@ -7634,11 +7482,10 @@
           </a:fontRef>
         </p:style>
         <p:txBody>
-          <a:bodyPr wrap="square" rtlCol="0" anchor="ctr"/>
+          <a:bodyPr rtlCol="0" anchor="ctr" wrap="square"/>
           <a:lstStyle/>
           <a:p>
             <a:pPr algn="ctr"/>
-            <a:endParaRPr/>
           </a:p>
         </p:txBody>
       </p:sp>
@@ -7659,7 +7506,7 @@
           <a:noFill/>
         </p:spPr>
         <p:txBody>
-          <a:bodyPr wrap="square" lIns="0" tIns="0" rIns="0" bIns="0" anchor="t">
+          <a:bodyPr wrap="square" anchor="t" lIns="0" rIns="0" tIns="0" bIns="0">
             <a:spAutoFit/>
           </a:bodyPr>
           <a:lstStyle/>
@@ -7701,7 +7548,7 @@
           <a:noFill/>
         </p:spPr>
         <p:txBody>
-          <a:bodyPr wrap="square" lIns="0" tIns="0" rIns="0" bIns="0" anchor="t">
+          <a:bodyPr wrap="square" anchor="t" lIns="0" rIns="0" tIns="0" bIns="0">
             <a:spAutoFit/>
           </a:bodyPr>
           <a:lstStyle/>
@@ -7803,11 +7650,10 @@
           </a:fontRef>
         </p:style>
         <p:txBody>
-          <a:bodyPr wrap="square" rtlCol="0" anchor="ctr"/>
+          <a:bodyPr rtlCol="0" anchor="ctr" wrap="square"/>
           <a:lstStyle/>
           <a:p>
             <a:pPr algn="ctr"/>
-            <a:endParaRPr/>
           </a:p>
         </p:txBody>
       </p:sp>
@@ -7828,7 +7674,7 @@
           <a:noFill/>
         </p:spPr>
         <p:txBody>
-          <a:bodyPr wrap="square" lIns="0" tIns="0" rIns="0" bIns="0" anchor="t">
+          <a:bodyPr wrap="square" anchor="t" lIns="0" rIns="0" tIns="0" bIns="0">
             <a:spAutoFit/>
           </a:bodyPr>
           <a:lstStyle/>
@@ -7870,7 +7716,7 @@
           <a:noFill/>
         </p:spPr>
         <p:txBody>
-          <a:bodyPr wrap="square" lIns="0" tIns="0" rIns="0" bIns="0" anchor="t">
+          <a:bodyPr wrap="square" anchor="t" lIns="0" rIns="0" tIns="0" bIns="0">
             <a:spAutoFit/>
           </a:bodyPr>
           <a:lstStyle/>
@@ -7950,7 +7796,7 @@
           <a:noFill/>
         </p:spPr>
         <p:txBody>
-          <a:bodyPr wrap="square" lIns="0" tIns="0" rIns="0" bIns="0" anchor="t">
+          <a:bodyPr wrap="square" anchor="t" lIns="0" rIns="0" tIns="0" bIns="0">
             <a:spAutoFit/>
           </a:bodyPr>
           <a:lstStyle/>
@@ -7970,7 +7816,7 @@
                 </a:solidFill>
                 <a:latin typeface="Arial"/>
               </a:rPr>
-              <a:t>6_patentreports/</a:t>
+              <a:t>5_patentreports/</a:t>
             </a:r>
           </a:p>
         </p:txBody>
@@ -7992,7 +7838,7 @@
           <a:noFill/>
         </p:spPr>
         <p:txBody>
-          <a:bodyPr wrap="square" lIns="0" tIns="0" rIns="0" bIns="0" anchor="t">
+          <a:bodyPr wrap="square" anchor="t" lIns="0" rIns="0" tIns="0" bIns="0">
             <a:spAutoFit/>
           </a:bodyPr>
           <a:lstStyle/>
@@ -8026,7 +7872,7 @@
 </file>
 
 <file path=ppt/slides/slide16.xml><?xml version="1.0" encoding="utf-8"?>
-<p:sld xmlns:a="http://schemas.openxmlformats.org/drawingml/2006/main" xmlns:r="http://schemas.openxmlformats.org/officeDocument/2006/relationships" xmlns:p="http://schemas.openxmlformats.org/presentationml/2006/main">
+<p:sld xmlns:a="http://schemas.openxmlformats.org/drawingml/2006/main" xmlns:p="http://schemas.openxmlformats.org/presentationml/2006/main" xmlns:r="http://schemas.openxmlformats.org/officeDocument/2006/relationships">
   <p:cSld>
     <p:spTree>
       <p:nvGrpSpPr>
@@ -8034,14 +7880,7 @@
         <p:cNvGrpSpPr/>
         <p:nvPr/>
       </p:nvGrpSpPr>
-      <p:grpSpPr>
-        <a:xfrm>
-          <a:off x="0" y="0"/>
-          <a:ext cx="0" cy="0"/>
-          <a:chOff x="0" y="0"/>
-          <a:chExt cx="0" cy="0"/>
-        </a:xfrm>
-      </p:grpSpPr>
+      <p:grpSpPr/>
       <p:sp>
         <p:nvSpPr>
           <p:cNvPr id="2" name="TextBox 1"/>
@@ -8059,7 +7898,7 @@
           <a:noFill/>
         </p:spPr>
         <p:txBody>
-          <a:bodyPr wrap="square" lIns="0" tIns="0" rIns="0" bIns="0" anchor="t">
+          <a:bodyPr wrap="square" anchor="t" lIns="0" rIns="0" tIns="0" bIns="0">
             <a:spAutoFit/>
           </a:bodyPr>
           <a:lstStyle/>
@@ -8079,7 +7918,7 @@
                 </a:solidFill>
                 <a:latin typeface="Arial"/>
               </a:rPr>
-              <a:t>RICCARDO — TWO USE CASES · MODULE 6</a:t>
+              <a:t>RICCARDO — TWO USE CASES · MODULE 5</a:t>
             </a:r>
           </a:p>
         </p:txBody>
@@ -8101,7 +7940,7 @@
           <a:noFill/>
         </p:spPr>
         <p:txBody>
-          <a:bodyPr wrap="square" lIns="0" tIns="0" rIns="0" bIns="0" anchor="t">
+          <a:bodyPr wrap="square" anchor="t" lIns="0" rIns="0" tIns="0" bIns="0">
             <a:spAutoFit/>
           </a:bodyPr>
           <a:lstStyle/>
@@ -8143,7 +7982,7 @@
           <a:noFill/>
         </p:spPr>
         <p:txBody>
-          <a:bodyPr wrap="square" lIns="0" tIns="0" rIns="0" bIns="0" anchor="t">
+          <a:bodyPr wrap="square" anchor="t" lIns="0" rIns="0" tIns="0" bIns="0">
             <a:spAutoFit/>
           </a:bodyPr>
           <a:lstStyle/>
@@ -8207,7 +8046,7 @@
           </a:fontRef>
         </p:style>
         <p:txBody>
-          <a:bodyPr wrap="square" lIns="274320" rIns="274320" rtlCol="0" anchor="ctr"/>
+          <a:bodyPr rtlCol="0" anchor="ctr" wrap="square" lIns="274320" rIns="274320"/>
           <a:lstStyle/>
           <a:p>
             <a:pPr algn="l">
@@ -8219,7 +8058,7 @@
               </a:spcAft>
             </a:pPr>
             <a:r>
-              <a:rPr sz="2000" b="0" i="0" dirty="0">
+              <a:rPr sz="1400" b="0" i="0">
                 <a:solidFill>
                   <a:srgbClr val="1A1A1A"/>
                 </a:solidFill>
@@ -8269,7 +8108,7 @@
           </a:fontRef>
         </p:style>
         <p:txBody>
-          <a:bodyPr wrap="square" lIns="274320" rIns="274320" rtlCol="0" anchor="ctr"/>
+          <a:bodyPr rtlCol="0" anchor="ctr" wrap="square" lIns="274320" rIns="274320"/>
           <a:lstStyle/>
           <a:p>
             <a:pPr algn="l">
@@ -8281,7 +8120,7 @@
               </a:spcAft>
             </a:pPr>
             <a:r>
-              <a:rPr sz="2000" b="0" i="0">
+              <a:rPr sz="1400" b="0" i="0">
                 <a:solidFill>
                   <a:srgbClr val="1A1A1A"/>
                 </a:solidFill>
@@ -8331,7 +8170,7 @@
           </a:fontRef>
         </p:style>
         <p:txBody>
-          <a:bodyPr wrap="square" lIns="274320" rIns="274320" rtlCol="0" anchor="ctr"/>
+          <a:bodyPr rtlCol="0" anchor="ctr" wrap="square" lIns="274320" rIns="274320"/>
           <a:lstStyle/>
           <a:p>
             <a:pPr algn="l">
@@ -8343,7 +8182,7 @@
               </a:spcAft>
             </a:pPr>
             <a:r>
-              <a:rPr sz="2000" b="0" i="0">
+              <a:rPr sz="1400" b="0" i="0">
                 <a:solidFill>
                   <a:srgbClr val="1A1A1A"/>
                 </a:solidFill>
@@ -8371,7 +8210,7 @@
           <a:noFill/>
         </p:spPr>
         <p:txBody>
-          <a:bodyPr wrap="square" lIns="0" tIns="0" rIns="0" bIns="0" anchor="t">
+          <a:bodyPr wrap="square" anchor="t" lIns="0" rIns="0" tIns="0" bIns="0">
             <a:spAutoFit/>
           </a:bodyPr>
           <a:lstStyle/>
@@ -8437,19 +8276,19 @@
           </a:fontRef>
         </p:style>
         <p:txBody>
-          <a:bodyPr wrap="square" lIns="310896" rIns="310896" rtlCol="0" anchor="ctr"/>
-          <a:lstStyle/>
-          <a:p>
-            <a:pPr algn="l">
-              <a:lnSpc>
-                <a:spcPct val="125000"/>
-              </a:lnSpc>
-              <a:spcAft>
-                <a:spcPts val="0"/>
-              </a:spcAft>
-            </a:pPr>
-            <a:r>
-              <a:rPr sz="2400" b="1" i="0">
+          <a:bodyPr rtlCol="0" anchor="ctr" wrap="square" lIns="310896" rIns="310896"/>
+          <a:lstStyle/>
+          <a:p>
+            <a:pPr algn="l">
+              <a:lnSpc>
+                <a:spcPct val="125000"/>
+              </a:lnSpc>
+              <a:spcAft>
+                <a:spcPts val="0"/>
+              </a:spcAft>
+            </a:pPr>
+            <a:r>
+              <a:rPr sz="1600" b="1" i="0">
                 <a:solidFill>
                   <a:srgbClr val="BE0F05"/>
                 </a:solidFill>
@@ -8477,7 +8316,7 @@
           <a:noFill/>
         </p:spPr>
         <p:txBody>
-          <a:bodyPr wrap="square" lIns="0" tIns="0" rIns="0" bIns="0" anchor="t">
+          <a:bodyPr wrap="square" anchor="t" lIns="0" rIns="0" tIns="0" bIns="0">
             <a:spAutoFit/>
           </a:bodyPr>
           <a:lstStyle/>
@@ -8497,7 +8336,7 @@
                 </a:solidFill>
                 <a:latin typeface="Arial"/>
               </a:rPr>
-              <a:t>6_patentreports/</a:t>
+              <a:t>5_patentreports/</a:t>
             </a:r>
           </a:p>
         </p:txBody>
@@ -8519,7 +8358,7 @@
           <a:noFill/>
         </p:spPr>
         <p:txBody>
-          <a:bodyPr wrap="square" lIns="0" tIns="0" rIns="0" bIns="0" anchor="t">
+          <a:bodyPr wrap="square" anchor="t" lIns="0" rIns="0" tIns="0" bIns="0">
             <a:spAutoFit/>
           </a:bodyPr>
           <a:lstStyle/>
@@ -8553,7 +8392,7 @@
 </file>
 
 <file path=ppt/slides/slide17.xml><?xml version="1.0" encoding="utf-8"?>
-<p:sld xmlns:a="http://schemas.openxmlformats.org/drawingml/2006/main" xmlns:r="http://schemas.openxmlformats.org/officeDocument/2006/relationships" xmlns:p="http://schemas.openxmlformats.org/presentationml/2006/main">
+<p:sld xmlns:a="http://schemas.openxmlformats.org/drawingml/2006/main" xmlns:p="http://schemas.openxmlformats.org/presentationml/2006/main" xmlns:r="http://schemas.openxmlformats.org/officeDocument/2006/relationships">
   <p:cSld>
     <p:spTree>
       <p:nvGrpSpPr>
@@ -8561,14 +8400,7 @@
         <p:cNvGrpSpPr/>
         <p:nvPr/>
       </p:nvGrpSpPr>
-      <p:grpSpPr>
-        <a:xfrm>
-          <a:off x="0" y="0"/>
-          <a:ext cx="0" cy="0"/>
-          <a:chOff x="0" y="0"/>
-          <a:chExt cx="0" cy="0"/>
-        </a:xfrm>
-      </p:grpSpPr>
+      <p:grpSpPr/>
       <p:sp>
         <p:nvSpPr>
           <p:cNvPr id="2" name="TextBox 1"/>
@@ -8586,7 +8418,7 @@
           <a:noFill/>
         </p:spPr>
         <p:txBody>
-          <a:bodyPr wrap="square" lIns="0" tIns="0" rIns="0" bIns="0" anchor="t">
+          <a:bodyPr wrap="square" anchor="t" lIns="0" rIns="0" tIns="0" bIns="0">
             <a:spAutoFit/>
           </a:bodyPr>
           <a:lstStyle/>
@@ -8606,7 +8438,7 @@
                 </a:solidFill>
                 <a:latin typeface="Arial"/>
               </a:rPr>
-              <a:t>RICCARDO — TWO USE CASES · MODULE 8</a:t>
+              <a:t>RICCARDO — TWO USE CASES · MODULE 6</a:t>
             </a:r>
           </a:p>
         </p:txBody>
@@ -8628,7 +8460,7 @@
           <a:noFill/>
         </p:spPr>
         <p:txBody>
-          <a:bodyPr wrap="square" lIns="0" tIns="0" rIns="0" bIns="0" anchor="t">
+          <a:bodyPr wrap="square" anchor="t" lIns="0" rIns="0" tIns="0" bIns="0">
             <a:spAutoFit/>
           </a:bodyPr>
           <a:lstStyle/>
@@ -8662,15 +8494,15 @@
         <p:spPr>
           <a:xfrm>
             <a:off x="777240" y="868680"/>
-            <a:ext cx="10637215" cy="468398"/>
-          </a:xfrm>
-          <a:prstGeom prst="rect">
-            <a:avLst/>
-          </a:prstGeom>
-          <a:noFill/>
-        </p:spPr>
-        <p:txBody>
-          <a:bodyPr wrap="square" lIns="0" tIns="0" rIns="0" bIns="0" anchor="t">
+            <a:ext cx="10637215" cy="914400"/>
+          </a:xfrm>
+          <a:prstGeom prst="rect">
+            <a:avLst/>
+          </a:prstGeom>
+          <a:noFill/>
+        </p:spPr>
+        <p:txBody>
+          <a:bodyPr wrap="square" anchor="t" lIns="0" rIns="0" tIns="0" bIns="0">
             <a:spAutoFit/>
           </a:bodyPr>
           <a:lstStyle/>
@@ -8684,31 +8516,13 @@
               </a:spcAft>
             </a:pPr>
             <a:r>
-              <a:rPr sz="3000" b="1" i="0" dirty="0">
+              <a:rPr sz="3000" b="1" i="0">
                 <a:solidFill>
                   <a:srgbClr val="1A1A1A"/>
                 </a:solidFill>
                 <a:latin typeface="Arial"/>
               </a:rPr>
-              <a:t>Module </a:t>
-            </a:r>
-            <a:r>
-              <a:rPr lang="de-DE" sz="3000" b="1" i="0" dirty="0">
-                <a:solidFill>
-                  <a:srgbClr val="1A1A1A"/>
-                </a:solidFill>
-                <a:latin typeface="Arial"/>
-              </a:rPr>
-              <a:t>6</a:t>
-            </a:r>
-            <a:r>
-              <a:rPr sz="3000" b="1" i="0" dirty="0">
-                <a:solidFill>
-                  <a:srgbClr val="1A1A1A"/>
-                </a:solidFill>
-                <a:latin typeface="Arial"/>
-              </a:rPr>
-              <a:t> — What is this patent worth?</a:t>
+              <a:t>Module 6 — What is this patent worth?</a:t>
             </a:r>
           </a:p>
         </p:txBody>
@@ -8721,8 +8535,8 @@
         </p:nvSpPr>
         <p:spPr>
           <a:xfrm>
-            <a:off x="777241" y="1783080"/>
-            <a:ext cx="10461374" cy="1371600"/>
+            <a:off x="777240" y="1783080"/>
+            <a:ext cx="10637215" cy="1371600"/>
           </a:xfrm>
           <a:prstGeom prst="roundRect">
             <a:avLst>
@@ -8752,19 +8566,19 @@
           </a:fontRef>
         </p:style>
         <p:txBody>
-          <a:bodyPr wrap="square" lIns="310896" tIns="182880" rIns="310896" bIns="182880" rtlCol="0" anchor="ctr"/>
-          <a:lstStyle/>
-          <a:p>
-            <a:pPr algn="l">
-              <a:lnSpc>
-                <a:spcPct val="125000"/>
-              </a:lnSpc>
-              <a:spcAft>
-                <a:spcPts val="0"/>
-              </a:spcAft>
-            </a:pPr>
-            <a:r>
-              <a:rPr sz="2800" b="0" i="1" dirty="0">
+          <a:bodyPr rtlCol="0" anchor="ctr" wrap="square" lIns="310896" rIns="310896" tIns="182880" bIns="182880"/>
+          <a:lstStyle/>
+          <a:p>
+            <a:pPr algn="l">
+              <a:lnSpc>
+                <a:spcPct val="125000"/>
+              </a:lnSpc>
+              <a:spcAft>
+                <a:spcPts val="0"/>
+              </a:spcAft>
+            </a:pPr>
+            <a:r>
+              <a:rPr sz="1800" b="0" i="1">
                 <a:solidFill>
                   <a:srgbClr val="BE0F05"/>
                 </a:solidFill>
@@ -8792,7 +8606,7 @@
           <a:noFill/>
         </p:spPr>
         <p:txBody>
-          <a:bodyPr wrap="square" lIns="0" tIns="0" rIns="0" bIns="0" anchor="t">
+          <a:bodyPr wrap="square" anchor="t" lIns="0" rIns="0" tIns="0" bIns="0">
             <a:spAutoFit/>
           </a:bodyPr>
           <a:lstStyle/>
@@ -8854,11 +8668,10 @@
           </a:fontRef>
         </p:style>
         <p:txBody>
-          <a:bodyPr wrap="square" rtlCol="0" anchor="ctr"/>
+          <a:bodyPr rtlCol="0" anchor="ctr" wrap="square"/>
           <a:lstStyle/>
           <a:p>
             <a:pPr algn="ctr"/>
-            <a:endParaRPr/>
           </a:p>
         </p:txBody>
       </p:sp>
@@ -8871,29 +8684,29 @@
         <p:spPr>
           <a:xfrm>
             <a:off x="1106424" y="3840480"/>
-            <a:ext cx="10308031" cy="312265"/>
-          </a:xfrm>
-          <a:prstGeom prst="rect">
-            <a:avLst/>
-          </a:prstGeom>
-          <a:noFill/>
-        </p:spPr>
-        <p:txBody>
-          <a:bodyPr wrap="square" lIns="0" tIns="0" rIns="0" bIns="0" anchor="t">
-            <a:spAutoFit/>
-          </a:bodyPr>
-          <a:lstStyle/>
-          <a:p>
-            <a:pPr algn="l">
-              <a:lnSpc>
-                <a:spcPct val="125000"/>
-              </a:lnSpc>
-              <a:spcAft>
-                <a:spcPts val="0"/>
-              </a:spcAft>
-            </a:pPr>
-            <a:r>
-              <a:rPr b="0" i="0">
+            <a:ext cx="10308031" cy="502920"/>
+          </a:xfrm>
+          <a:prstGeom prst="rect">
+            <a:avLst/>
+          </a:prstGeom>
+          <a:noFill/>
+        </p:spPr>
+        <p:txBody>
+          <a:bodyPr wrap="square" anchor="t" lIns="0" rIns="0" tIns="0" bIns="0">
+            <a:spAutoFit/>
+          </a:bodyPr>
+          <a:lstStyle/>
+          <a:p>
+            <a:pPr algn="l">
+              <a:lnSpc>
+                <a:spcPct val="125000"/>
+              </a:lnSpc>
+              <a:spcAft>
+                <a:spcPts val="0"/>
+              </a:spcAft>
+            </a:pPr>
+            <a:r>
+              <a:rPr sz="1400" b="0" i="0">
                 <a:solidFill>
                   <a:srgbClr val="1A1A1A"/>
                 </a:solidFill>
@@ -8941,11 +8754,10 @@
           </a:fontRef>
         </p:style>
         <p:txBody>
-          <a:bodyPr wrap="square" rtlCol="0" anchor="ctr"/>
+          <a:bodyPr rtlCol="0" anchor="ctr" wrap="square"/>
           <a:lstStyle/>
           <a:p>
             <a:pPr algn="ctr"/>
-            <a:endParaRPr/>
           </a:p>
         </p:txBody>
       </p:sp>
@@ -8958,29 +8770,29 @@
         <p:spPr>
           <a:xfrm>
             <a:off x="1106424" y="4407408"/>
-            <a:ext cx="10308031" cy="312265"/>
-          </a:xfrm>
-          <a:prstGeom prst="rect">
-            <a:avLst/>
-          </a:prstGeom>
-          <a:noFill/>
-        </p:spPr>
-        <p:txBody>
-          <a:bodyPr wrap="square" lIns="0" tIns="0" rIns="0" bIns="0" anchor="t">
-            <a:spAutoFit/>
-          </a:bodyPr>
-          <a:lstStyle/>
-          <a:p>
-            <a:pPr algn="l">
-              <a:lnSpc>
-                <a:spcPct val="125000"/>
-              </a:lnSpc>
-              <a:spcAft>
-                <a:spcPts val="0"/>
-              </a:spcAft>
-            </a:pPr>
-            <a:r>
-              <a:rPr b="0" i="0">
+            <a:ext cx="10308031" cy="502920"/>
+          </a:xfrm>
+          <a:prstGeom prst="rect">
+            <a:avLst/>
+          </a:prstGeom>
+          <a:noFill/>
+        </p:spPr>
+        <p:txBody>
+          <a:bodyPr wrap="square" anchor="t" lIns="0" rIns="0" tIns="0" bIns="0">
+            <a:spAutoFit/>
+          </a:bodyPr>
+          <a:lstStyle/>
+          <a:p>
+            <a:pPr algn="l">
+              <a:lnSpc>
+                <a:spcPct val="125000"/>
+              </a:lnSpc>
+              <a:spcAft>
+                <a:spcPts val="0"/>
+              </a:spcAft>
+            </a:pPr>
+            <a:r>
+              <a:rPr sz="1400" b="0" i="0">
                 <a:solidFill>
                   <a:srgbClr val="1A1A1A"/>
                 </a:solidFill>
@@ -9028,11 +8840,10 @@
           </a:fontRef>
         </p:style>
         <p:txBody>
-          <a:bodyPr wrap="square" rtlCol="0" anchor="ctr"/>
+          <a:bodyPr rtlCol="0" anchor="ctr" wrap="square"/>
           <a:lstStyle/>
           <a:p>
             <a:pPr algn="ctr"/>
-            <a:endParaRPr/>
           </a:p>
         </p:txBody>
       </p:sp>
@@ -9045,29 +8856,29 @@
         <p:spPr>
           <a:xfrm>
             <a:off x="1106424" y="4974336"/>
-            <a:ext cx="10308031" cy="312265"/>
-          </a:xfrm>
-          <a:prstGeom prst="rect">
-            <a:avLst/>
-          </a:prstGeom>
-          <a:noFill/>
-        </p:spPr>
-        <p:txBody>
-          <a:bodyPr wrap="square" lIns="0" tIns="0" rIns="0" bIns="0" anchor="t">
-            <a:spAutoFit/>
-          </a:bodyPr>
-          <a:lstStyle/>
-          <a:p>
-            <a:pPr algn="l">
-              <a:lnSpc>
-                <a:spcPct val="125000"/>
-              </a:lnSpc>
-              <a:spcAft>
-                <a:spcPts val="0"/>
-              </a:spcAft>
-            </a:pPr>
-            <a:r>
-              <a:rPr b="0" i="0">
+            <a:ext cx="10308031" cy="502920"/>
+          </a:xfrm>
+          <a:prstGeom prst="rect">
+            <a:avLst/>
+          </a:prstGeom>
+          <a:noFill/>
+        </p:spPr>
+        <p:txBody>
+          <a:bodyPr wrap="square" anchor="t" lIns="0" rIns="0" tIns="0" bIns="0">
+            <a:spAutoFit/>
+          </a:bodyPr>
+          <a:lstStyle/>
+          <a:p>
+            <a:pPr algn="l">
+              <a:lnSpc>
+                <a:spcPct val="125000"/>
+              </a:lnSpc>
+              <a:spcAft>
+                <a:spcPts val="0"/>
+              </a:spcAft>
+            </a:pPr>
+            <a:r>
+              <a:rPr sz="1400" b="0" i="0">
                 <a:solidFill>
                   <a:srgbClr val="1A1A1A"/>
                 </a:solidFill>
@@ -9095,7 +8906,7 @@
           <a:noFill/>
         </p:spPr>
         <p:txBody>
-          <a:bodyPr wrap="square" lIns="0" tIns="0" rIns="0" bIns="0" anchor="t">
+          <a:bodyPr wrap="square" anchor="t" lIns="0" rIns="0" tIns="0" bIns="0">
             <a:spAutoFit/>
           </a:bodyPr>
           <a:lstStyle/>
@@ -9115,7 +8926,7 @@
                 </a:solidFill>
                 <a:latin typeface="Arial"/>
               </a:rPr>
-              <a:t>8_ipscore_rebuild/</a:t>
+              <a:t>6_ipscore_rebuild/</a:t>
             </a:r>
           </a:p>
         </p:txBody>
@@ -9137,7 +8948,7 @@
           <a:noFill/>
         </p:spPr>
         <p:txBody>
-          <a:bodyPr wrap="square" lIns="0" tIns="0" rIns="0" bIns="0" anchor="t">
+          <a:bodyPr wrap="square" anchor="t" lIns="0" rIns="0" tIns="0" bIns="0">
             <a:spAutoFit/>
           </a:bodyPr>
           <a:lstStyle/>
@@ -9171,7 +8982,7 @@
 </file>
 
 <file path=ppt/slides/slide18.xml><?xml version="1.0" encoding="utf-8"?>
-<p:sld xmlns:a="http://schemas.openxmlformats.org/drawingml/2006/main" xmlns:r="http://schemas.openxmlformats.org/officeDocument/2006/relationships" xmlns:p="http://schemas.openxmlformats.org/presentationml/2006/main">
+<p:sld xmlns:a="http://schemas.openxmlformats.org/drawingml/2006/main" xmlns:p="http://schemas.openxmlformats.org/presentationml/2006/main" xmlns:r="http://schemas.openxmlformats.org/officeDocument/2006/relationships">
   <p:cSld>
     <p:spTree>
       <p:nvGrpSpPr>
@@ -9179,14 +8990,7 @@
         <p:cNvGrpSpPr/>
         <p:nvPr/>
       </p:nvGrpSpPr>
-      <p:grpSpPr>
-        <a:xfrm>
-          <a:off x="0" y="0"/>
-          <a:ext cx="0" cy="0"/>
-          <a:chOff x="0" y="0"/>
-          <a:chExt cx="0" cy="0"/>
-        </a:xfrm>
-      </p:grpSpPr>
+      <p:grpSpPr/>
       <p:sp>
         <p:nvSpPr>
           <p:cNvPr id="2" name="TextBox 1"/>
@@ -9204,7 +9008,7 @@
           <a:noFill/>
         </p:spPr>
         <p:txBody>
-          <a:bodyPr wrap="square" lIns="0" tIns="0" rIns="0" bIns="0" anchor="t">
+          <a:bodyPr wrap="square" anchor="t" lIns="0" rIns="0" tIns="0" bIns="0">
             <a:spAutoFit/>
           </a:bodyPr>
           <a:lstStyle/>
@@ -9224,7 +9028,7 @@
                 </a:solidFill>
                 <a:latin typeface="Arial"/>
               </a:rPr>
-              <a:t>RICCARDO — TWO USE CASES · MODULE 8</a:t>
+              <a:t>RICCARDO — TWO USE CASES · MODULE 6</a:t>
             </a:r>
           </a:p>
         </p:txBody>
@@ -9246,7 +9050,7 @@
           <a:noFill/>
         </p:spPr>
         <p:txBody>
-          <a:bodyPr wrap="square" lIns="0" tIns="0" rIns="0" bIns="0" anchor="t">
+          <a:bodyPr wrap="square" anchor="t" lIns="0" rIns="0" tIns="0" bIns="0">
             <a:spAutoFit/>
           </a:bodyPr>
           <a:lstStyle/>
@@ -9288,7 +9092,7 @@
           <a:noFill/>
         </p:spPr>
         <p:txBody>
-          <a:bodyPr wrap="square" lIns="0" tIns="0" rIns="0" bIns="0" anchor="t">
+          <a:bodyPr wrap="square" anchor="t" lIns="0" rIns="0" tIns="0" bIns="0">
             <a:spAutoFit/>
           </a:bodyPr>
           <a:lstStyle/>
@@ -9315,7 +9119,7 @@
       </p:sp>
       <p:pic>
         <p:nvPicPr>
-          <p:cNvPr id="5" name="Picture 4" descr="08.png"/>
+          <p:cNvPr id="5" name="Picture 4" descr="06.png"/>
           <p:cNvPicPr>
             <a:picLocks noChangeAspect="1"/>
           </p:cNvPicPr>
@@ -9323,15 +9127,14 @@
         </p:nvPicPr>
         <p:blipFill>
           <a:blip r:embed="rId2"/>
-          <a:srcRect l="16071" r="14962"/>
           <a:stretch>
             <a:fillRect/>
           </a:stretch>
         </p:blipFill>
         <p:spPr>
           <a:xfrm>
-            <a:off x="701005" y="1631465"/>
-            <a:ext cx="6553271" cy="4033982"/>
+            <a:off x="777240" y="2367464"/>
+            <a:ext cx="6400800" cy="2717430"/>
           </a:xfrm>
           <a:prstGeom prst="rect">
             <a:avLst/>
@@ -9377,11 +9180,10 @@
           </a:fontRef>
         </p:style>
         <p:txBody>
-          <a:bodyPr wrap="square" rtlCol="0" anchor="ctr"/>
+          <a:bodyPr rtlCol="0" anchor="ctr" wrap="square"/>
           <a:lstStyle/>
           <a:p>
             <a:pPr algn="ctr"/>
-            <a:endParaRPr/>
           </a:p>
         </p:txBody>
       </p:sp>
@@ -9402,7 +9204,7 @@
           <a:noFill/>
         </p:spPr>
         <p:txBody>
-          <a:bodyPr wrap="square" lIns="0" tIns="0" rIns="0" bIns="0" anchor="t">
+          <a:bodyPr wrap="square" anchor="t" lIns="0" rIns="0" tIns="0" bIns="0">
             <a:spAutoFit/>
           </a:bodyPr>
           <a:lstStyle/>
@@ -9444,7 +9246,7 @@
           <a:noFill/>
         </p:spPr>
         <p:txBody>
-          <a:bodyPr wrap="square" lIns="0" tIns="0" rIns="0" bIns="0" anchor="t">
+          <a:bodyPr wrap="square" anchor="t" lIns="0" rIns="0" tIns="0" bIns="0">
             <a:spAutoFit/>
           </a:bodyPr>
           <a:lstStyle/>
@@ -9546,11 +9348,10 @@
           </a:fontRef>
         </p:style>
         <p:txBody>
-          <a:bodyPr wrap="square" rtlCol="0" anchor="ctr"/>
+          <a:bodyPr rtlCol="0" anchor="ctr" wrap="square"/>
           <a:lstStyle/>
           <a:p>
             <a:pPr algn="ctr"/>
-            <a:endParaRPr/>
           </a:p>
         </p:txBody>
       </p:sp>
@@ -9571,7 +9372,7 @@
           <a:noFill/>
         </p:spPr>
         <p:txBody>
-          <a:bodyPr wrap="square" lIns="0" tIns="0" rIns="0" bIns="0" anchor="t">
+          <a:bodyPr wrap="square" anchor="t" lIns="0" rIns="0" tIns="0" bIns="0">
             <a:spAutoFit/>
           </a:bodyPr>
           <a:lstStyle/>
@@ -9613,7 +9414,7 @@
           <a:noFill/>
         </p:spPr>
         <p:txBody>
-          <a:bodyPr wrap="square" lIns="0" tIns="0" rIns="0" bIns="0" anchor="t">
+          <a:bodyPr wrap="square" anchor="t" lIns="0" rIns="0" tIns="0" bIns="0">
             <a:spAutoFit/>
           </a:bodyPr>
           <a:lstStyle/>
@@ -9715,11 +9516,10 @@
           </a:fontRef>
         </p:style>
         <p:txBody>
-          <a:bodyPr wrap="square" rtlCol="0" anchor="ctr"/>
+          <a:bodyPr rtlCol="0" anchor="ctr" wrap="square"/>
           <a:lstStyle/>
           <a:p>
             <a:pPr algn="ctr"/>
-            <a:endParaRPr/>
           </a:p>
         </p:txBody>
       </p:sp>
@@ -9740,7 +9540,7 @@
           <a:noFill/>
         </p:spPr>
         <p:txBody>
-          <a:bodyPr wrap="square" lIns="0" tIns="0" rIns="0" bIns="0" anchor="t">
+          <a:bodyPr wrap="square" anchor="t" lIns="0" rIns="0" tIns="0" bIns="0">
             <a:spAutoFit/>
           </a:bodyPr>
           <a:lstStyle/>
@@ -9782,7 +9582,7 @@
           <a:noFill/>
         </p:spPr>
         <p:txBody>
-          <a:bodyPr wrap="square" lIns="0" tIns="0" rIns="0" bIns="0" anchor="t">
+          <a:bodyPr wrap="square" anchor="t" lIns="0" rIns="0" tIns="0" bIns="0">
             <a:spAutoFit/>
           </a:bodyPr>
           <a:lstStyle/>
@@ -9862,7 +9662,7 @@
           <a:noFill/>
         </p:spPr>
         <p:txBody>
-          <a:bodyPr wrap="square" lIns="0" tIns="0" rIns="0" bIns="0" anchor="t">
+          <a:bodyPr wrap="square" anchor="t" lIns="0" rIns="0" tIns="0" bIns="0">
             <a:spAutoFit/>
           </a:bodyPr>
           <a:lstStyle/>
@@ -9882,7 +9682,7 @@
                 </a:solidFill>
                 <a:latin typeface="Arial"/>
               </a:rPr>
-              <a:t>8_ipscore_rebuild/</a:t>
+              <a:t>6_ipscore_rebuild/</a:t>
             </a:r>
           </a:p>
         </p:txBody>
@@ -9904,7 +9704,7 @@
           <a:noFill/>
         </p:spPr>
         <p:txBody>
-          <a:bodyPr wrap="square" lIns="0" tIns="0" rIns="0" bIns="0" anchor="t">
+          <a:bodyPr wrap="square" anchor="t" lIns="0" rIns="0" tIns="0" bIns="0">
             <a:spAutoFit/>
           </a:bodyPr>
           <a:lstStyle/>
@@ -9938,7 +9738,7 @@
 </file>
 
 <file path=ppt/slides/slide19.xml><?xml version="1.0" encoding="utf-8"?>
-<p:sld xmlns:a="http://schemas.openxmlformats.org/drawingml/2006/main" xmlns:r="http://schemas.openxmlformats.org/officeDocument/2006/relationships" xmlns:p="http://schemas.openxmlformats.org/presentationml/2006/main">
+<p:sld xmlns:a="http://schemas.openxmlformats.org/drawingml/2006/main" xmlns:p="http://schemas.openxmlformats.org/presentationml/2006/main" xmlns:r="http://schemas.openxmlformats.org/officeDocument/2006/relationships">
   <p:cSld>
     <p:spTree>
       <p:nvGrpSpPr>
@@ -9946,14 +9746,7 @@
         <p:cNvGrpSpPr/>
         <p:nvPr/>
       </p:nvGrpSpPr>
-      <p:grpSpPr>
-        <a:xfrm>
-          <a:off x="0" y="0"/>
-          <a:ext cx="0" cy="0"/>
-          <a:chOff x="0" y="0"/>
-          <a:chExt cx="0" cy="0"/>
-        </a:xfrm>
-      </p:grpSpPr>
+      <p:grpSpPr/>
       <p:sp>
         <p:nvSpPr>
           <p:cNvPr id="2" name="TextBox 1"/>
@@ -9971,7 +9764,7 @@
           <a:noFill/>
         </p:spPr>
         <p:txBody>
-          <a:bodyPr wrap="square" lIns="0" tIns="0" rIns="0" bIns="0" anchor="t">
+          <a:bodyPr wrap="square" anchor="t" lIns="0" rIns="0" tIns="0" bIns="0">
             <a:spAutoFit/>
           </a:bodyPr>
           <a:lstStyle/>
@@ -9991,7 +9784,7 @@
                 </a:solidFill>
                 <a:latin typeface="Arial"/>
               </a:rPr>
-              <a:t>RICCARDO — TWO USE CASES · MODULE 8</a:t>
+              <a:t>RICCARDO — TWO USE CASES · MODULE 6</a:t>
             </a:r>
           </a:p>
         </p:txBody>
@@ -10013,7 +9806,7 @@
           <a:noFill/>
         </p:spPr>
         <p:txBody>
-          <a:bodyPr wrap="square" lIns="0" tIns="0" rIns="0" bIns="0" anchor="t">
+          <a:bodyPr wrap="square" anchor="t" lIns="0" rIns="0" tIns="0" bIns="0">
             <a:spAutoFit/>
           </a:bodyPr>
           <a:lstStyle/>
@@ -10055,7 +9848,7 @@
           <a:noFill/>
         </p:spPr>
         <p:txBody>
-          <a:bodyPr wrap="square" lIns="0" tIns="0" rIns="0" bIns="0" anchor="t">
+          <a:bodyPr wrap="square" anchor="t" lIns="0" rIns="0" tIns="0" bIns="0">
             <a:spAutoFit/>
           </a:bodyPr>
           <a:lstStyle/>
@@ -10119,7 +9912,7 @@
           </a:fontRef>
         </p:style>
         <p:txBody>
-          <a:bodyPr wrap="square" lIns="274320" rIns="274320" rtlCol="0" anchor="ctr"/>
+          <a:bodyPr rtlCol="0" anchor="ctr" wrap="square" lIns="274320" rIns="274320"/>
           <a:lstStyle/>
           <a:p>
             <a:pPr algn="l">
@@ -10131,31 +9924,13 @@
               </a:spcAft>
             </a:pPr>
             <a:r>
-              <a:rPr b="0" i="0" dirty="0">
+              <a:rPr sz="1400" b="0" i="0">
                 <a:solidFill>
                   <a:srgbClr val="1A1A1A"/>
                 </a:solidFill>
                 <a:latin typeface="Arial"/>
               </a:rPr>
-              <a:t>A verified implementation of the EPO </a:t>
-            </a:r>
-            <a:r>
-              <a:rPr b="0" i="0" dirty="0" err="1">
-                <a:solidFill>
-                  <a:srgbClr val="1A1A1A"/>
-                </a:solidFill>
-                <a:latin typeface="Arial"/>
-              </a:rPr>
-              <a:t>IPScore</a:t>
-            </a:r>
-            <a:r>
-              <a:rPr b="0" i="0" dirty="0">
-                <a:solidFill>
-                  <a:srgbClr val="1A1A1A"/>
-                </a:solidFill>
-                <a:latin typeface="Arial"/>
-              </a:rPr>
-              <a:t> model, seen from the inside</a:t>
+              <a:t>A verified implementation of the EPO IPScore model, seen from the inside</a:t>
             </a:r>
           </a:p>
         </p:txBody>
@@ -10199,7 +9974,7 @@
           </a:fontRef>
         </p:style>
         <p:txBody>
-          <a:bodyPr wrap="square" lIns="274320" rIns="274320" rtlCol="0" anchor="ctr"/>
+          <a:bodyPr rtlCol="0" anchor="ctr" wrap="square" lIns="274320" rIns="274320"/>
           <a:lstStyle/>
           <a:p>
             <a:pPr algn="l">
@@ -10211,7 +9986,7 @@
               </a:spcAft>
             </a:pPr>
             <a:r>
-              <a:rPr b="0" i="0">
+              <a:rPr sz="1400" b="0" i="0">
                 <a:solidFill>
                   <a:srgbClr val="1A1A1A"/>
                 </a:solidFill>
@@ -10261,7 +10036,7 @@
           </a:fontRef>
         </p:style>
         <p:txBody>
-          <a:bodyPr wrap="square" lIns="274320" rIns="274320" rtlCol="0" anchor="ctr"/>
+          <a:bodyPr rtlCol="0" anchor="ctr" wrap="square" lIns="274320" rIns="274320"/>
           <a:lstStyle/>
           <a:p>
             <a:pPr algn="l">
@@ -10273,7 +10048,7 @@
               </a:spcAft>
             </a:pPr>
             <a:r>
-              <a:rPr b="0" i="0">
+              <a:rPr sz="1400" b="0" i="0">
                 <a:solidFill>
                   <a:srgbClr val="1A1A1A"/>
                 </a:solidFill>
@@ -10301,7 +10076,7 @@
           <a:noFill/>
         </p:spPr>
         <p:txBody>
-          <a:bodyPr wrap="square" lIns="0" tIns="0" rIns="0" bIns="0" anchor="t">
+          <a:bodyPr wrap="square" anchor="t" lIns="0" rIns="0" tIns="0" bIns="0">
             <a:spAutoFit/>
           </a:bodyPr>
           <a:lstStyle/>
@@ -10367,19 +10142,19 @@
           </a:fontRef>
         </p:style>
         <p:txBody>
-          <a:bodyPr wrap="square" lIns="310896" rIns="310896" rtlCol="0" anchor="ctr"/>
-          <a:lstStyle/>
-          <a:p>
-            <a:pPr algn="l">
-              <a:lnSpc>
-                <a:spcPct val="125000"/>
-              </a:lnSpc>
-              <a:spcAft>
-                <a:spcPts val="0"/>
-              </a:spcAft>
-            </a:pPr>
-            <a:r>
-              <a:rPr sz="2000" b="1" i="0">
+          <a:bodyPr rtlCol="0" anchor="ctr" wrap="square" lIns="310896" rIns="310896"/>
+          <a:lstStyle/>
+          <a:p>
+            <a:pPr algn="l">
+              <a:lnSpc>
+                <a:spcPct val="125000"/>
+              </a:lnSpc>
+              <a:spcAft>
+                <a:spcPts val="0"/>
+              </a:spcAft>
+            </a:pPr>
+            <a:r>
+              <a:rPr sz="1600" b="1" i="0">
                 <a:solidFill>
                   <a:srgbClr val="BE0F05"/>
                 </a:solidFill>
@@ -10407,7 +10182,7 @@
           <a:noFill/>
         </p:spPr>
         <p:txBody>
-          <a:bodyPr wrap="square" lIns="0" tIns="0" rIns="0" bIns="0" anchor="t">
+          <a:bodyPr wrap="square" anchor="t" lIns="0" rIns="0" tIns="0" bIns="0">
             <a:spAutoFit/>
           </a:bodyPr>
           <a:lstStyle/>
@@ -10427,7 +10202,7 @@
                 </a:solidFill>
                 <a:latin typeface="Arial"/>
               </a:rPr>
-              <a:t>8_ipscore_rebuild/</a:t>
+              <a:t>6_ipscore_rebuild/</a:t>
             </a:r>
           </a:p>
         </p:txBody>
@@ -10449,7 +10224,7 @@
           <a:noFill/>
         </p:spPr>
         <p:txBody>
-          <a:bodyPr wrap="square" lIns="0" tIns="0" rIns="0" bIns="0" anchor="t">
+          <a:bodyPr wrap="square" anchor="t" lIns="0" rIns="0" tIns="0" bIns="0">
             <a:spAutoFit/>
           </a:bodyPr>
           <a:lstStyle/>
@@ -10483,7 +10258,7 @@
 </file>
 
 <file path=ppt/slides/slide2.xml><?xml version="1.0" encoding="utf-8"?>
-<p:sld xmlns:a="http://schemas.openxmlformats.org/drawingml/2006/main" xmlns:r="http://schemas.openxmlformats.org/officeDocument/2006/relationships" xmlns:p="http://schemas.openxmlformats.org/presentationml/2006/main">
+<p:sld xmlns:a="http://schemas.openxmlformats.org/drawingml/2006/main" xmlns:p="http://schemas.openxmlformats.org/presentationml/2006/main" xmlns:r="http://schemas.openxmlformats.org/officeDocument/2006/relationships">
   <p:cSld>
     <p:spTree>
       <p:nvGrpSpPr>
@@ -10491,14 +10266,7 @@
         <p:cNvGrpSpPr/>
         <p:nvPr/>
       </p:nvGrpSpPr>
-      <p:grpSpPr>
-        <a:xfrm>
-          <a:off x="0" y="0"/>
-          <a:ext cx="0" cy="0"/>
-          <a:chOff x="0" y="0"/>
-          <a:chExt cx="0" cy="0"/>
-        </a:xfrm>
-      </p:grpSpPr>
+      <p:grpSpPr/>
       <p:sp>
         <p:nvSpPr>
           <p:cNvPr id="2" name="TextBox 1"/>
@@ -10516,7 +10284,7 @@
           <a:noFill/>
         </p:spPr>
         <p:txBody>
-          <a:bodyPr wrap="square" lIns="0" tIns="0" rIns="0" bIns="0" anchor="t">
+          <a:bodyPr wrap="square" anchor="t" lIns="0" rIns="0" tIns="0" bIns="0">
             <a:spAutoFit/>
           </a:bodyPr>
           <a:lstStyle/>
@@ -10558,7 +10326,7 @@
           <a:noFill/>
         </p:spPr>
         <p:txBody>
-          <a:bodyPr wrap="square" lIns="0" tIns="0" rIns="0" bIns="0" anchor="t">
+          <a:bodyPr wrap="square" anchor="t" lIns="0" rIns="0" tIns="0" bIns="0">
             <a:spAutoFit/>
           </a:bodyPr>
           <a:lstStyle/>
@@ -10622,7 +10390,7 @@
           </a:fontRef>
         </p:style>
         <p:txBody>
-          <a:bodyPr wrap="square" lIns="310896" tIns="182880" rIns="310896" bIns="182880" rtlCol="0" anchor="ctr"/>
+          <a:bodyPr rtlCol="0" anchor="ctr" wrap="square" lIns="310896" rIns="310896" tIns="182880" bIns="182880"/>
           <a:lstStyle/>
           <a:p>
             <a:pPr algn="l">
@@ -10662,7 +10430,7 @@
           <a:noFill/>
         </p:spPr>
         <p:txBody>
-          <a:bodyPr wrap="square" lIns="0" tIns="0" rIns="0" bIns="0" anchor="t">
+          <a:bodyPr wrap="square" anchor="t" lIns="0" rIns="0" tIns="0" bIns="0">
             <a:spAutoFit/>
           </a:bodyPr>
           <a:lstStyle/>
@@ -10724,11 +10492,10 @@
           </a:fontRef>
         </p:style>
         <p:txBody>
-          <a:bodyPr wrap="square" rtlCol="0" anchor="ctr"/>
+          <a:bodyPr rtlCol="0" anchor="ctr" wrap="square"/>
           <a:lstStyle/>
           <a:p>
             <a:pPr algn="ctr"/>
-            <a:endParaRPr/>
           </a:p>
         </p:txBody>
       </p:sp>
@@ -10749,7 +10516,7 @@
           <a:noFill/>
         </p:spPr>
         <p:txBody>
-          <a:bodyPr wrap="square" lIns="0" tIns="0" rIns="0" bIns="0" anchor="t">
+          <a:bodyPr wrap="square" anchor="t" lIns="0" rIns="0" tIns="0" bIns="0">
             <a:spAutoFit/>
           </a:bodyPr>
           <a:lstStyle/>
@@ -10811,11 +10578,10 @@
           </a:fontRef>
         </p:style>
         <p:txBody>
-          <a:bodyPr wrap="square" rtlCol="0" anchor="ctr"/>
+          <a:bodyPr rtlCol="0" anchor="ctr" wrap="square"/>
           <a:lstStyle/>
           <a:p>
             <a:pPr algn="ctr"/>
-            <a:endParaRPr/>
           </a:p>
         </p:txBody>
       </p:sp>
@@ -10836,7 +10602,7 @@
           <a:noFill/>
         </p:spPr>
         <p:txBody>
-          <a:bodyPr wrap="square" lIns="0" tIns="0" rIns="0" bIns="0" anchor="t">
+          <a:bodyPr wrap="square" anchor="t" lIns="0" rIns="0" tIns="0" bIns="0">
             <a:spAutoFit/>
           </a:bodyPr>
           <a:lstStyle/>
@@ -10898,11 +10664,10 @@
           </a:fontRef>
         </p:style>
         <p:txBody>
-          <a:bodyPr wrap="square" rtlCol="0" anchor="ctr"/>
+          <a:bodyPr rtlCol="0" anchor="ctr" wrap="square"/>
           <a:lstStyle/>
           <a:p>
             <a:pPr algn="ctr"/>
-            <a:endParaRPr/>
           </a:p>
         </p:txBody>
       </p:sp>
@@ -10923,7 +10688,7 @@
           <a:noFill/>
         </p:spPr>
         <p:txBody>
-          <a:bodyPr wrap="square" lIns="0" tIns="0" rIns="0" bIns="0" anchor="t">
+          <a:bodyPr wrap="square" anchor="t" lIns="0" rIns="0" tIns="0" bIns="0">
             <a:spAutoFit/>
           </a:bodyPr>
           <a:lstStyle/>
@@ -10965,7 +10730,7 @@
           <a:noFill/>
         </p:spPr>
         <p:txBody>
-          <a:bodyPr wrap="square" lIns="0" tIns="0" rIns="0" bIns="0" anchor="t">
+          <a:bodyPr wrap="square" anchor="t" lIns="0" rIns="0" tIns="0" bIns="0">
             <a:spAutoFit/>
           </a:bodyPr>
           <a:lstStyle/>
@@ -11007,7 +10772,7 @@
           <a:noFill/>
         </p:spPr>
         <p:txBody>
-          <a:bodyPr wrap="square" lIns="0" tIns="0" rIns="0" bIns="0" anchor="t">
+          <a:bodyPr wrap="square" anchor="t" lIns="0" rIns="0" tIns="0" bIns="0">
             <a:spAutoFit/>
           </a:bodyPr>
           <a:lstStyle/>
@@ -11041,7 +10806,7 @@
 </file>
 
 <file path=ppt/slides/slide20.xml><?xml version="1.0" encoding="utf-8"?>
-<p:sld xmlns:a="http://schemas.openxmlformats.org/drawingml/2006/main" xmlns:r="http://schemas.openxmlformats.org/officeDocument/2006/relationships" xmlns:p="http://schemas.openxmlformats.org/presentationml/2006/main">
+<p:sld xmlns:a="http://schemas.openxmlformats.org/drawingml/2006/main" xmlns:p="http://schemas.openxmlformats.org/presentationml/2006/main" xmlns:r="http://schemas.openxmlformats.org/officeDocument/2006/relationships">
   <p:cSld>
     <p:spTree>
       <p:nvGrpSpPr>
@@ -11049,14 +10814,7 @@
         <p:cNvGrpSpPr/>
         <p:nvPr/>
       </p:nvGrpSpPr>
-      <p:grpSpPr>
-        <a:xfrm>
-          <a:off x="0" y="0"/>
-          <a:ext cx="0" cy="0"/>
-          <a:chOff x="0" y="0"/>
-          <a:chExt cx="0" cy="0"/>
-        </a:xfrm>
-      </p:grpSpPr>
+      <p:grpSpPr/>
       <p:sp>
         <p:nvSpPr>
           <p:cNvPr id="2" name="Rectangle 1"/>
@@ -11094,11 +10852,10 @@
           </a:fontRef>
         </p:style>
         <p:txBody>
-          <a:bodyPr wrap="square" rtlCol="0" anchor="ctr"/>
+          <a:bodyPr rtlCol="0" anchor="ctr" wrap="square"/>
           <a:lstStyle/>
           <a:p>
             <a:pPr algn="ctr"/>
-            <a:endParaRPr/>
           </a:p>
         </p:txBody>
       </p:sp>
@@ -11119,7 +10876,7 @@
           <a:noFill/>
         </p:spPr>
         <p:txBody>
-          <a:bodyPr wrap="square" lIns="0" tIns="0" rIns="0" bIns="0" anchor="t">
+          <a:bodyPr wrap="square" anchor="t" lIns="0" rIns="0" tIns="0" bIns="0">
             <a:spAutoFit/>
           </a:bodyPr>
           <a:lstStyle/>
@@ -11152,7 +10909,7 @@
         </p:nvSpPr>
         <p:spPr>
           <a:xfrm>
-            <a:off x="777240" y="1865376"/>
+            <a:off x="777240" y="2194560"/>
             <a:ext cx="109728" cy="109728"/>
           </a:xfrm>
           <a:prstGeom prst="ellipse">
@@ -11181,11 +10938,10 @@
           </a:fontRef>
         </p:style>
         <p:txBody>
-          <a:bodyPr wrap="square" rtlCol="0" anchor="ctr"/>
+          <a:bodyPr rtlCol="0" anchor="ctr" wrap="square"/>
           <a:lstStyle/>
           <a:p>
             <a:pPr algn="ctr"/>
-            <a:endParaRPr/>
           </a:p>
         </p:txBody>
       </p:sp>
@@ -11197,30 +10953,30 @@
         </p:nvSpPr>
         <p:spPr>
           <a:xfrm>
-            <a:off x="1161287" y="1709928"/>
-            <a:ext cx="10253167" cy="312265"/>
-          </a:xfrm>
-          <a:prstGeom prst="rect">
-            <a:avLst/>
-          </a:prstGeom>
-          <a:noFill/>
-        </p:spPr>
-        <p:txBody>
-          <a:bodyPr wrap="square" lIns="0" tIns="0" rIns="0" bIns="0" anchor="t">
-            <a:spAutoFit/>
-          </a:bodyPr>
-          <a:lstStyle/>
-          <a:p>
-            <a:pPr algn="l">
-              <a:lnSpc>
-                <a:spcPct val="125000"/>
-              </a:lnSpc>
-              <a:spcAft>
-                <a:spcPts val="0"/>
-              </a:spcAft>
-            </a:pPr>
-            <a:r>
-              <a:rPr b="0" i="0" dirty="0">
+            <a:off x="1161288" y="2011680"/>
+            <a:ext cx="10253167" cy="640080"/>
+          </a:xfrm>
+          <a:prstGeom prst="rect">
+            <a:avLst/>
+          </a:prstGeom>
+          <a:noFill/>
+        </p:spPr>
+        <p:txBody>
+          <a:bodyPr wrap="square" anchor="t" lIns="0" rIns="0" tIns="0" bIns="0">
+            <a:spAutoFit/>
+          </a:bodyPr>
+          <a:lstStyle/>
+          <a:p>
+            <a:pPr algn="l">
+              <a:lnSpc>
+                <a:spcPct val="125000"/>
+              </a:lnSpc>
+              <a:spcAft>
+                <a:spcPts val="0"/>
+              </a:spcAft>
+            </a:pPr>
+            <a:r>
+              <a:rPr sz="1700" b="0" i="0">
                 <a:solidFill>
                   <a:srgbClr val="1A1A1A"/>
                 </a:solidFill>
@@ -11239,7 +10995,7 @@
         </p:nvSpPr>
         <p:spPr>
           <a:xfrm>
-            <a:off x="777240" y="2615184"/>
+            <a:off x="777240" y="3063240"/>
             <a:ext cx="109728" cy="109728"/>
           </a:xfrm>
           <a:prstGeom prst="ellipse">
@@ -11268,11 +11024,10 @@
           </a:fontRef>
         </p:style>
         <p:txBody>
-          <a:bodyPr wrap="square" rtlCol="0" anchor="ctr"/>
+          <a:bodyPr rtlCol="0" anchor="ctr" wrap="square"/>
           <a:lstStyle/>
           <a:p>
             <a:pPr algn="ctr"/>
-            <a:endParaRPr/>
           </a:p>
         </p:txBody>
       </p:sp>
@@ -11284,30 +11039,30 @@
         </p:nvSpPr>
         <p:spPr>
           <a:xfrm>
-            <a:off x="1161286" y="2331720"/>
-            <a:ext cx="10253167" cy="658514"/>
-          </a:xfrm>
-          <a:prstGeom prst="rect">
-            <a:avLst/>
-          </a:prstGeom>
-          <a:noFill/>
-        </p:spPr>
-        <p:txBody>
-          <a:bodyPr wrap="square" lIns="0" tIns="0" rIns="0" bIns="0" anchor="t">
-            <a:spAutoFit/>
-          </a:bodyPr>
-          <a:lstStyle/>
-          <a:p>
-            <a:pPr algn="l">
-              <a:lnSpc>
-                <a:spcPct val="125000"/>
-              </a:lnSpc>
-              <a:spcAft>
-                <a:spcPts val="0"/>
-              </a:spcAft>
-            </a:pPr>
-            <a:r>
-              <a:rPr b="0" i="0" dirty="0">
+            <a:off x="1161288" y="2880360"/>
+            <a:ext cx="10253167" cy="640080"/>
+          </a:xfrm>
+          <a:prstGeom prst="rect">
+            <a:avLst/>
+          </a:prstGeom>
+          <a:noFill/>
+        </p:spPr>
+        <p:txBody>
+          <a:bodyPr wrap="square" anchor="t" lIns="0" rIns="0" tIns="0" bIns="0">
+            <a:spAutoFit/>
+          </a:bodyPr>
+          <a:lstStyle/>
+          <a:p>
+            <a:pPr algn="l">
+              <a:lnSpc>
+                <a:spcPct val="125000"/>
+              </a:lnSpc>
+              <a:spcAft>
+                <a:spcPts val="0"/>
+              </a:spcAft>
+            </a:pPr>
+            <a:r>
+              <a:rPr sz="1700" b="0" i="0">
                 <a:solidFill>
                   <a:srgbClr val="1A1A1A"/>
                 </a:solidFill>
@@ -11326,7 +11081,7 @@
         </p:nvSpPr>
         <p:spPr>
           <a:xfrm>
-            <a:off x="777240" y="3410712"/>
+            <a:off x="777240" y="3931920"/>
             <a:ext cx="109728" cy="109728"/>
           </a:xfrm>
           <a:prstGeom prst="ellipse">
@@ -11355,11 +11110,10 @@
           </a:fontRef>
         </p:style>
         <p:txBody>
-          <a:bodyPr wrap="square" rtlCol="0" anchor="ctr"/>
+          <a:bodyPr rtlCol="0" anchor="ctr" wrap="square"/>
           <a:lstStyle/>
           <a:p>
             <a:pPr algn="ctr"/>
-            <a:endParaRPr/>
           </a:p>
         </p:txBody>
       </p:sp>
@@ -11371,30 +11125,30 @@
         </p:nvSpPr>
         <p:spPr>
           <a:xfrm>
-            <a:off x="1161286" y="3291840"/>
-            <a:ext cx="10253167" cy="312265"/>
-          </a:xfrm>
-          <a:prstGeom prst="rect">
-            <a:avLst/>
-          </a:prstGeom>
-          <a:noFill/>
-        </p:spPr>
-        <p:txBody>
-          <a:bodyPr wrap="square" lIns="0" tIns="0" rIns="0" bIns="0" anchor="t">
-            <a:spAutoFit/>
-          </a:bodyPr>
-          <a:lstStyle/>
-          <a:p>
-            <a:pPr algn="l">
-              <a:lnSpc>
-                <a:spcPct val="125000"/>
-              </a:lnSpc>
-              <a:spcAft>
-                <a:spcPts val="0"/>
-              </a:spcAft>
-            </a:pPr>
-            <a:r>
-              <a:rPr b="0" i="0" dirty="0">
+            <a:off x="1161288" y="3749040"/>
+            <a:ext cx="10253167" cy="640080"/>
+          </a:xfrm>
+          <a:prstGeom prst="rect">
+            <a:avLst/>
+          </a:prstGeom>
+          <a:noFill/>
+        </p:spPr>
+        <p:txBody>
+          <a:bodyPr wrap="square" anchor="t" lIns="0" rIns="0" tIns="0" bIns="0">
+            <a:spAutoFit/>
+          </a:bodyPr>
+          <a:lstStyle/>
+          <a:p>
+            <a:pPr algn="l">
+              <a:lnSpc>
+                <a:spcPct val="125000"/>
+              </a:lnSpc>
+              <a:spcAft>
+                <a:spcPts val="0"/>
+              </a:spcAft>
+            </a:pPr>
+            <a:r>
+              <a:rPr sz="1700" b="0" i="0">
                 <a:solidFill>
                   <a:srgbClr val="1A1A1A"/>
                 </a:solidFill>
@@ -11413,7 +11167,7 @@
         </p:nvSpPr>
         <p:spPr>
           <a:xfrm>
-            <a:off x="784154" y="4064508"/>
+            <a:off x="777240" y="4800600"/>
             <a:ext cx="109728" cy="109728"/>
           </a:xfrm>
           <a:prstGeom prst="ellipse">
@@ -11442,11 +11196,10 @@
           </a:fontRef>
         </p:style>
         <p:txBody>
-          <a:bodyPr wrap="square" rtlCol="0" anchor="ctr"/>
+          <a:bodyPr rtlCol="0" anchor="ctr" wrap="square"/>
           <a:lstStyle/>
           <a:p>
             <a:pPr algn="ctr"/>
-            <a:endParaRPr/>
           </a:p>
         </p:txBody>
       </p:sp>
@@ -11458,30 +11211,30 @@
         </p:nvSpPr>
         <p:spPr>
           <a:xfrm>
-            <a:off x="1161285" y="3941064"/>
-            <a:ext cx="10253167" cy="658514"/>
-          </a:xfrm>
-          <a:prstGeom prst="rect">
-            <a:avLst/>
-          </a:prstGeom>
-          <a:noFill/>
-        </p:spPr>
-        <p:txBody>
-          <a:bodyPr wrap="square" lIns="0" tIns="0" rIns="0" bIns="0" anchor="t">
-            <a:spAutoFit/>
-          </a:bodyPr>
-          <a:lstStyle/>
-          <a:p>
-            <a:pPr algn="l">
-              <a:lnSpc>
-                <a:spcPct val="125000"/>
-              </a:lnSpc>
-              <a:spcAft>
-                <a:spcPts val="0"/>
-              </a:spcAft>
-            </a:pPr>
-            <a:r>
-              <a:rPr b="0" i="0" dirty="0">
+            <a:off x="1161288" y="4617720"/>
+            <a:ext cx="10253167" cy="640080"/>
+          </a:xfrm>
+          <a:prstGeom prst="rect">
+            <a:avLst/>
+          </a:prstGeom>
+          <a:noFill/>
+        </p:spPr>
+        <p:txBody>
+          <a:bodyPr wrap="square" anchor="t" lIns="0" rIns="0" tIns="0" bIns="0">
+            <a:spAutoFit/>
+          </a:bodyPr>
+          <a:lstStyle/>
+          <a:p>
+            <a:pPr algn="l">
+              <a:lnSpc>
+                <a:spcPct val="125000"/>
+              </a:lnSpc>
+              <a:spcAft>
+                <a:spcPts val="0"/>
+              </a:spcAft>
+            </a:pPr>
+            <a:r>
+              <a:rPr sz="1700" b="0" i="0">
                 <a:solidFill>
                   <a:srgbClr val="1A1A1A"/>
                 </a:solidFill>
@@ -11500,7 +11253,7 @@
         </p:nvSpPr>
         <p:spPr>
           <a:xfrm>
-            <a:off x="777237" y="5107070"/>
+            <a:off x="777240" y="4937760"/>
             <a:ext cx="10637215" cy="1005840"/>
           </a:xfrm>
           <a:prstGeom prst="roundRect">
@@ -11531,7 +11284,7 @@
           </a:fontRef>
         </p:style>
         <p:txBody>
-          <a:bodyPr wrap="square" lIns="310896" rIns="310896" rtlCol="0" anchor="ctr"/>
+          <a:bodyPr rtlCol="0" anchor="ctr" wrap="square" lIns="310896" rIns="310896"/>
           <a:lstStyle/>
           <a:p>
             <a:pPr algn="l">
@@ -11543,85 +11296,33 @@
               </a:spcAft>
             </a:pPr>
             <a:r>
-              <a:rPr b="1" i="0" dirty="0">
+              <a:rPr sz="1400" b="1" i="0">
                 <a:solidFill>
                   <a:srgbClr val="BE0F05"/>
                 </a:solidFill>
                 <a:latin typeface="Arial"/>
               </a:rPr>
-              <a:t>Seven A4 handouts — the full 45-minute version of every block you just saw — in </a:t>
-            </a:r>
-            <a:r>
-              <a:rPr lang="de-DE" b="1" i="0" dirty="0">
-                <a:solidFill>
-                  <a:srgbClr val="BE0F05"/>
-                </a:solidFill>
-                <a:latin typeface="Arial"/>
-              </a:rPr>
-              <a:t>0</a:t>
-            </a:r>
-            <a:r>
-              <a:rPr b="1" i="0" dirty="0">
-                <a:solidFill>
-                  <a:srgbClr val="BE0F05"/>
-                </a:solidFill>
-                <a:latin typeface="Arial"/>
-              </a:rPr>
-              <a:t>_documentation/course/</a:t>
-            </a:r>
-            <a:r>
-              <a:rPr lang="de-DE" b="1" i="0" dirty="0">
-                <a:solidFill>
-                  <a:srgbClr val="BE0F05"/>
-                </a:solidFill>
-                <a:latin typeface="Arial"/>
-              </a:rPr>
-              <a:t> </a:t>
-            </a:r>
-            <a:r>
-              <a:rPr lang="de-DE" b="1" dirty="0">
-                <a:solidFill>
-                  <a:srgbClr val="BE0F05"/>
-                </a:solidFill>
-                <a:latin typeface="Arial"/>
-              </a:rPr>
-              <a:t>on </a:t>
-            </a:r>
-            <a:r>
-              <a:rPr lang="de-DE" b="1" dirty="0">
-                <a:solidFill>
-                  <a:srgbClr val="BE0F05"/>
-                </a:solidFill>
-                <a:latin typeface="Arial"/>
-                <a:hlinkClick r:id="rId2"/>
-              </a:rPr>
-              <a:t>https://</a:t>
-            </a:r>
-            <a:r>
-              <a:rPr b="1" dirty="0">
-                <a:solidFill>
-                  <a:srgbClr val="BE0F05"/>
-                </a:solidFill>
-                <a:latin typeface="Arial"/>
-                <a:hlinkClick r:id="rId2"/>
+              <a:t>Seven A4 handouts — the full 45-minute version of every block you just saw — in 9_documentation/course/</a:t>
+            </a:r>
+          </a:p>
+          <a:p>
+            <a:pPr algn="l">
+              <a:lnSpc>
+                <a:spcPct val="125000"/>
+              </a:lnSpc>
+              <a:spcAft>
+                <a:spcPts val="0"/>
+              </a:spcAft>
+            </a:pPr>
+            <a:r>
+              <a:rPr sz="1200" b="0" i="0">
+                <a:solidFill>
+                  <a:srgbClr val="64748B"/>
+                </a:solidFill>
+                <a:latin typeface="Arial"/>
               </a:rPr>
               <a:t>github.com/mtcberlin/epo-tip4patlibs</a:t>
             </a:r>
-            <a:r>
-              <a:rPr lang="de-DE" b="1" dirty="0">
-                <a:solidFill>
-                  <a:srgbClr val="BE0F05"/>
-                </a:solidFill>
-                <a:latin typeface="Arial"/>
-              </a:rPr>
-              <a:t> </a:t>
-            </a:r>
-            <a:endParaRPr b="1" dirty="0">
-              <a:solidFill>
-                <a:srgbClr val="BE0F05"/>
-              </a:solidFill>
-              <a:latin typeface="Arial"/>
-            </a:endParaRPr>
           </a:p>
         </p:txBody>
       </p:sp>
@@ -11642,7 +11343,7 @@
           <a:noFill/>
         </p:spPr>
         <p:txBody>
-          <a:bodyPr wrap="square" lIns="0" tIns="0" rIns="0" bIns="0" anchor="t">
+          <a:bodyPr wrap="square" anchor="t" lIns="0" rIns="0" tIns="0" bIns="0">
             <a:spAutoFit/>
           </a:bodyPr>
           <a:lstStyle/>
@@ -11684,7 +11385,7 @@
           <a:noFill/>
         </p:spPr>
         <p:txBody>
-          <a:bodyPr wrap="square" lIns="0" tIns="0" rIns="0" bIns="0" anchor="t">
+          <a:bodyPr wrap="square" anchor="t" lIns="0" rIns="0" tIns="0" bIns="0">
             <a:spAutoFit/>
           </a:bodyPr>
           <a:lstStyle/>
@@ -11718,7 +11419,7 @@
 </file>
 
 <file path=ppt/slides/slide3.xml><?xml version="1.0" encoding="utf-8"?>
-<p:sld xmlns:a="http://schemas.openxmlformats.org/drawingml/2006/main" xmlns:r="http://schemas.openxmlformats.org/officeDocument/2006/relationships" xmlns:p="http://schemas.openxmlformats.org/presentationml/2006/main">
+<p:sld xmlns:a="http://schemas.openxmlformats.org/drawingml/2006/main" xmlns:p="http://schemas.openxmlformats.org/presentationml/2006/main" xmlns:r="http://schemas.openxmlformats.org/officeDocument/2006/relationships">
   <p:cSld>
     <p:spTree>
       <p:nvGrpSpPr>
@@ -11726,14 +11427,7 @@
         <p:cNvGrpSpPr/>
         <p:nvPr/>
       </p:nvGrpSpPr>
-      <p:grpSpPr>
-        <a:xfrm>
-          <a:off x="0" y="0"/>
-          <a:ext cx="0" cy="0"/>
-          <a:chOff x="0" y="0"/>
-          <a:chExt cx="0" cy="0"/>
-        </a:xfrm>
-      </p:grpSpPr>
+      <p:grpSpPr/>
       <p:sp>
         <p:nvSpPr>
           <p:cNvPr id="2" name="TextBox 1"/>
@@ -11751,7 +11445,7 @@
           <a:noFill/>
         </p:spPr>
         <p:txBody>
-          <a:bodyPr wrap="square" lIns="0" tIns="0" rIns="0" bIns="0" anchor="t">
+          <a:bodyPr wrap="square" anchor="t" lIns="0" rIns="0" tIns="0" bIns="0">
             <a:spAutoFit/>
           </a:bodyPr>
           <a:lstStyle/>
@@ -11793,7 +11487,7 @@
           <a:noFill/>
         </p:spPr>
         <p:txBody>
-          <a:bodyPr wrap="square" lIns="0" tIns="0" rIns="0" bIns="0" anchor="t">
+          <a:bodyPr wrap="square" anchor="t" lIns="0" rIns="0" tIns="0" bIns="0">
             <a:spAutoFit/>
           </a:bodyPr>
           <a:lstStyle/>
@@ -11835,7 +11529,7 @@
           <a:noFill/>
         </p:spPr>
         <p:txBody>
-          <a:bodyPr wrap="square" lIns="0" tIns="0" rIns="0" bIns="0" anchor="t">
+          <a:bodyPr wrap="square" anchor="t" lIns="0" rIns="0" tIns="0" bIns="0">
             <a:spAutoFit/>
           </a:bodyPr>
           <a:lstStyle/>
@@ -11901,7 +11595,7 @@
           </a:fontRef>
         </p:style>
         <p:txBody>
-          <a:bodyPr wrap="square" lIns="365760" rIns="365760" rtlCol="0" anchor="ctr"/>
+          <a:bodyPr rtlCol="0" anchor="ctr" wrap="square" lIns="365760" rIns="365760"/>
           <a:lstStyle/>
           <a:p>
             <a:pPr algn="ctr">
@@ -12020,11 +11714,10 @@
           </a:fontRef>
         </p:style>
         <p:txBody>
-          <a:bodyPr wrap="square" rtlCol="0" anchor="ctr"/>
+          <a:bodyPr rtlCol="0" anchor="ctr" wrap="square"/>
           <a:lstStyle/>
           <a:p>
             <a:pPr algn="ctr"/>
-            <a:endParaRPr/>
           </a:p>
         </p:txBody>
       </p:sp>
@@ -12045,7 +11738,7 @@
           <a:noFill/>
         </p:spPr>
         <p:txBody>
-          <a:bodyPr wrap="square" lIns="0" tIns="0" rIns="0" bIns="0" anchor="t">
+          <a:bodyPr wrap="square" anchor="t" lIns="0" rIns="0" tIns="0" bIns="0">
             <a:spAutoFit/>
           </a:bodyPr>
           <a:lstStyle/>
@@ -12087,7 +11780,7 @@
           <a:noFill/>
         </p:spPr>
         <p:txBody>
-          <a:bodyPr wrap="square" lIns="0" tIns="0" rIns="0" bIns="0" anchor="t">
+          <a:bodyPr wrap="square" anchor="t" lIns="0" rIns="0" tIns="0" bIns="0">
             <a:spAutoFit/>
           </a:bodyPr>
           <a:lstStyle/>
@@ -12101,7 +11794,7 @@
               </a:spcAft>
             </a:pPr>
             <a:r>
-              <a:rPr sz="1500" b="1" i="0" dirty="0">
+              <a:rPr sz="1500" b="1" i="0">
                 <a:solidFill>
                   <a:srgbClr val="1A1A1A"/>
                 </a:solidFill>
@@ -12120,7 +11813,7 @@
               </a:spcAft>
             </a:pPr>
             <a:r>
-              <a:rPr sz="1100" b="0" i="0" dirty="0">
+              <a:rPr sz="1100" b="0" i="0">
                 <a:solidFill>
                   <a:srgbClr val="64748B"/>
                 </a:solidFill>
@@ -12139,7 +11832,7 @@
               </a:spcAft>
             </a:pPr>
             <a:r>
-              <a:rPr sz="1000" b="1" i="0" dirty="0">
+              <a:rPr sz="1000" b="1" i="0">
                 <a:solidFill>
                   <a:srgbClr val="BE0F05"/>
                 </a:solidFill>
@@ -12189,11 +11882,10 @@
           </a:fontRef>
         </p:style>
         <p:txBody>
-          <a:bodyPr wrap="square" rtlCol="0" anchor="ctr"/>
+          <a:bodyPr rtlCol="0" anchor="ctr" wrap="square"/>
           <a:lstStyle/>
           <a:p>
             <a:pPr algn="ctr"/>
-            <a:endParaRPr/>
           </a:p>
         </p:txBody>
       </p:sp>
@@ -12214,7 +11906,7 @@
           <a:noFill/>
         </p:spPr>
         <p:txBody>
-          <a:bodyPr wrap="square" lIns="0" tIns="0" rIns="0" bIns="0" anchor="t">
+          <a:bodyPr wrap="square" anchor="t" lIns="0" rIns="0" tIns="0" bIns="0">
             <a:spAutoFit/>
           </a:bodyPr>
           <a:lstStyle/>
@@ -12256,7 +11948,7 @@
           <a:noFill/>
         </p:spPr>
         <p:txBody>
-          <a:bodyPr wrap="square" lIns="0" tIns="0" rIns="0" bIns="0" anchor="t">
+          <a:bodyPr wrap="square" anchor="t" lIns="0" rIns="0" tIns="0" bIns="0">
             <a:spAutoFit/>
           </a:bodyPr>
           <a:lstStyle/>
@@ -12358,11 +12050,10 @@
           </a:fontRef>
         </p:style>
         <p:txBody>
-          <a:bodyPr wrap="square" rtlCol="0" anchor="ctr"/>
+          <a:bodyPr rtlCol="0" anchor="ctr" wrap="square"/>
           <a:lstStyle/>
           <a:p>
             <a:pPr algn="ctr"/>
-            <a:endParaRPr/>
           </a:p>
         </p:txBody>
       </p:sp>
@@ -12383,7 +12074,7 @@
           <a:noFill/>
         </p:spPr>
         <p:txBody>
-          <a:bodyPr wrap="square" lIns="0" tIns="0" rIns="0" bIns="0" anchor="t">
+          <a:bodyPr wrap="square" anchor="t" lIns="0" rIns="0" tIns="0" bIns="0">
             <a:spAutoFit/>
           </a:bodyPr>
           <a:lstStyle/>
@@ -12425,7 +12116,7 @@
           <a:noFill/>
         </p:spPr>
         <p:txBody>
-          <a:bodyPr wrap="square" lIns="0" tIns="0" rIns="0" bIns="0" anchor="t">
+          <a:bodyPr wrap="square" anchor="t" lIns="0" rIns="0" tIns="0" bIns="0">
             <a:spAutoFit/>
           </a:bodyPr>
           <a:lstStyle/>
@@ -12505,7 +12196,7 @@
           <a:noFill/>
         </p:spPr>
         <p:txBody>
-          <a:bodyPr wrap="square" lIns="0" tIns="0" rIns="0" bIns="0" anchor="t">
+          <a:bodyPr wrap="square" anchor="t" lIns="0" rIns="0" tIns="0" bIns="0">
             <a:spAutoFit/>
           </a:bodyPr>
           <a:lstStyle/>
@@ -12547,7 +12238,7 @@
           <a:noFill/>
         </p:spPr>
         <p:txBody>
-          <a:bodyPr wrap="square" lIns="0" tIns="0" rIns="0" bIns="0" anchor="t">
+          <a:bodyPr wrap="square" anchor="t" lIns="0" rIns="0" tIns="0" bIns="0">
             <a:spAutoFit/>
           </a:bodyPr>
           <a:lstStyle/>
@@ -12581,7 +12272,7 @@
 </file>
 
 <file path=ppt/slides/slide4.xml><?xml version="1.0" encoding="utf-8"?>
-<p:sld xmlns:a="http://schemas.openxmlformats.org/drawingml/2006/main" xmlns:r="http://schemas.openxmlformats.org/officeDocument/2006/relationships" xmlns:p="http://schemas.openxmlformats.org/presentationml/2006/main">
+<p:sld xmlns:a="http://schemas.openxmlformats.org/drawingml/2006/main" xmlns:p="http://schemas.openxmlformats.org/presentationml/2006/main" xmlns:r="http://schemas.openxmlformats.org/officeDocument/2006/relationships">
   <p:cSld>
     <p:spTree>
       <p:nvGrpSpPr>
@@ -12589,14 +12280,7 @@
         <p:cNvGrpSpPr/>
         <p:nvPr/>
       </p:nvGrpSpPr>
-      <p:grpSpPr>
-        <a:xfrm>
-          <a:off x="0" y="0"/>
-          <a:ext cx="0" cy="0"/>
-          <a:chOff x="0" y="0"/>
-          <a:chExt cx="0" cy="0"/>
-        </a:xfrm>
-      </p:grpSpPr>
+      <p:grpSpPr/>
       <p:sp>
         <p:nvSpPr>
           <p:cNvPr id="2" name="TextBox 1"/>
@@ -12614,7 +12298,7 @@
           <a:noFill/>
         </p:spPr>
         <p:txBody>
-          <a:bodyPr wrap="square" lIns="0" tIns="0" rIns="0" bIns="0" anchor="t">
+          <a:bodyPr wrap="square" anchor="t" lIns="0" rIns="0" tIns="0" bIns="0">
             <a:spAutoFit/>
           </a:bodyPr>
           <a:lstStyle/>
@@ -12656,7 +12340,7 @@
           <a:noFill/>
         </p:spPr>
         <p:txBody>
-          <a:bodyPr wrap="square" lIns="0" tIns="0" rIns="0" bIns="0" anchor="t">
+          <a:bodyPr wrap="square" anchor="t" lIns="0" rIns="0" tIns="0" bIns="0">
             <a:spAutoFit/>
           </a:bodyPr>
           <a:lstStyle/>
@@ -12698,7 +12382,7 @@
           <a:noFill/>
         </p:spPr>
         <p:txBody>
-          <a:bodyPr wrap="square" lIns="0" tIns="0" rIns="0" bIns="0" anchor="t">
+          <a:bodyPr wrap="square" anchor="t" lIns="0" rIns="0" tIns="0" bIns="0">
             <a:spAutoFit/>
           </a:bodyPr>
           <a:lstStyle/>
@@ -12762,7 +12446,7 @@
           </a:fontRef>
         </p:style>
         <p:txBody>
-          <a:bodyPr wrap="square" lIns="274320" rIns="274320" rtlCol="0" anchor="ctr"/>
+          <a:bodyPr rtlCol="0" anchor="ctr" wrap="square" lIns="274320" rIns="274320"/>
           <a:lstStyle/>
           <a:p>
             <a:pPr algn="l">
@@ -12774,7 +12458,7 @@
               </a:spcAft>
             </a:pPr>
             <a:r>
-              <a:rPr b="0" i="0" dirty="0">
+              <a:rPr sz="1400" b="0" i="0">
                 <a:solidFill>
                   <a:srgbClr val="1A1A1A"/>
                 </a:solidFill>
@@ -12824,7 +12508,7 @@
           </a:fontRef>
         </p:style>
         <p:txBody>
-          <a:bodyPr wrap="square" lIns="274320" rIns="274320" rtlCol="0" anchor="ctr"/>
+          <a:bodyPr rtlCol="0" anchor="ctr" wrap="square" lIns="274320" rIns="274320"/>
           <a:lstStyle/>
           <a:p>
             <a:pPr algn="l">
@@ -12836,7 +12520,7 @@
               </a:spcAft>
             </a:pPr>
             <a:r>
-              <a:rPr b="0" i="0">
+              <a:rPr sz="1400" b="0" i="0">
                 <a:solidFill>
                   <a:srgbClr val="1A1A1A"/>
                 </a:solidFill>
@@ -12886,7 +12570,7 @@
           </a:fontRef>
         </p:style>
         <p:txBody>
-          <a:bodyPr wrap="square" lIns="274320" rIns="274320" rtlCol="0" anchor="ctr"/>
+          <a:bodyPr rtlCol="0" anchor="ctr" wrap="square" lIns="274320" rIns="274320"/>
           <a:lstStyle/>
           <a:p>
             <a:pPr algn="l">
@@ -12898,7 +12582,7 @@
               </a:spcAft>
             </a:pPr>
             <a:r>
-              <a:rPr b="0" i="0">
+              <a:rPr sz="1400" b="0" i="0">
                 <a:solidFill>
                   <a:srgbClr val="1A1A1A"/>
                 </a:solidFill>
@@ -12926,7 +12610,7 @@
           <a:noFill/>
         </p:spPr>
         <p:txBody>
-          <a:bodyPr wrap="square" lIns="0" tIns="0" rIns="0" bIns="0" anchor="t">
+          <a:bodyPr wrap="square" anchor="t" lIns="0" rIns="0" tIns="0" bIns="0">
             <a:spAutoFit/>
           </a:bodyPr>
           <a:lstStyle/>
@@ -12992,19 +12676,19 @@
           </a:fontRef>
         </p:style>
         <p:txBody>
-          <a:bodyPr wrap="square" lIns="310896" rIns="310896" rtlCol="0" anchor="ctr"/>
-          <a:lstStyle/>
-          <a:p>
-            <a:pPr algn="l">
-              <a:lnSpc>
-                <a:spcPct val="125000"/>
-              </a:lnSpc>
-              <a:spcAft>
-                <a:spcPts val="0"/>
-              </a:spcAft>
-            </a:pPr>
-            <a:r>
-              <a:rPr sz="2000" b="1" i="0">
+          <a:bodyPr rtlCol="0" anchor="ctr" wrap="square" lIns="310896" rIns="310896"/>
+          <a:lstStyle/>
+          <a:p>
+            <a:pPr algn="l">
+              <a:lnSpc>
+                <a:spcPct val="125000"/>
+              </a:lnSpc>
+              <a:spcAft>
+                <a:spcPts val="0"/>
+              </a:spcAft>
+            </a:pPr>
+            <a:r>
+              <a:rPr sz="1600" b="1" i="0">
                 <a:solidFill>
                   <a:srgbClr val="BE0F05"/>
                 </a:solidFill>
@@ -13032,7 +12716,7 @@
           <a:noFill/>
         </p:spPr>
         <p:txBody>
-          <a:bodyPr wrap="square" lIns="0" tIns="0" rIns="0" bIns="0" anchor="t">
+          <a:bodyPr wrap="square" anchor="t" lIns="0" rIns="0" tIns="0" bIns="0">
             <a:spAutoFit/>
           </a:bodyPr>
           <a:lstStyle/>
@@ -13074,7 +12758,7 @@
           <a:noFill/>
         </p:spPr>
         <p:txBody>
-          <a:bodyPr wrap="square" lIns="0" tIns="0" rIns="0" bIns="0" anchor="t">
+          <a:bodyPr wrap="square" anchor="t" lIns="0" rIns="0" tIns="0" bIns="0">
             <a:spAutoFit/>
           </a:bodyPr>
           <a:lstStyle/>
@@ -13108,7 +12792,7 @@
 </file>
 
 <file path=ppt/slides/slide5.xml><?xml version="1.0" encoding="utf-8"?>
-<p:sld xmlns:a="http://schemas.openxmlformats.org/drawingml/2006/main" xmlns:r="http://schemas.openxmlformats.org/officeDocument/2006/relationships" xmlns:p="http://schemas.openxmlformats.org/presentationml/2006/main">
+<p:sld xmlns:a="http://schemas.openxmlformats.org/drawingml/2006/main" xmlns:p="http://schemas.openxmlformats.org/presentationml/2006/main" xmlns:r="http://schemas.openxmlformats.org/officeDocument/2006/relationships">
   <p:cSld>
     <p:spTree>
       <p:nvGrpSpPr>
@@ -13116,14 +12800,7 @@
         <p:cNvGrpSpPr/>
         <p:nvPr/>
       </p:nvGrpSpPr>
-      <p:grpSpPr>
-        <a:xfrm>
-          <a:off x="0" y="0"/>
-          <a:ext cx="0" cy="0"/>
-          <a:chOff x="0" y="0"/>
-          <a:chExt cx="0" cy="0"/>
-        </a:xfrm>
-      </p:grpSpPr>
+      <p:grpSpPr/>
       <p:sp>
         <p:nvSpPr>
           <p:cNvPr id="2" name="TextBox 1"/>
@@ -13141,7 +12818,7 @@
           <a:noFill/>
         </p:spPr>
         <p:txBody>
-          <a:bodyPr wrap="square" lIns="0" tIns="0" rIns="0" bIns="0" anchor="t">
+          <a:bodyPr wrap="square" anchor="t" lIns="0" rIns="0" tIns="0" bIns="0">
             <a:spAutoFit/>
           </a:bodyPr>
           <a:lstStyle/>
@@ -13161,7 +12838,7 @@
                 </a:solidFill>
                 <a:latin typeface="Arial"/>
               </a:rPr>
-              <a:t>ARNE — THE CLAIM, THEN THE LADDER · MODULE 3</a:t>
+              <a:t>ARNE — THE CLAIM, THEN THE LADDER · MODULE 2</a:t>
             </a:r>
           </a:p>
         </p:txBody>
@@ -13175,15 +12852,15 @@
         <p:spPr>
           <a:xfrm>
             <a:off x="777240" y="868680"/>
-            <a:ext cx="10637215" cy="468398"/>
-          </a:xfrm>
-          <a:prstGeom prst="rect">
-            <a:avLst/>
-          </a:prstGeom>
-          <a:noFill/>
-        </p:spPr>
-        <p:txBody>
-          <a:bodyPr wrap="square" lIns="0" tIns="0" rIns="0" bIns="0" anchor="t">
+            <a:ext cx="10637215" cy="914400"/>
+          </a:xfrm>
+          <a:prstGeom prst="rect">
+            <a:avLst/>
+          </a:prstGeom>
+          <a:noFill/>
+        </p:spPr>
+        <p:txBody>
+          <a:bodyPr wrap="square" anchor="t" lIns="0" rIns="0" tIns="0" bIns="0">
             <a:spAutoFit/>
           </a:bodyPr>
           <a:lstStyle/>
@@ -13197,31 +12874,13 @@
               </a:spcAft>
             </a:pPr>
             <a:r>
-              <a:rPr sz="3000" b="1" i="0" dirty="0">
+              <a:rPr sz="3000" b="1" i="0">
                 <a:solidFill>
                   <a:srgbClr val="1A1A1A"/>
                 </a:solidFill>
                 <a:latin typeface="Arial"/>
               </a:rPr>
-              <a:t>Module </a:t>
-            </a:r>
-            <a:r>
-              <a:rPr lang="de-DE" sz="3000" b="1" i="0" dirty="0">
-                <a:solidFill>
-                  <a:srgbClr val="1A1A1A"/>
-                </a:solidFill>
-                <a:latin typeface="Arial"/>
-              </a:rPr>
-              <a:t>2</a:t>
-            </a:r>
-            <a:r>
-              <a:rPr sz="3000" b="1" i="0" dirty="0">
-                <a:solidFill>
-                  <a:srgbClr val="1A1A1A"/>
-                </a:solidFill>
-                <a:latin typeface="Arial"/>
-              </a:rPr>
-              <a:t> — The Query Library</a:t>
+              <a:t>Module 2 — The Query Library</a:t>
             </a:r>
           </a:p>
         </p:txBody>
@@ -13265,19 +12924,19 @@
           </a:fontRef>
         </p:style>
         <p:txBody>
-          <a:bodyPr wrap="square" lIns="310896" tIns="182880" rIns="310896" bIns="182880" rtlCol="0" anchor="ctr"/>
-          <a:lstStyle/>
-          <a:p>
-            <a:pPr algn="l">
-              <a:lnSpc>
-                <a:spcPct val="125000"/>
-              </a:lnSpc>
-              <a:spcAft>
-                <a:spcPts val="0"/>
-              </a:spcAft>
-            </a:pPr>
-            <a:r>
-              <a:rPr sz="2400" b="0" i="1" dirty="0">
+          <a:bodyPr rtlCol="0" anchor="ctr" wrap="square" lIns="310896" rIns="310896" tIns="182880" bIns="182880"/>
+          <a:lstStyle/>
+          <a:p>
+            <a:pPr algn="l">
+              <a:lnSpc>
+                <a:spcPct val="125000"/>
+              </a:lnSpc>
+              <a:spcAft>
+                <a:spcPts val="0"/>
+              </a:spcAft>
+            </a:pPr>
+            <a:r>
+              <a:rPr sz="1800" b="0" i="1">
                 <a:solidFill>
                   <a:srgbClr val="BE0F05"/>
                 </a:solidFill>
@@ -13297,29 +12956,29 @@
         <p:spPr>
           <a:xfrm>
             <a:off x="777240" y="3429000"/>
-            <a:ext cx="10637215" cy="277512"/>
-          </a:xfrm>
-          <a:prstGeom prst="rect">
-            <a:avLst/>
-          </a:prstGeom>
-          <a:noFill/>
-        </p:spPr>
-        <p:txBody>
-          <a:bodyPr wrap="square" lIns="0" tIns="0" rIns="0" bIns="0" anchor="t">
-            <a:spAutoFit/>
-          </a:bodyPr>
-          <a:lstStyle/>
-          <a:p>
-            <a:pPr algn="l">
-              <a:lnSpc>
-                <a:spcPct val="125000"/>
-              </a:lnSpc>
-              <a:spcAft>
-                <a:spcPts val="0"/>
-              </a:spcAft>
-            </a:pPr>
-            <a:r>
-              <a:rPr sz="1600" b="1" i="0" dirty="0">
+            <a:ext cx="10637215" cy="274320"/>
+          </a:xfrm>
+          <a:prstGeom prst="rect">
+            <a:avLst/>
+          </a:prstGeom>
+          <a:noFill/>
+        </p:spPr>
+        <p:txBody>
+          <a:bodyPr wrap="square" anchor="t" lIns="0" rIns="0" tIns="0" bIns="0">
+            <a:spAutoFit/>
+          </a:bodyPr>
+          <a:lstStyle/>
+          <a:p>
+            <a:pPr algn="l">
+              <a:lnSpc>
+                <a:spcPct val="125000"/>
+              </a:lnSpc>
+              <a:spcAft>
+                <a:spcPts val="0"/>
+              </a:spcAft>
+            </a:pPr>
+            <a:r>
+              <a:rPr sz="1300" b="1" i="0">
                 <a:solidFill>
                   <a:srgbClr val="BE0F05"/>
                 </a:solidFill>
@@ -13367,11 +13026,10 @@
           </a:fontRef>
         </p:style>
         <p:txBody>
-          <a:bodyPr wrap="square" rtlCol="0" anchor="ctr"/>
+          <a:bodyPr rtlCol="0" anchor="ctr" wrap="square"/>
           <a:lstStyle/>
           <a:p>
             <a:pPr algn="ctr"/>
-            <a:endParaRPr/>
           </a:p>
         </p:txBody>
       </p:sp>
@@ -13384,29 +13042,29 @@
         <p:spPr>
           <a:xfrm>
             <a:off x="1106424" y="3840480"/>
-            <a:ext cx="10308031" cy="312265"/>
-          </a:xfrm>
-          <a:prstGeom prst="rect">
-            <a:avLst/>
-          </a:prstGeom>
-          <a:noFill/>
-        </p:spPr>
-        <p:txBody>
-          <a:bodyPr wrap="square" lIns="0" tIns="0" rIns="0" bIns="0" anchor="t">
-            <a:spAutoFit/>
-          </a:bodyPr>
-          <a:lstStyle/>
-          <a:p>
-            <a:pPr algn="l">
-              <a:lnSpc>
-                <a:spcPct val="125000"/>
-              </a:lnSpc>
-              <a:spcAft>
-                <a:spcPts val="0"/>
-              </a:spcAft>
-            </a:pPr>
-            <a:r>
-              <a:rPr b="0" i="0">
+            <a:ext cx="10308031" cy="502920"/>
+          </a:xfrm>
+          <a:prstGeom prst="rect">
+            <a:avLst/>
+          </a:prstGeom>
+          <a:noFill/>
+        </p:spPr>
+        <p:txBody>
+          <a:bodyPr wrap="square" anchor="t" lIns="0" rIns="0" tIns="0" bIns="0">
+            <a:spAutoFit/>
+          </a:bodyPr>
+          <a:lstStyle/>
+          <a:p>
+            <a:pPr algn="l">
+              <a:lnSpc>
+                <a:spcPct val="125000"/>
+              </a:lnSpc>
+              <a:spcAft>
+                <a:spcPts val="0"/>
+              </a:spcAft>
+            </a:pPr>
+            <a:r>
+              <a:rPr sz="1400" b="0" i="0">
                 <a:solidFill>
                   <a:srgbClr val="1A1A1A"/>
                 </a:solidFill>
@@ -13454,11 +13112,10 @@
           </a:fontRef>
         </p:style>
         <p:txBody>
-          <a:bodyPr wrap="square" rtlCol="0" anchor="ctr"/>
+          <a:bodyPr rtlCol="0" anchor="ctr" wrap="square"/>
           <a:lstStyle/>
           <a:p>
             <a:pPr algn="ctr"/>
-            <a:endParaRPr/>
           </a:p>
         </p:txBody>
       </p:sp>
@@ -13471,29 +13128,29 @@
         <p:spPr>
           <a:xfrm>
             <a:off x="1106424" y="4407408"/>
-            <a:ext cx="10308031" cy="312265"/>
-          </a:xfrm>
-          <a:prstGeom prst="rect">
-            <a:avLst/>
-          </a:prstGeom>
-          <a:noFill/>
-        </p:spPr>
-        <p:txBody>
-          <a:bodyPr wrap="square" lIns="0" tIns="0" rIns="0" bIns="0" anchor="t">
-            <a:spAutoFit/>
-          </a:bodyPr>
-          <a:lstStyle/>
-          <a:p>
-            <a:pPr algn="l">
-              <a:lnSpc>
-                <a:spcPct val="125000"/>
-              </a:lnSpc>
-              <a:spcAft>
-                <a:spcPts val="0"/>
-              </a:spcAft>
-            </a:pPr>
-            <a:r>
-              <a:rPr b="0" i="0">
+            <a:ext cx="10308031" cy="502920"/>
+          </a:xfrm>
+          <a:prstGeom prst="rect">
+            <a:avLst/>
+          </a:prstGeom>
+          <a:noFill/>
+        </p:spPr>
+        <p:txBody>
+          <a:bodyPr wrap="square" anchor="t" lIns="0" rIns="0" tIns="0" bIns="0">
+            <a:spAutoFit/>
+          </a:bodyPr>
+          <a:lstStyle/>
+          <a:p>
+            <a:pPr algn="l">
+              <a:lnSpc>
+                <a:spcPct val="125000"/>
+              </a:lnSpc>
+              <a:spcAft>
+                <a:spcPts val="0"/>
+              </a:spcAft>
+            </a:pPr>
+            <a:r>
+              <a:rPr sz="1400" b="0" i="0">
                 <a:solidFill>
                   <a:srgbClr val="1A1A1A"/>
                 </a:solidFill>
@@ -13541,11 +13198,10 @@
           </a:fontRef>
         </p:style>
         <p:txBody>
-          <a:bodyPr wrap="square" rtlCol="0" anchor="ctr"/>
+          <a:bodyPr rtlCol="0" anchor="ctr" wrap="square"/>
           <a:lstStyle/>
           <a:p>
             <a:pPr algn="ctr"/>
-            <a:endParaRPr/>
           </a:p>
         </p:txBody>
       </p:sp>
@@ -13558,29 +13214,29 @@
         <p:spPr>
           <a:xfrm>
             <a:off x="1106424" y="4974336"/>
-            <a:ext cx="10308031" cy="312265"/>
-          </a:xfrm>
-          <a:prstGeom prst="rect">
-            <a:avLst/>
-          </a:prstGeom>
-          <a:noFill/>
-        </p:spPr>
-        <p:txBody>
-          <a:bodyPr wrap="square" lIns="0" tIns="0" rIns="0" bIns="0" anchor="t">
-            <a:spAutoFit/>
-          </a:bodyPr>
-          <a:lstStyle/>
-          <a:p>
-            <a:pPr algn="l">
-              <a:lnSpc>
-                <a:spcPct val="125000"/>
-              </a:lnSpc>
-              <a:spcAft>
-                <a:spcPts val="0"/>
-              </a:spcAft>
-            </a:pPr>
-            <a:r>
-              <a:rPr b="0" i="0">
+            <a:ext cx="10308031" cy="502920"/>
+          </a:xfrm>
+          <a:prstGeom prst="rect">
+            <a:avLst/>
+          </a:prstGeom>
+          <a:noFill/>
+        </p:spPr>
+        <p:txBody>
+          <a:bodyPr wrap="square" anchor="t" lIns="0" rIns="0" tIns="0" bIns="0">
+            <a:spAutoFit/>
+          </a:bodyPr>
+          <a:lstStyle/>
+          <a:p>
+            <a:pPr algn="l">
+              <a:lnSpc>
+                <a:spcPct val="125000"/>
+              </a:lnSpc>
+              <a:spcAft>
+                <a:spcPts val="0"/>
+              </a:spcAft>
+            </a:pPr>
+            <a:r>
+              <a:rPr sz="1400" b="0" i="0">
                 <a:solidFill>
                   <a:srgbClr val="1A1A1A"/>
                 </a:solidFill>
@@ -13608,7 +13264,7 @@
           <a:noFill/>
         </p:spPr>
         <p:txBody>
-          <a:bodyPr wrap="square" lIns="0" tIns="0" rIns="0" bIns="0" anchor="t">
+          <a:bodyPr wrap="square" anchor="t" lIns="0" rIns="0" tIns="0" bIns="0">
             <a:spAutoFit/>
           </a:bodyPr>
           <a:lstStyle/>
@@ -13628,7 +13284,7 @@
                 </a:solidFill>
                 <a:latin typeface="Arial"/>
               </a:rPr>
-              <a:t>3_querylib/</a:t>
+              <a:t>2_querylib/</a:t>
             </a:r>
           </a:p>
         </p:txBody>
@@ -13650,7 +13306,7 @@
           <a:noFill/>
         </p:spPr>
         <p:txBody>
-          <a:bodyPr wrap="square" lIns="0" tIns="0" rIns="0" bIns="0" anchor="t">
+          <a:bodyPr wrap="square" anchor="t" lIns="0" rIns="0" tIns="0" bIns="0">
             <a:spAutoFit/>
           </a:bodyPr>
           <a:lstStyle/>
@@ -13684,7 +13340,7 @@
 </file>
 
 <file path=ppt/slides/slide6.xml><?xml version="1.0" encoding="utf-8"?>
-<p:sld xmlns:a="http://schemas.openxmlformats.org/drawingml/2006/main" xmlns:r="http://schemas.openxmlformats.org/officeDocument/2006/relationships" xmlns:p="http://schemas.openxmlformats.org/presentationml/2006/main">
+<p:sld xmlns:a="http://schemas.openxmlformats.org/drawingml/2006/main" xmlns:p="http://schemas.openxmlformats.org/presentationml/2006/main" xmlns:r="http://schemas.openxmlformats.org/officeDocument/2006/relationships">
   <p:cSld>
     <p:spTree>
       <p:nvGrpSpPr>
@@ -13692,14 +13348,7 @@
         <p:cNvGrpSpPr/>
         <p:nvPr/>
       </p:nvGrpSpPr>
-      <p:grpSpPr>
-        <a:xfrm>
-          <a:off x="0" y="0"/>
-          <a:ext cx="0" cy="0"/>
-          <a:chOff x="0" y="0"/>
-          <a:chExt cx="0" cy="0"/>
-        </a:xfrm>
-      </p:grpSpPr>
+      <p:grpSpPr/>
       <p:sp>
         <p:nvSpPr>
           <p:cNvPr id="2" name="TextBox 1"/>
@@ -13717,7 +13366,7 @@
           <a:noFill/>
         </p:spPr>
         <p:txBody>
-          <a:bodyPr wrap="square" lIns="0" tIns="0" rIns="0" bIns="0" anchor="t">
+          <a:bodyPr wrap="square" anchor="t" lIns="0" rIns="0" tIns="0" bIns="0">
             <a:spAutoFit/>
           </a:bodyPr>
           <a:lstStyle/>
@@ -13737,7 +13386,7 @@
                 </a:solidFill>
                 <a:latin typeface="Arial"/>
               </a:rPr>
-              <a:t>ARNE — THE CLAIM, THEN THE LADDER · MODULE 3</a:t>
+              <a:t>ARNE — THE CLAIM, THEN THE LADDER · MODULE 2</a:t>
             </a:r>
           </a:p>
         </p:txBody>
@@ -13759,7 +13408,7 @@
           <a:noFill/>
         </p:spPr>
         <p:txBody>
-          <a:bodyPr wrap="square" lIns="0" tIns="0" rIns="0" bIns="0" anchor="t">
+          <a:bodyPr wrap="square" anchor="t" lIns="0" rIns="0" tIns="0" bIns="0">
             <a:spAutoFit/>
           </a:bodyPr>
           <a:lstStyle/>
@@ -13801,7 +13450,7 @@
           <a:noFill/>
         </p:spPr>
         <p:txBody>
-          <a:bodyPr wrap="square" lIns="0" tIns="0" rIns="0" bIns="0" anchor="t">
+          <a:bodyPr wrap="square" anchor="t" lIns="0" rIns="0" tIns="0" bIns="0">
             <a:spAutoFit/>
           </a:bodyPr>
           <a:lstStyle/>
@@ -13867,7 +13516,7 @@
           </a:fontRef>
         </p:style>
         <p:txBody>
-          <a:bodyPr wrap="square" lIns="365760" rIns="365760" rtlCol="0" anchor="ctr"/>
+          <a:bodyPr rtlCol="0" anchor="ctr" wrap="square" lIns="365760" rIns="365760"/>
           <a:lstStyle/>
           <a:p>
             <a:pPr algn="ctr">
@@ -13923,7 +13572,7 @@
                 </a:solidFill>
                 <a:latin typeface="Arial"/>
               </a:rPr>
-              <a:t>3_querylib/TIP_for_PATLIBs_QueryLib.ipynb</a:t>
+              <a:t>2_querylib/TIP_for_PATLIBs_QueryLib.ipynb</a:t>
             </a:r>
           </a:p>
           <a:p>
@@ -13986,11 +13635,10 @@
           </a:fontRef>
         </p:style>
         <p:txBody>
-          <a:bodyPr wrap="square" rtlCol="0" anchor="ctr"/>
+          <a:bodyPr rtlCol="0" anchor="ctr" wrap="square"/>
           <a:lstStyle/>
           <a:p>
             <a:pPr algn="ctr"/>
-            <a:endParaRPr/>
           </a:p>
         </p:txBody>
       </p:sp>
@@ -14011,7 +13659,7 @@
           <a:noFill/>
         </p:spPr>
         <p:txBody>
-          <a:bodyPr wrap="square" lIns="0" tIns="0" rIns="0" bIns="0" anchor="t">
+          <a:bodyPr wrap="square" anchor="t" lIns="0" rIns="0" tIns="0" bIns="0">
             <a:spAutoFit/>
           </a:bodyPr>
           <a:lstStyle/>
@@ -14053,7 +13701,7 @@
           <a:noFill/>
         </p:spPr>
         <p:txBody>
-          <a:bodyPr wrap="square" lIns="0" tIns="0" rIns="0" bIns="0" anchor="t">
+          <a:bodyPr wrap="square" anchor="t" lIns="0" rIns="0" tIns="0" bIns="0">
             <a:spAutoFit/>
           </a:bodyPr>
           <a:lstStyle/>
@@ -14155,11 +13803,10 @@
           </a:fontRef>
         </p:style>
         <p:txBody>
-          <a:bodyPr wrap="square" rtlCol="0" anchor="ctr"/>
+          <a:bodyPr rtlCol="0" anchor="ctr" wrap="square"/>
           <a:lstStyle/>
           <a:p>
             <a:pPr algn="ctr"/>
-            <a:endParaRPr/>
           </a:p>
         </p:txBody>
       </p:sp>
@@ -14180,7 +13827,7 @@
           <a:noFill/>
         </p:spPr>
         <p:txBody>
-          <a:bodyPr wrap="square" lIns="0" tIns="0" rIns="0" bIns="0" anchor="t">
+          <a:bodyPr wrap="square" anchor="t" lIns="0" rIns="0" tIns="0" bIns="0">
             <a:spAutoFit/>
           </a:bodyPr>
           <a:lstStyle/>
@@ -14222,7 +13869,7 @@
           <a:noFill/>
         </p:spPr>
         <p:txBody>
-          <a:bodyPr wrap="square" lIns="0" tIns="0" rIns="0" bIns="0" anchor="t">
+          <a:bodyPr wrap="square" anchor="t" lIns="0" rIns="0" tIns="0" bIns="0">
             <a:spAutoFit/>
           </a:bodyPr>
           <a:lstStyle/>
@@ -14324,11 +13971,10 @@
           </a:fontRef>
         </p:style>
         <p:txBody>
-          <a:bodyPr wrap="square" rtlCol="0" anchor="ctr"/>
+          <a:bodyPr rtlCol="0" anchor="ctr" wrap="square"/>
           <a:lstStyle/>
           <a:p>
             <a:pPr algn="ctr"/>
-            <a:endParaRPr/>
           </a:p>
         </p:txBody>
       </p:sp>
@@ -14349,7 +13995,7 @@
           <a:noFill/>
         </p:spPr>
         <p:txBody>
-          <a:bodyPr wrap="square" lIns="0" tIns="0" rIns="0" bIns="0" anchor="t">
+          <a:bodyPr wrap="square" anchor="t" lIns="0" rIns="0" tIns="0" bIns="0">
             <a:spAutoFit/>
           </a:bodyPr>
           <a:lstStyle/>
@@ -14391,7 +14037,7 @@
           <a:noFill/>
         </p:spPr>
         <p:txBody>
-          <a:bodyPr wrap="square" lIns="0" tIns="0" rIns="0" bIns="0" anchor="t">
+          <a:bodyPr wrap="square" anchor="t" lIns="0" rIns="0" tIns="0" bIns="0">
             <a:spAutoFit/>
           </a:bodyPr>
           <a:lstStyle/>
@@ -14471,7 +14117,7 @@
           <a:noFill/>
         </p:spPr>
         <p:txBody>
-          <a:bodyPr wrap="square" lIns="0" tIns="0" rIns="0" bIns="0" anchor="t">
+          <a:bodyPr wrap="square" anchor="t" lIns="0" rIns="0" tIns="0" bIns="0">
             <a:spAutoFit/>
           </a:bodyPr>
           <a:lstStyle/>
@@ -14491,7 +14137,7 @@
                 </a:solidFill>
                 <a:latin typeface="Arial"/>
               </a:rPr>
-              <a:t>3_querylib/</a:t>
+              <a:t>2_querylib/</a:t>
             </a:r>
           </a:p>
         </p:txBody>
@@ -14513,7 +14159,7 @@
           <a:noFill/>
         </p:spPr>
         <p:txBody>
-          <a:bodyPr wrap="square" lIns="0" tIns="0" rIns="0" bIns="0" anchor="t">
+          <a:bodyPr wrap="square" anchor="t" lIns="0" rIns="0" tIns="0" bIns="0">
             <a:spAutoFit/>
           </a:bodyPr>
           <a:lstStyle/>
@@ -14547,7 +14193,7 @@
 </file>
 
 <file path=ppt/slides/slide7.xml><?xml version="1.0" encoding="utf-8"?>
-<p:sld xmlns:a="http://schemas.openxmlformats.org/drawingml/2006/main" xmlns:r="http://schemas.openxmlformats.org/officeDocument/2006/relationships" xmlns:p="http://schemas.openxmlformats.org/presentationml/2006/main">
+<p:sld xmlns:a="http://schemas.openxmlformats.org/drawingml/2006/main" xmlns:p="http://schemas.openxmlformats.org/presentationml/2006/main" xmlns:r="http://schemas.openxmlformats.org/officeDocument/2006/relationships">
   <p:cSld>
     <p:spTree>
       <p:nvGrpSpPr>
@@ -14555,14 +14201,7 @@
         <p:cNvGrpSpPr/>
         <p:nvPr/>
       </p:nvGrpSpPr>
-      <p:grpSpPr>
-        <a:xfrm>
-          <a:off x="0" y="0"/>
-          <a:ext cx="0" cy="0"/>
-          <a:chOff x="0" y="0"/>
-          <a:chExt cx="0" cy="0"/>
-        </a:xfrm>
-      </p:grpSpPr>
+      <p:grpSpPr/>
       <p:sp>
         <p:nvSpPr>
           <p:cNvPr id="2" name="TextBox 1"/>
@@ -14580,7 +14219,7 @@
           <a:noFill/>
         </p:spPr>
         <p:txBody>
-          <a:bodyPr wrap="square" lIns="0" tIns="0" rIns="0" bIns="0" anchor="t">
+          <a:bodyPr wrap="square" anchor="t" lIns="0" rIns="0" tIns="0" bIns="0">
             <a:spAutoFit/>
           </a:bodyPr>
           <a:lstStyle/>
@@ -14600,7 +14239,7 @@
                 </a:solidFill>
                 <a:latin typeface="Arial"/>
               </a:rPr>
-              <a:t>ARNE — THE CLAIM, THEN THE LADDER · MODULE 3</a:t>
+              <a:t>ARNE — THE CLAIM, THEN THE LADDER · MODULE 2</a:t>
             </a:r>
           </a:p>
         </p:txBody>
@@ -14622,7 +14261,7 @@
           <a:noFill/>
         </p:spPr>
         <p:txBody>
-          <a:bodyPr wrap="square" lIns="0" tIns="0" rIns="0" bIns="0" anchor="t">
+          <a:bodyPr wrap="square" anchor="t" lIns="0" rIns="0" tIns="0" bIns="0">
             <a:spAutoFit/>
           </a:bodyPr>
           <a:lstStyle/>
@@ -14664,7 +14303,7 @@
           <a:noFill/>
         </p:spPr>
         <p:txBody>
-          <a:bodyPr wrap="square" lIns="0" tIns="0" rIns="0" bIns="0" anchor="t">
+          <a:bodyPr wrap="square" anchor="t" lIns="0" rIns="0" tIns="0" bIns="0">
             <a:spAutoFit/>
           </a:bodyPr>
           <a:lstStyle/>
@@ -14728,7 +14367,7 @@
           </a:fontRef>
         </p:style>
         <p:txBody>
-          <a:bodyPr wrap="square" lIns="274320" rIns="274320" rtlCol="0" anchor="ctr"/>
+          <a:bodyPr rtlCol="0" anchor="ctr" wrap="square" lIns="274320" rIns="274320"/>
           <a:lstStyle/>
           <a:p>
             <a:pPr algn="l">
@@ -14740,7 +14379,7 @@
               </a:spcAft>
             </a:pPr>
             <a:r>
-              <a:rPr sz="2000" b="0" i="0" dirty="0">
+              <a:rPr sz="1400" b="0" i="0">
                 <a:solidFill>
                   <a:srgbClr val="1A1A1A"/>
                 </a:solidFill>
@@ -14790,7 +14429,7 @@
           </a:fontRef>
         </p:style>
         <p:txBody>
-          <a:bodyPr wrap="square" lIns="274320" rIns="274320" rtlCol="0" anchor="ctr"/>
+          <a:bodyPr rtlCol="0" anchor="ctr" wrap="square" lIns="274320" rIns="274320"/>
           <a:lstStyle/>
           <a:p>
             <a:pPr algn="l">
@@ -14802,7 +14441,7 @@
               </a:spcAft>
             </a:pPr>
             <a:r>
-              <a:rPr sz="2000" b="0" i="0">
+              <a:rPr sz="1400" b="0" i="0">
                 <a:solidFill>
                   <a:srgbClr val="1A1A1A"/>
                 </a:solidFill>
@@ -14830,7 +14469,7 @@
           <a:noFill/>
         </p:spPr>
         <p:txBody>
-          <a:bodyPr wrap="square" lIns="0" tIns="0" rIns="0" bIns="0" anchor="t">
+          <a:bodyPr wrap="square" anchor="t" lIns="0" rIns="0" tIns="0" bIns="0">
             <a:spAutoFit/>
           </a:bodyPr>
           <a:lstStyle/>
@@ -14896,19 +14535,19 @@
           </a:fontRef>
         </p:style>
         <p:txBody>
-          <a:bodyPr wrap="square" lIns="310896" rIns="310896" rtlCol="0" anchor="ctr"/>
-          <a:lstStyle/>
-          <a:p>
-            <a:pPr algn="l">
-              <a:lnSpc>
-                <a:spcPct val="125000"/>
-              </a:lnSpc>
-              <a:spcAft>
-                <a:spcPts val="0"/>
-              </a:spcAft>
-            </a:pPr>
-            <a:r>
-              <a:rPr sz="2400" b="1" i="0">
+          <a:bodyPr rtlCol="0" anchor="ctr" wrap="square" lIns="310896" rIns="310896"/>
+          <a:lstStyle/>
+          <a:p>
+            <a:pPr algn="l">
+              <a:lnSpc>
+                <a:spcPct val="125000"/>
+              </a:lnSpc>
+              <a:spcAft>
+                <a:spcPts val="0"/>
+              </a:spcAft>
+            </a:pPr>
+            <a:r>
+              <a:rPr sz="1600" b="1" i="0">
                 <a:solidFill>
                   <a:srgbClr val="BE0F05"/>
                 </a:solidFill>
@@ -14936,7 +14575,7 @@
           <a:noFill/>
         </p:spPr>
         <p:txBody>
-          <a:bodyPr wrap="square" lIns="0" tIns="0" rIns="0" bIns="0" anchor="t">
+          <a:bodyPr wrap="square" anchor="t" lIns="0" rIns="0" tIns="0" bIns="0">
             <a:spAutoFit/>
           </a:bodyPr>
           <a:lstStyle/>
@@ -14956,7 +14595,7 @@
                 </a:solidFill>
                 <a:latin typeface="Arial"/>
               </a:rPr>
-              <a:t>3_querylib/</a:t>
+              <a:t>2_querylib/</a:t>
             </a:r>
           </a:p>
         </p:txBody>
@@ -14978,7 +14617,7 @@
           <a:noFill/>
         </p:spPr>
         <p:txBody>
-          <a:bodyPr wrap="square" lIns="0" tIns="0" rIns="0" bIns="0" anchor="t">
+          <a:bodyPr wrap="square" anchor="t" lIns="0" rIns="0" tIns="0" bIns="0">
             <a:spAutoFit/>
           </a:bodyPr>
           <a:lstStyle/>
@@ -15012,7 +14651,7 @@
 </file>
 
 <file path=ppt/slides/slide8.xml><?xml version="1.0" encoding="utf-8"?>
-<p:sld xmlns:a="http://schemas.openxmlformats.org/drawingml/2006/main" xmlns:r="http://schemas.openxmlformats.org/officeDocument/2006/relationships" xmlns:p="http://schemas.openxmlformats.org/presentationml/2006/main">
+<p:sld xmlns:a="http://schemas.openxmlformats.org/drawingml/2006/main" xmlns:p="http://schemas.openxmlformats.org/presentationml/2006/main" xmlns:r="http://schemas.openxmlformats.org/officeDocument/2006/relationships">
   <p:cSld>
     <p:spTree>
       <p:nvGrpSpPr>
@@ -15020,14 +14659,7 @@
         <p:cNvGrpSpPr/>
         <p:nvPr/>
       </p:nvGrpSpPr>
-      <p:grpSpPr>
-        <a:xfrm>
-          <a:off x="0" y="0"/>
-          <a:ext cx="0" cy="0"/>
-          <a:chOff x="0" y="0"/>
-          <a:chExt cx="0" cy="0"/>
-        </a:xfrm>
-      </p:grpSpPr>
+      <p:grpSpPr/>
       <p:sp>
         <p:nvSpPr>
           <p:cNvPr id="2" name="TextBox 1"/>
@@ -15045,7 +14677,7 @@
           <a:noFill/>
         </p:spPr>
         <p:txBody>
-          <a:bodyPr wrap="square" lIns="0" tIns="0" rIns="0" bIns="0" anchor="t">
+          <a:bodyPr wrap="square" anchor="t" lIns="0" rIns="0" tIns="0" bIns="0">
             <a:spAutoFit/>
           </a:bodyPr>
           <a:lstStyle/>
@@ -15065,7 +14697,7 @@
                 </a:solidFill>
                 <a:latin typeface="Arial"/>
               </a:rPr>
-              <a:t>ARNE — THE CLAIM, THEN THE LADDER · MODULE 4</a:t>
+              <a:t>ARNE — THE CLAIM, THEN THE LADDER · MODULE 3</a:t>
             </a:r>
           </a:p>
         </p:txBody>
@@ -15079,15 +14711,15 @@
         <p:spPr>
           <a:xfrm>
             <a:off x="777240" y="868680"/>
-            <a:ext cx="10637215" cy="468398"/>
-          </a:xfrm>
-          <a:prstGeom prst="rect">
-            <a:avLst/>
-          </a:prstGeom>
-          <a:noFill/>
-        </p:spPr>
-        <p:txBody>
-          <a:bodyPr wrap="square" lIns="0" tIns="0" rIns="0" bIns="0" anchor="t">
+            <a:ext cx="10637215" cy="914400"/>
+          </a:xfrm>
+          <a:prstGeom prst="rect">
+            <a:avLst/>
+          </a:prstGeom>
+          <a:noFill/>
+        </p:spPr>
+        <p:txBody>
+          <a:bodyPr wrap="square" anchor="t" lIns="0" rIns="0" tIns="0" bIns="0">
             <a:spAutoFit/>
           </a:bodyPr>
           <a:lstStyle/>
@@ -15101,31 +14733,13 @@
               </a:spcAft>
             </a:pPr>
             <a:r>
-              <a:rPr sz="3000" b="1" i="0" dirty="0">
+              <a:rPr sz="3000" b="1" i="0">
                 <a:solidFill>
                   <a:srgbClr val="1A1A1A"/>
                 </a:solidFill>
                 <a:latin typeface="Arial"/>
               </a:rPr>
-              <a:t>Module </a:t>
-            </a:r>
-            <a:r>
-              <a:rPr lang="de-DE" sz="3000" b="1" i="0" dirty="0">
-                <a:solidFill>
-                  <a:srgbClr val="1A1A1A"/>
-                </a:solidFill>
-                <a:latin typeface="Arial"/>
-              </a:rPr>
-              <a:t>3</a:t>
-            </a:r>
-            <a:r>
-              <a:rPr sz="3000" b="1" i="0" dirty="0">
-                <a:solidFill>
-                  <a:srgbClr val="1A1A1A"/>
-                </a:solidFill>
-                <a:latin typeface="Arial"/>
-              </a:rPr>
-              <a:t> — PATSTAT Explorer</a:t>
+              <a:t>Module 3 — PATSTAT Explorer</a:t>
             </a:r>
           </a:p>
         </p:txBody>
@@ -15169,19 +14783,19 @@
           </a:fontRef>
         </p:style>
         <p:txBody>
-          <a:bodyPr wrap="square" lIns="310896" tIns="182880" rIns="310896" bIns="182880" rtlCol="0" anchor="ctr"/>
-          <a:lstStyle/>
-          <a:p>
-            <a:pPr algn="l">
-              <a:lnSpc>
-                <a:spcPct val="125000"/>
-              </a:lnSpc>
-              <a:spcAft>
-                <a:spcPts val="0"/>
-              </a:spcAft>
-            </a:pPr>
-            <a:r>
-              <a:rPr sz="2400" b="0" i="1" dirty="0">
+          <a:bodyPr rtlCol="0" anchor="ctr" wrap="square" lIns="310896" rIns="310896" tIns="182880" bIns="182880"/>
+          <a:lstStyle/>
+          <a:p>
+            <a:pPr algn="l">
+              <a:lnSpc>
+                <a:spcPct val="125000"/>
+              </a:lnSpc>
+              <a:spcAft>
+                <a:spcPts val="0"/>
+              </a:spcAft>
+            </a:pPr>
+            <a:r>
+              <a:rPr sz="1800" b="0" i="1">
                 <a:solidFill>
                   <a:srgbClr val="BE0F05"/>
                 </a:solidFill>
@@ -15209,7 +14823,7 @@
           <a:noFill/>
         </p:spPr>
         <p:txBody>
-          <a:bodyPr wrap="square" lIns="0" tIns="0" rIns="0" bIns="0" anchor="t">
+          <a:bodyPr wrap="square" anchor="t" lIns="0" rIns="0" tIns="0" bIns="0">
             <a:spAutoFit/>
           </a:bodyPr>
           <a:lstStyle/>
@@ -15271,11 +14885,10 @@
           </a:fontRef>
         </p:style>
         <p:txBody>
-          <a:bodyPr wrap="square" rtlCol="0" anchor="ctr"/>
+          <a:bodyPr rtlCol="0" anchor="ctr" wrap="square"/>
           <a:lstStyle/>
           <a:p>
             <a:pPr algn="ctr"/>
-            <a:endParaRPr/>
           </a:p>
         </p:txBody>
       </p:sp>
@@ -15288,29 +14901,29 @@
         <p:spPr>
           <a:xfrm>
             <a:off x="1106424" y="3840480"/>
-            <a:ext cx="10308031" cy="312265"/>
-          </a:xfrm>
-          <a:prstGeom prst="rect">
-            <a:avLst/>
-          </a:prstGeom>
-          <a:noFill/>
-        </p:spPr>
-        <p:txBody>
-          <a:bodyPr wrap="square" lIns="0" tIns="0" rIns="0" bIns="0" anchor="t">
-            <a:spAutoFit/>
-          </a:bodyPr>
-          <a:lstStyle/>
-          <a:p>
-            <a:pPr algn="l">
-              <a:lnSpc>
-                <a:spcPct val="125000"/>
-              </a:lnSpc>
-              <a:spcAft>
-                <a:spcPts val="0"/>
-              </a:spcAft>
-            </a:pPr>
-            <a:r>
-              <a:rPr b="0" i="0">
+            <a:ext cx="10308031" cy="502920"/>
+          </a:xfrm>
+          <a:prstGeom prst="rect">
+            <a:avLst/>
+          </a:prstGeom>
+          <a:noFill/>
+        </p:spPr>
+        <p:txBody>
+          <a:bodyPr wrap="square" anchor="t" lIns="0" rIns="0" tIns="0" bIns="0">
+            <a:spAutoFit/>
+          </a:bodyPr>
+          <a:lstStyle/>
+          <a:p>
+            <a:pPr algn="l">
+              <a:lnSpc>
+                <a:spcPct val="125000"/>
+              </a:lnSpc>
+              <a:spcAft>
+                <a:spcPts val="0"/>
+              </a:spcAft>
+            </a:pPr>
+            <a:r>
+              <a:rPr sz="1400" b="0" i="0">
                 <a:solidFill>
                   <a:srgbClr val="1A1A1A"/>
                 </a:solidFill>
@@ -15358,11 +14971,10 @@
           </a:fontRef>
         </p:style>
         <p:txBody>
-          <a:bodyPr wrap="square" rtlCol="0" anchor="ctr"/>
+          <a:bodyPr rtlCol="0" anchor="ctr" wrap="square"/>
           <a:lstStyle/>
           <a:p>
             <a:pPr algn="ctr"/>
-            <a:endParaRPr/>
           </a:p>
         </p:txBody>
       </p:sp>
@@ -15375,29 +14987,29 @@
         <p:spPr>
           <a:xfrm>
             <a:off x="1106424" y="4407408"/>
-            <a:ext cx="10308031" cy="312265"/>
-          </a:xfrm>
-          <a:prstGeom prst="rect">
-            <a:avLst/>
-          </a:prstGeom>
-          <a:noFill/>
-        </p:spPr>
-        <p:txBody>
-          <a:bodyPr wrap="square" lIns="0" tIns="0" rIns="0" bIns="0" anchor="t">
-            <a:spAutoFit/>
-          </a:bodyPr>
-          <a:lstStyle/>
-          <a:p>
-            <a:pPr algn="l">
-              <a:lnSpc>
-                <a:spcPct val="125000"/>
-              </a:lnSpc>
-              <a:spcAft>
-                <a:spcPts val="0"/>
-              </a:spcAft>
-            </a:pPr>
-            <a:r>
-              <a:rPr b="0" i="0">
+            <a:ext cx="10308031" cy="502920"/>
+          </a:xfrm>
+          <a:prstGeom prst="rect">
+            <a:avLst/>
+          </a:prstGeom>
+          <a:noFill/>
+        </p:spPr>
+        <p:txBody>
+          <a:bodyPr wrap="square" anchor="t" lIns="0" rIns="0" tIns="0" bIns="0">
+            <a:spAutoFit/>
+          </a:bodyPr>
+          <a:lstStyle/>
+          <a:p>
+            <a:pPr algn="l">
+              <a:lnSpc>
+                <a:spcPct val="125000"/>
+              </a:lnSpc>
+              <a:spcAft>
+                <a:spcPts val="0"/>
+              </a:spcAft>
+            </a:pPr>
+            <a:r>
+              <a:rPr sz="1400" b="0" i="0">
                 <a:solidFill>
                   <a:srgbClr val="1A1A1A"/>
                 </a:solidFill>
@@ -15445,11 +15057,10 @@
           </a:fontRef>
         </p:style>
         <p:txBody>
-          <a:bodyPr wrap="square" rtlCol="0" anchor="ctr"/>
+          <a:bodyPr rtlCol="0" anchor="ctr" wrap="square"/>
           <a:lstStyle/>
           <a:p>
             <a:pPr algn="ctr"/>
-            <a:endParaRPr/>
           </a:p>
         </p:txBody>
       </p:sp>
@@ -15462,29 +15073,29 @@
         <p:spPr>
           <a:xfrm>
             <a:off x="1106424" y="4974336"/>
-            <a:ext cx="10308031" cy="312265"/>
-          </a:xfrm>
-          <a:prstGeom prst="rect">
-            <a:avLst/>
-          </a:prstGeom>
-          <a:noFill/>
-        </p:spPr>
-        <p:txBody>
-          <a:bodyPr wrap="square" lIns="0" tIns="0" rIns="0" bIns="0" anchor="t">
-            <a:spAutoFit/>
-          </a:bodyPr>
-          <a:lstStyle/>
-          <a:p>
-            <a:pPr algn="l">
-              <a:lnSpc>
-                <a:spcPct val="125000"/>
-              </a:lnSpc>
-              <a:spcAft>
-                <a:spcPts val="0"/>
-              </a:spcAft>
-            </a:pPr>
-            <a:r>
-              <a:rPr b="0" i="0">
+            <a:ext cx="10308031" cy="502920"/>
+          </a:xfrm>
+          <a:prstGeom prst="rect">
+            <a:avLst/>
+          </a:prstGeom>
+          <a:noFill/>
+        </p:spPr>
+        <p:txBody>
+          <a:bodyPr wrap="square" anchor="t" lIns="0" rIns="0" tIns="0" bIns="0">
+            <a:spAutoFit/>
+          </a:bodyPr>
+          <a:lstStyle/>
+          <a:p>
+            <a:pPr algn="l">
+              <a:lnSpc>
+                <a:spcPct val="125000"/>
+              </a:lnSpc>
+              <a:spcAft>
+                <a:spcPts val="0"/>
+              </a:spcAft>
+            </a:pPr>
+            <a:r>
+              <a:rPr sz="1400" b="0" i="0">
                 <a:solidFill>
                   <a:srgbClr val="1A1A1A"/>
                 </a:solidFill>
@@ -15512,7 +15123,7 @@
           <a:noFill/>
         </p:spPr>
         <p:txBody>
-          <a:bodyPr wrap="square" lIns="0" tIns="0" rIns="0" bIns="0" anchor="t">
+          <a:bodyPr wrap="square" anchor="t" lIns="0" rIns="0" tIns="0" bIns="0">
             <a:spAutoFit/>
           </a:bodyPr>
           <a:lstStyle/>
@@ -15532,7 +15143,7 @@
                 </a:solidFill>
                 <a:latin typeface="Arial"/>
               </a:rPr>
-              <a:t>4_patstat_explorer/</a:t>
+              <a:t>3_patstat_explorer/</a:t>
             </a:r>
           </a:p>
         </p:txBody>
@@ -15554,7 +15165,7 @@
           <a:noFill/>
         </p:spPr>
         <p:txBody>
-          <a:bodyPr wrap="square" lIns="0" tIns="0" rIns="0" bIns="0" anchor="t">
+          <a:bodyPr wrap="square" anchor="t" lIns="0" rIns="0" tIns="0" bIns="0">
             <a:spAutoFit/>
           </a:bodyPr>
           <a:lstStyle/>
@@ -15588,7 +15199,7 @@
 </file>
 
 <file path=ppt/slides/slide9.xml><?xml version="1.0" encoding="utf-8"?>
-<p:sld xmlns:a="http://schemas.openxmlformats.org/drawingml/2006/main" xmlns:r="http://schemas.openxmlformats.org/officeDocument/2006/relationships" xmlns:p="http://schemas.openxmlformats.org/presentationml/2006/main">
+<p:sld xmlns:a="http://schemas.openxmlformats.org/drawingml/2006/main" xmlns:p="http://schemas.openxmlformats.org/presentationml/2006/main" xmlns:r="http://schemas.openxmlformats.org/officeDocument/2006/relationships">
   <p:cSld>
     <p:spTree>
       <p:nvGrpSpPr>
@@ -15596,14 +15207,7 @@
         <p:cNvGrpSpPr/>
         <p:nvPr/>
       </p:nvGrpSpPr>
-      <p:grpSpPr>
-        <a:xfrm>
-          <a:off x="0" y="0"/>
-          <a:ext cx="0" cy="0"/>
-          <a:chOff x="0" y="0"/>
-          <a:chExt cx="0" cy="0"/>
-        </a:xfrm>
-      </p:grpSpPr>
+      <p:grpSpPr/>
       <p:sp>
         <p:nvSpPr>
           <p:cNvPr id="2" name="TextBox 1"/>
@@ -15621,7 +15225,7 @@
           <a:noFill/>
         </p:spPr>
         <p:txBody>
-          <a:bodyPr wrap="square" lIns="0" tIns="0" rIns="0" bIns="0" anchor="t">
+          <a:bodyPr wrap="square" anchor="t" lIns="0" rIns="0" tIns="0" bIns="0">
             <a:spAutoFit/>
           </a:bodyPr>
           <a:lstStyle/>
@@ -15641,7 +15245,7 @@
                 </a:solidFill>
                 <a:latin typeface="Arial"/>
               </a:rPr>
-              <a:t>ARNE — THE CLAIM, THEN THE LADDER · MODULE 4</a:t>
+              <a:t>ARNE — THE CLAIM, THEN THE LADDER · MODULE 3</a:t>
             </a:r>
           </a:p>
         </p:txBody>
@@ -15663,7 +15267,7 @@
           <a:noFill/>
         </p:spPr>
         <p:txBody>
-          <a:bodyPr wrap="square" lIns="0" tIns="0" rIns="0" bIns="0" anchor="t">
+          <a:bodyPr wrap="square" anchor="t" lIns="0" rIns="0" tIns="0" bIns="0">
             <a:spAutoFit/>
           </a:bodyPr>
           <a:lstStyle/>
@@ -15705,7 +15309,7 @@
           <a:noFill/>
         </p:spPr>
         <p:txBody>
-          <a:bodyPr wrap="square" lIns="0" tIns="0" rIns="0" bIns="0" anchor="t">
+          <a:bodyPr wrap="square" anchor="t" lIns="0" rIns="0" tIns="0" bIns="0">
             <a:spAutoFit/>
           </a:bodyPr>
           <a:lstStyle/>
@@ -15732,7 +15336,7 @@
       </p:sp>
       <p:pic>
         <p:nvPicPr>
-          <p:cNvPr id="5" name="Picture 4" descr="04.png"/>
+          <p:cNvPr id="5" name="Picture 4" descr="03.png"/>
           <p:cNvPicPr>
             <a:picLocks noChangeAspect="1"/>
           </p:cNvPicPr>
@@ -15746,8 +15350,8 @@
         </p:blipFill>
         <p:spPr>
           <a:xfrm>
-            <a:off x="348707" y="2184794"/>
-            <a:ext cx="6861230" cy="2647810"/>
+            <a:off x="777240" y="2491116"/>
+            <a:ext cx="6400800" cy="2470126"/>
           </a:xfrm>
           <a:prstGeom prst="rect">
             <a:avLst/>
@@ -15793,11 +15397,10 @@
           </a:fontRef>
         </p:style>
         <p:txBody>
-          <a:bodyPr wrap="square" rtlCol="0" anchor="ctr"/>
+          <a:bodyPr rtlCol="0" anchor="ctr" wrap="square"/>
           <a:lstStyle/>
           <a:p>
             <a:pPr algn="ctr"/>
-            <a:endParaRPr/>
           </a:p>
         </p:txBody>
       </p:sp>
@@ -15818,7 +15421,7 @@
           <a:noFill/>
         </p:spPr>
         <p:txBody>
-          <a:bodyPr wrap="square" lIns="0" tIns="0" rIns="0" bIns="0" anchor="t">
+          <a:bodyPr wrap="square" anchor="t" lIns="0" rIns="0" tIns="0" bIns="0">
             <a:spAutoFit/>
           </a:bodyPr>
           <a:lstStyle/>
@@ -15860,7 +15463,7 @@
           <a:noFill/>
         </p:spPr>
         <p:txBody>
-          <a:bodyPr wrap="square" lIns="0" tIns="0" rIns="0" bIns="0" anchor="t">
+          <a:bodyPr wrap="square" anchor="t" lIns="0" rIns="0" tIns="0" bIns="0">
             <a:spAutoFit/>
           </a:bodyPr>
           <a:lstStyle/>
@@ -15962,11 +15565,10 @@
           </a:fontRef>
         </p:style>
         <p:txBody>
-          <a:bodyPr wrap="square" rtlCol="0" anchor="ctr"/>
+          <a:bodyPr rtlCol="0" anchor="ctr" wrap="square"/>
           <a:lstStyle/>
           <a:p>
             <a:pPr algn="ctr"/>
-            <a:endParaRPr/>
           </a:p>
         </p:txBody>
       </p:sp>
@@ -15987,7 +15589,7 @@
           <a:noFill/>
         </p:spPr>
         <p:txBody>
-          <a:bodyPr wrap="square" lIns="0" tIns="0" rIns="0" bIns="0" anchor="t">
+          <a:bodyPr wrap="square" anchor="t" lIns="0" rIns="0" tIns="0" bIns="0">
             <a:spAutoFit/>
           </a:bodyPr>
           <a:lstStyle/>
@@ -16029,7 +15631,7 @@
           <a:noFill/>
         </p:spPr>
         <p:txBody>
-          <a:bodyPr wrap="square" lIns="0" tIns="0" rIns="0" bIns="0" anchor="t">
+          <a:bodyPr wrap="square" anchor="t" lIns="0" rIns="0" tIns="0" bIns="0">
             <a:spAutoFit/>
           </a:bodyPr>
           <a:lstStyle/>
@@ -16131,11 +15733,10 @@
           </a:fontRef>
         </p:style>
         <p:txBody>
-          <a:bodyPr wrap="square" rtlCol="0" anchor="ctr"/>
+          <a:bodyPr rtlCol="0" anchor="ctr" wrap="square"/>
           <a:lstStyle/>
           <a:p>
             <a:pPr algn="ctr"/>
-            <a:endParaRPr/>
           </a:p>
         </p:txBody>
       </p:sp>
@@ -16156,7 +15757,7 @@
           <a:noFill/>
         </p:spPr>
         <p:txBody>
-          <a:bodyPr wrap="square" lIns="0" tIns="0" rIns="0" bIns="0" anchor="t">
+          <a:bodyPr wrap="square" anchor="t" lIns="0" rIns="0" tIns="0" bIns="0">
             <a:spAutoFit/>
           </a:bodyPr>
           <a:lstStyle/>
@@ -16198,7 +15799,7 @@
           <a:noFill/>
         </p:spPr>
         <p:txBody>
-          <a:bodyPr wrap="square" lIns="0" tIns="0" rIns="0" bIns="0" anchor="t">
+          <a:bodyPr wrap="square" anchor="t" lIns="0" rIns="0" tIns="0" bIns="0">
             <a:spAutoFit/>
           </a:bodyPr>
           <a:lstStyle/>
@@ -16278,7 +15879,7 @@
           <a:noFill/>
         </p:spPr>
         <p:txBody>
-          <a:bodyPr wrap="square" lIns="0" tIns="0" rIns="0" bIns="0" anchor="t">
+          <a:bodyPr wrap="square" anchor="t" lIns="0" rIns="0" tIns="0" bIns="0">
             <a:spAutoFit/>
           </a:bodyPr>
           <a:lstStyle/>
@@ -16298,7 +15899,7 @@
                 </a:solidFill>
                 <a:latin typeface="Arial"/>
               </a:rPr>
-              <a:t>4_patstat_explorer/</a:t>
+              <a:t>3_patstat_explorer/</a:t>
             </a:r>
           </a:p>
         </p:txBody>
@@ -16320,7 +15921,7 @@
           <a:noFill/>
         </p:spPr>
         <p:txBody>
-          <a:bodyPr wrap="square" lIns="0" tIns="0" rIns="0" bIns="0" anchor="t">
+          <a:bodyPr wrap="square" anchor="t" lIns="0" rIns="0" tIns="0" bIns="0">
             <a:spAutoFit/>
           </a:bodyPr>
           <a:lstStyle/>

--- a/9_documentation/course/TIP4PATLIBS_1_Workshop_v1.pptx
+++ b/9_documentation/course/TIP4PATLIBS_1_Workshop_v1.pptx
@@ -3226,7 +3226,7 @@
                 </a:solidFill>
                 <a:latin typeface="Arial"/>
               </a:rPr>
-              <a:t>PATLIB Workshop · Warsaw · 18 September 2026   ·   Arne Krüger · mtc.berlin  ·  Riccardo Priore · AREA Science Park</a:t>
+              <a:t>PATLIB Workshop · Warsaw · 17 September 2026   ·   Arne Krüger · mtc.berlin  ·  Riccardo Priore · AREA Science Park</a:t>
             </a:r>
           </a:p>
         </p:txBody>
